--- a/docs/presentacion/EcoPunto-EP4.pptx
+++ b/docs/presentacion/EcoPunto-EP4.pptx
@@ -120,19 +120,19 @@
   <p:extLst>
     <p:ext uri="{521415D9-36F7-43E2-AB2F-B90AF26B5E84}">
       <p14:sectionLst xmlns:p14="http://schemas.microsoft.com/office/powerpoint/2010/main">
-        <p14:section name="Inicio" id="{24becc4b-0f92-6fb6-0e2d-e6a57a676ce1}">
+        <p14:section name="Inicio" id="{dad3d929-ea72-93b9-985f-7677ed6760cc}">
           <p14:sldIdLst>
             <p14:sldId id="256"/>
           </p14:sldIdLst>
         </p14:section>
-        <p14:section name="Solución" id="{7a9bb470-8b92-3341-900b-46242ba65856}">
+        <p14:section name="Solución" id="{69eca917-3250-f189-f54f-c507e7d5e069}">
           <p14:sldIdLst>
             <p14:sldId id="257"/>
             <p14:sldId id="258"/>
             <p14:sldId id="259"/>
           </p14:sldIdLst>
         </p14:section>
-        <p14:section name="Mensajería" id="{bf5cb707-23e0-3f9c-8a70-3d0c01c75fe3}">
+        <p14:section name="Mensajería" id="{44f297c6-b98f-bb05-4010-bf6403234e26}">
           <p14:sldIdLst>
             <p14:sldId id="260"/>
             <p14:sldId id="261"/>
@@ -141,7 +141,7 @@
             <p14:sldId id="264"/>
           </p14:sldIdLst>
         </p14:section>
-        <p14:section name="Evidencia" id="{8309c464-dfc1-9898-ce8a-15f1c494bbf4}">
+        <p14:section name="Evidencia" id="{eedbc08b-d16b-97d7-9fd2-f96025588a55}">
           <p14:sldIdLst>
             <p14:sldId id="265"/>
             <p14:sldId id="266"/>
@@ -739,7 +739,7 @@
             <a:r>
               <a:rPr lang="en-US" dirty="0"/>
               <a:t>(≈20 s · diapositiva de respaldo)
-Estas capturas son del Management UI del clúster. A la izquierda, las seis colas de tipo quorum repartidas entre los dos nodos, con su dead-letter exchange y routing key. A la derecha, un mensaje inválido que terminó en la DLQ de tickets, con el header x-death que indica de qué cola vino y por qué fue rechazado.
+Las capturas de la izquierda son del Management UI del clúster en AWS: arriba los dos nodos y abajo las seis colas de tipo quorum repartidas entre los dos nodos, con su dead-letter exchange y routing key. A la derecha, de la prueba local con el mismo docker compose, un mensaje inválido que terminó en la DLQ de tickets, con el header x-death que indica de qué cola vino y por qué fue rechazado.
 Si algo falla en la demo en vivo, esta es la evidencia.</a:t>
             </a:r>
             <a:endParaRPr lang="en-US" dirty="0"/>
@@ -4953,7 +4953,7 @@
                 <a:ea typeface="Calibri" pitchFamily="34" charset="-122"/>
                 <a:cs typeface="Calibri" pitchFamily="34" charset="-120"/>
               </a:rPr>
-              <a:t>Clúster: los dos nodos en ejecución</a:t>
+              <a:t>AWS · los dos nodos del clúster en ejecución</a:t>
             </a:r>
             <a:endParaRPr lang="en-US" sz="1200" dirty="0"/>
           </a:p>
@@ -5016,7 +5016,7 @@
                 <a:ea typeface="Calibri" pitchFamily="34" charset="-122"/>
                 <a:cs typeface="Calibri" pitchFamily="34" charset="-120"/>
               </a:rPr>
-              <a:t>6 colas quorum, cada una con su DLX y DLK</a:t>
+              <a:t>AWS · 6 colas quorum, cada una con su DLX y DLK</a:t>
             </a:r>
             <a:endParaRPr lang="en-US" sz="1200" dirty="0"/>
           </a:p>
@@ -5113,7 +5113,7 @@
                 <a:ea typeface="Calibri" pitchFamily="34" charset="-122"/>
                 <a:cs typeface="Calibri" pitchFamily="34" charset="-120"/>
               </a:rPr>
-              <a:t>Mensaje inválido en la DLQ (x-death)</a:t>
+              <a:t>Prueba local · mensaje inválido en la DLQ</a:t>
             </a:r>
             <a:endParaRPr lang="en-US" sz="1200" dirty="0"/>
           </a:p>

--- a/docs/presentacion/EcoPunto-EP4.pptx
+++ b/docs/presentacion/EcoPunto-EP4.pptx
@@ -120,19 +120,19 @@
   <p:extLst>
     <p:ext uri="{521415D9-36F7-43E2-AB2F-B90AF26B5E84}">
       <p14:sectionLst xmlns:p14="http://schemas.microsoft.com/office/powerpoint/2010/main">
-        <p14:section name="Inicio" id="{dad3d929-ea72-93b9-985f-7677ed6760cc}">
+        <p14:section name="Inicio" id="{2ae29a3c-a73a-3651-0db7-74526c962535}">
           <p14:sldIdLst>
             <p14:sldId id="256"/>
           </p14:sldIdLst>
         </p14:section>
-        <p14:section name="Solución" id="{69eca917-3250-f189-f54f-c507e7d5e069}">
+        <p14:section name="Solución" id="{d12c78df-f7ba-c3f8-17c7-89db409ca036}">
           <p14:sldIdLst>
             <p14:sldId id="257"/>
             <p14:sldId id="258"/>
             <p14:sldId id="259"/>
           </p14:sldIdLst>
         </p14:section>
-        <p14:section name="Mensajería" id="{44f297c6-b98f-bb05-4010-bf6403234e26}">
+        <p14:section name="Mensajería" id="{5abb7967-4510-a5d9-3fde-f33eb0d7cb39}">
           <p14:sldIdLst>
             <p14:sldId id="260"/>
             <p14:sldId id="261"/>
@@ -141,7 +141,7 @@
             <p14:sldId id="264"/>
           </p14:sldIdLst>
         </p14:section>
-        <p14:section name="Evidencia" id="{eedbc08b-d16b-97d7-9fd2-f96025588a55}">
+        <p14:section name="Evidencia" id="{98194b95-d40f-5b9a-b2b3-de540df6e5f9}">
           <p14:sldIdLst>
             <p14:sldId id="265"/>
             <p14:sldId id="266"/>
@@ -739,7 +739,7 @@
             <a:r>
               <a:rPr lang="en-US" dirty="0"/>
               <a:t>(≈20 s · diapositiva de respaldo)
-Las capturas de la izquierda son del Management UI del clúster en AWS: arriba los dos nodos y abajo las seis colas de tipo quorum repartidas entre los dos nodos, con su dead-letter exchange y routing key. A la derecha, de la prueba local con el mismo docker compose, un mensaje inválido que terminó en la DLQ de tickets, con el header x-death que indica de qué cola vino y por qué fue rechazado.
+Estas capturas son del Management UI del clúster en AWS. A la izquierda, arriba los dos nodos y abajo las seis colas de tipo quorum repartidas entre los dos nodos, con su dead-letter exchange y routing key. A la derecha, un mensaje inválido que terminó en la DLQ de tickets, con el header x-death que indica de qué cola vino y por qué fue rechazado.
 Si algo falla en la demo en vivo, esta es la evidencia.</a:t>
             </a:r>
             <a:endParaRPr lang="en-US" dirty="0"/>
@@ -4880,7 +4880,7 @@
                 <a:ea typeface="Calibri" pitchFamily="34" charset="-122"/>
                 <a:cs typeface="Calibri" pitchFamily="34" charset="-120"/>
               </a:rPr>
-              <a:t>Evidencia: Management UI de RabbitMQ</a:t>
+              <a:t>Evidencia: RabbitMQ en la nube</a:t>
             </a:r>
             <a:endParaRPr lang="en-US" sz="3000" dirty="0"/>
           </a:p>
@@ -5113,7 +5113,7 @@
                 <a:ea typeface="Calibri" pitchFamily="34" charset="-122"/>
                 <a:cs typeface="Calibri" pitchFamily="34" charset="-120"/>
               </a:rPr>
-              <a:t>Prueba local · mensaje inválido en la DLQ</a:t>
+              <a:t>AWS · mensaje inválido en la DLQ (x-death)</a:t>
             </a:r>
             <a:endParaRPr lang="en-US" sz="1200" dirty="0"/>
           </a:p>

--- a/docs/presentacion/EcoPunto-EP4.pptx
+++ b/docs/presentacion/EcoPunto-EP4.pptx
@@ -16,12 +16,9 @@
     <p:sldId id="264" r:id="rId10"/>
     <p:sldId id="265" r:id="rId11"/>
     <p:sldId id="266" r:id="rId12"/>
-    <p:sldId id="267" r:id="rId13"/>
-    <p:sldId id="268" r:id="rId14"/>
-    <p:sldId id="269" r:id="rId15"/>
   </p:sldIdLst>
   <p:notesMasterIdLst>
-    <p:notesMasterId r:id="rId16"/>
+    <p:notesMasterId r:id="rId13"/>
   </p:notesMasterIdLst>
   <p:sldSz cx="9144000" cy="5143500"/>
   <p:notesSz cx="5143500" cy="9144000"/>
@@ -120,19 +117,19 @@
   <p:extLst>
     <p:ext uri="{521415D9-36F7-43E2-AB2F-B90AF26B5E84}">
       <p14:sectionLst xmlns:p14="http://schemas.microsoft.com/office/powerpoint/2010/main">
-        <p14:section name="Inicio" id="{2ae29a3c-a73a-3651-0db7-74526c962535}">
+        <p14:section name="Inicio" id="{c7eabbaa-8871-1d1a-52e0-4f5ec5ecfab8}">
           <p14:sldIdLst>
             <p14:sldId id="256"/>
           </p14:sldIdLst>
         </p14:section>
-        <p14:section name="Solución" id="{d12c78df-f7ba-c3f8-17c7-89db409ca036}">
+        <p14:section name="Solución" id="{ca5f3b70-b1c9-cc53-6de4-050749cbbe11}">
           <p14:sldIdLst>
             <p14:sldId id="257"/>
             <p14:sldId id="258"/>
             <p14:sldId id="259"/>
           </p14:sldIdLst>
         </p14:section>
-        <p14:section name="Mensajería" id="{5abb7967-4510-a5d9-3fde-f33eb0d7cb39}">
+        <p14:section name="Mensajería" id="{7f45d3bf-37af-5aa3-d43f-e0c612195bf9}">
           <p14:sldIdLst>
             <p14:sldId id="260"/>
             <p14:sldId id="261"/>
@@ -141,13 +138,10 @@
             <p14:sldId id="264"/>
           </p14:sldIdLst>
         </p14:section>
-        <p14:section name="Evidencia" id="{98194b95-d40f-5b9a-b2b3-de540df6e5f9}">
+        <p14:section name="Demo" id="{1db1f029-6fbf-0276-3b45-0eb076c4d163}">
           <p14:sldIdLst>
             <p14:sldId id="265"/>
             <p14:sldId id="266"/>
-            <p14:sldId id="267"/>
-            <p14:sldId id="268"/>
-            <p14:sldId id="269"/>
           </p14:sldIdLst>
         </p14:section>
       </p14:sectionLst>
@@ -554,10 +548,8 @@
           <a:p>
             <a:r>
               <a:rPr lang="en-US" dirty="0"/>
-              <a:t>(≈30 s)
-Hola, soy Jonathan Larraguibel. En la evaluación anterior les mostré EcoPunto con autenticación en Entra ID, un API Gateway y el backend desplegado en AWS.
-En esta etapa le agregué mensajería asíncrona con RabbitMQ: un clúster de dos nodos, colas con su cola de mensajes fallidos, exchanges direct y topic, y cuatro microservicios nuevos. Todo corre en la nube con docker compose.
-Primero les explico la arquitectura y las decisiones, y después lo muestro funcionando en vivo.</a:t>
+              <a:t>(≈10 s)
+Soy Jonathan Larraguibel. En esta etapa agregué mensajería asíncrona con RabbitMQ a EcoPunto. Más que mostrar lo que configuré, voy a explicar por qué tomé cada decisión.</a:t>
             </a:r>
             <a:endParaRPr lang="en-US" dirty="0"/>
           </a:p>
@@ -645,12 +637,13 @@
           <a:p>
             <a:r>
               <a:rPr lang="en-US" dirty="0"/>
-              <a:t>(≈45 s)
-Antes de la presentación ejecuté una batería de pruebas de punta a punta sobre el stack completo: 38 pruebas de API, todas correctas.
-Cubren la seguridad que ya tenía: sin token, con token falso o vencido, 401; con token válido pero sin el permiso, 403.
-Las funciones antiguas siguen funcionando: el CRUD de puntos limpios para el encargado y el rechazo para el usuario sin rol.
-Y las nuevas: crear reportes, transiciones de estado con 409 si no son válidas, tickets, estadísticas y el administrador con sus validaciones.
-Además probé la mensajería: un mensaje con JSON inválido termina en la DLQ con el header x-death, y con ms-tickets detenido la API responde igual en 40 milisegundos y el ticket se genera cuando el servicio vuelve.</a:t>
+              <a:t>(≈4 min 15 s)
+1. API Gateway: rutas, authorizer entra-jwt y CORS.
+2. Entra ID: usuarios del tenant y App Roles.
+3. JWT: /api/tickets sin token → 401; fetch con token inventado → 401; encargado1 en Tickets con la pestaña Red → 200 vía execute-api con Authorization: Bearer; usuario1 → 403.
+4. Flujo: crear reporte (logs PUBLISH, ACK), pasar a revisión (TICKET), resolver, estadísticas.
+5. Falla: {esto no es json en ecopunto.tareas → DLQ con x-death; docker stop/start ecopunto-ms-tickets.
+6. Clúster: docker compose ps, nodos, colas quorum con DLQ, exchanges topic y direct.</a:t>
             </a:r>
             <a:endParaRPr lang="en-US" dirty="0"/>
           </a:p>
@@ -738,9 +731,8 @@
           <a:p>
             <a:r>
               <a:rPr lang="en-US" dirty="0"/>
-              <a:t>(≈20 s · diapositiva de respaldo)
-Estas capturas son del Management UI del clúster en AWS. A la izquierda, arriba los dos nodos y abajo las seis colas de tipo quorum repartidas entre los dos nodos, con su dead-letter exchange y routing key. A la derecha, un mensaje inválido que terminó en la DLQ de tickets, con el header x-death que indica de qué cola vino y por qué fue rechazado.
-Si algo falla en la demo en vivo, esta es la evidencia.</a:t>
+              <a:t>(≈20 s)
+En resumen: hice asíncrono solo lo que no necesita respuesta inmediata; elegí topic para hechos y direct para tareas; publico después del commit y con confirmación; confirmo los mensajes solo después de procesarlos, sin bucles y sin duplicados; y repliqué el broker en un clúster, sabiendo que en producción usaría tres nodos. Gracias, quedo atento a sus preguntas.</a:t>
             </a:r>
             <a:endParaRPr lang="en-US" dirty="0"/>
           </a:p>
@@ -764,283 +756,6 @@
             <a:fld id="{F7021451-1387-4CA6-816F-3879F97B5CBC}" type="slidenum">
               <a:rPr lang="en-US"/>
               <a:t>11</a:t>
-            </a:fld>
-            <a:endParaRPr lang="en-US"/>
-          </a:p>
-        </p:txBody>
-      </p:sp>
-    </p:spTree>
-    <p:extLst>
-      <p:ext uri="{BB962C8B-B14F-4D97-AF65-F5344CB8AC3E}">
-        <p14:creationId xmlns:p14="http://schemas.microsoft.com/office/powerpoint/2010/main" val="1024086991"/>
-      </p:ext>
-    </p:extLst>
-  </p:cSld>
-  <p:clrMapOvr>
-    <a:masterClrMapping/>
-  </p:clrMapOvr>
-</p:notes>
-</file>
-
-<file path=ppt/notesSlides/notesSlide12.xml><?xml version="1.0" encoding="utf-8"?>
-<p:notes xmlns:a="http://schemas.openxmlformats.org/drawingml/2006/main" xmlns:r="http://schemas.openxmlformats.org/officeDocument/2006/relationships" xmlns:p="http://schemas.openxmlformats.org/presentationml/2006/main">
-  <p:cSld>
-    <p:spTree>
-      <p:nvGrpSpPr>
-        <p:cNvPr id="1" name=""/>
-        <p:cNvGrpSpPr/>
-        <p:nvPr/>
-      </p:nvGrpSpPr>
-      <p:grpSpPr>
-        <a:xfrm>
-          <a:off x="0" y="0"/>
-          <a:ext cx="0" cy="0"/>
-          <a:chOff x="0" y="0"/>
-          <a:chExt cx="0" cy="0"/>
-        </a:xfrm>
-      </p:grpSpPr>
-      <p:sp>
-        <p:nvSpPr>
-          <p:cNvPr id="2" name="Slide Image Placeholder 1"/>
-          <p:cNvSpPr>
-            <a:spLocks noGrp="1" noRot="1" noChangeAspect="1"/>
-          </p:cNvSpPr>
-          <p:nvPr>
-            <p:ph type="sldImg"/>
-          </p:nvPr>
-        </p:nvSpPr>
-        <p:spPr/>
-      </p:sp>
-      <p:sp>
-        <p:nvSpPr>
-          <p:cNvPr id="3" name="Notes Placeholder 2"/>
-          <p:cNvSpPr>
-            <a:spLocks noGrp="1"/>
-          </p:cNvSpPr>
-          <p:nvPr>
-            <p:ph type="body" idx="1"/>
-          </p:nvPr>
-        </p:nvSpPr>
-        <p:spPr/>
-        <p:txBody>
-          <a:bodyPr/>
-          <a:lstStyle/>
-          <a:p>
-            <a:r>
-              <a:rPr lang="en-US" dirty="0"/>
-              <a:t>(≈40 s)
-El despliegue usa dos instancias EC2: una para el frontend y otra para el backend, donde docker compose levanta ocho contenedores: PostgreSQL, los dos nodos de RabbitMQ, el backend y los cuatro microservicios.
-El arranque es ordenado: con healthchecks, los servicios esperan a que la base y los dos nodos estén listos.
-Cada microservicio tiene su propia base, con un volumen persistente, y el puerto de PostgreSQL no se expone.
-Ahora las instancias tienen Elastic IP, así que el dominio ya no cambia cuando se reinicia el laboratorio. Y ningún secreto está en el repositorio.</a:t>
-            </a:r>
-            <a:endParaRPr lang="en-US" dirty="0"/>
-          </a:p>
-        </p:txBody>
-      </p:sp>
-      <p:sp>
-        <p:nvSpPr>
-          <p:cNvPr id="4" name="Slide Number Placeholder 3"/>
-          <p:cNvSpPr>
-            <a:spLocks noGrp="1"/>
-          </p:cNvSpPr>
-          <p:nvPr>
-            <p:ph type="sldNum" sz="quarter" idx="10"/>
-          </p:nvPr>
-        </p:nvSpPr>
-        <p:spPr/>
-        <p:txBody>
-          <a:bodyPr/>
-          <a:lstStyle/>
-          <a:p>
-            <a:fld id="{F7021451-1387-4CA6-816F-3879F97B5CBC}" type="slidenum">
-              <a:rPr lang="en-US"/>
-              <a:t>12</a:t>
-            </a:fld>
-            <a:endParaRPr lang="en-US"/>
-          </a:p>
-        </p:txBody>
-      </p:sp>
-    </p:spTree>
-    <p:extLst>
-      <p:ext uri="{BB962C8B-B14F-4D97-AF65-F5344CB8AC3E}">
-        <p14:creationId xmlns:p14="http://schemas.microsoft.com/office/powerpoint/2010/main" val="1024086991"/>
-      </p:ext>
-    </p:extLst>
-  </p:cSld>
-  <p:clrMapOvr>
-    <a:masterClrMapping/>
-  </p:clrMapOvr>
-</p:notes>
-</file>
-
-<file path=ppt/notesSlides/notesSlide13.xml><?xml version="1.0" encoding="utf-8"?>
-<p:notes xmlns:a="http://schemas.openxmlformats.org/drawingml/2006/main" xmlns:r="http://schemas.openxmlformats.org/officeDocument/2006/relationships" xmlns:p="http://schemas.openxmlformats.org/presentationml/2006/main">
-  <p:cSld>
-    <p:spTree>
-      <p:nvGrpSpPr>
-        <p:cNvPr id="1" name=""/>
-        <p:cNvGrpSpPr/>
-        <p:nvPr/>
-      </p:nvGrpSpPr>
-      <p:grpSpPr>
-        <a:xfrm>
-          <a:off x="0" y="0"/>
-          <a:ext cx="0" cy="0"/>
-          <a:chOff x="0" y="0"/>
-          <a:chExt cx="0" cy="0"/>
-        </a:xfrm>
-      </p:grpSpPr>
-      <p:sp>
-        <p:nvSpPr>
-          <p:cNvPr id="2" name="Slide Image Placeholder 1"/>
-          <p:cNvSpPr>
-            <a:spLocks noGrp="1" noRot="1" noChangeAspect="1"/>
-          </p:cNvSpPr>
-          <p:nvPr>
-            <p:ph type="sldImg"/>
-          </p:nvPr>
-        </p:nvSpPr>
-        <p:spPr/>
-      </p:sp>
-      <p:sp>
-        <p:nvSpPr>
-          <p:cNvPr id="3" name="Notes Placeholder 2"/>
-          <p:cNvSpPr>
-            <a:spLocks noGrp="1"/>
-          </p:cNvSpPr>
-          <p:nvPr>
-            <p:ph type="body" idx="1"/>
-          </p:nvPr>
-        </p:nvSpPr>
-        <p:spPr/>
-        <p:txBody>
-          <a:bodyPr/>
-          <a:lstStyle/>
-          <a:p>
-            <a:r>
-              <a:rPr lang="en-US" dirty="0"/>
-              <a:t>(≈4-5 min en total, ver docs/guion-demo-ep4.md)
-Ahora lo muestro funcionando en vivo, en este orden:
-1. En la consola de AWS, el API Gateway con sus rutas, el authorizer JWT y el CORS.
-2. En Entra ID, los usuarios y los roles ENCARGADO y ADMIN.
-3. Inicio sesión como vecino y creo un reporte, mirando la pestaña Red y los logs del servidor.
-4. Como encargado, paso el reporte a revisión, aparece el ticket, lo marco resuelto y se actualizan las estadísticas.
-5. Una falla controlada: publico un mensaje inválido y llega a la DLQ; después detengo ms-tickets y muestro que el mensaje espera en la cola.
-6. Y el clúster: docker compose ps, los dos nodos en el Management UI, las colas con sus DLQ, los exchanges y la página de administración.</a:t>
-            </a:r>
-            <a:endParaRPr lang="en-US" dirty="0"/>
-          </a:p>
-        </p:txBody>
-      </p:sp>
-      <p:sp>
-        <p:nvSpPr>
-          <p:cNvPr id="4" name="Slide Number Placeholder 3"/>
-          <p:cNvSpPr>
-            <a:spLocks noGrp="1"/>
-          </p:cNvSpPr>
-          <p:nvPr>
-            <p:ph type="sldNum" sz="quarter" idx="10"/>
-          </p:nvPr>
-        </p:nvSpPr>
-        <p:spPr/>
-        <p:txBody>
-          <a:bodyPr/>
-          <a:lstStyle/>
-          <a:p>
-            <a:fld id="{F7021451-1387-4CA6-816F-3879F97B5CBC}" type="slidenum">
-              <a:rPr lang="en-US"/>
-              <a:t>13</a:t>
-            </a:fld>
-            <a:endParaRPr lang="en-US"/>
-          </a:p>
-        </p:txBody>
-      </p:sp>
-    </p:spTree>
-    <p:extLst>
-      <p:ext uri="{BB962C8B-B14F-4D97-AF65-F5344CB8AC3E}">
-        <p14:creationId xmlns:p14="http://schemas.microsoft.com/office/powerpoint/2010/main" val="1024086991"/>
-      </p:ext>
-    </p:extLst>
-  </p:cSld>
-  <p:clrMapOvr>
-    <a:masterClrMapping/>
-  </p:clrMapOvr>
-</p:notes>
-</file>
-
-<file path=ppt/notesSlides/notesSlide14.xml><?xml version="1.0" encoding="utf-8"?>
-<p:notes xmlns:a="http://schemas.openxmlformats.org/drawingml/2006/main" xmlns:r="http://schemas.openxmlformats.org/officeDocument/2006/relationships" xmlns:p="http://schemas.openxmlformats.org/presentationml/2006/main">
-  <p:cSld>
-    <p:spTree>
-      <p:nvGrpSpPr>
-        <p:cNvPr id="1" name=""/>
-        <p:cNvGrpSpPr/>
-        <p:nvPr/>
-      </p:nvGrpSpPr>
-      <p:grpSpPr>
-        <a:xfrm>
-          <a:off x="0" y="0"/>
-          <a:ext cx="0" cy="0"/>
-          <a:chOff x="0" y="0"/>
-          <a:chExt cx="0" cy="0"/>
-        </a:xfrm>
-      </p:grpSpPr>
-      <p:sp>
-        <p:nvSpPr>
-          <p:cNvPr id="2" name="Slide Image Placeholder 1"/>
-          <p:cNvSpPr>
-            <a:spLocks noGrp="1" noRot="1" noChangeAspect="1"/>
-          </p:cNvSpPr>
-          <p:nvPr>
-            <p:ph type="sldImg"/>
-          </p:nvPr>
-        </p:nvSpPr>
-        <p:spPr/>
-      </p:sp>
-      <p:sp>
-        <p:nvSpPr>
-          <p:cNvPr id="3" name="Notes Placeholder 2"/>
-          <p:cNvSpPr>
-            <a:spLocks noGrp="1"/>
-          </p:cNvSpPr>
-          <p:nvPr>
-            <p:ph type="body" idx="1"/>
-          </p:nvPr>
-        </p:nvSpPr>
-        <p:spPr/>
-        <p:txBody>
-          <a:bodyPr/>
-          <a:lstStyle/>
-          <a:p>
-            <a:r>
-              <a:rPr lang="en-US" dirty="0"/>
-              <a:t>(≈20 s)
-Para cerrar: EcoPunto ahora procesa sus consecuencias de forma asíncrona. Tiene un clúster RabbitMQ de dos nodos, exchanges topic y direct, tres colas con su DLQ, ACK manual con reintentos e idempotencia, y un microservicio para administrar RabbitMQ, todo desplegado en AWS detrás del API Gateway y con login en Entra ID.
-Muchas gracias. Quedo atento a sus preguntas.</a:t>
-            </a:r>
-            <a:endParaRPr lang="en-US" dirty="0"/>
-          </a:p>
-        </p:txBody>
-      </p:sp>
-      <p:sp>
-        <p:nvSpPr>
-          <p:cNvPr id="4" name="Slide Number Placeholder 3"/>
-          <p:cNvSpPr>
-            <a:spLocks noGrp="1"/>
-          </p:cNvSpPr>
-          <p:nvPr>
-            <p:ph type="sldNum" sz="quarter" idx="10"/>
-          </p:nvPr>
-        </p:nvSpPr>
-        <p:spPr/>
-        <p:txBody>
-          <a:bodyPr/>
-          <a:lstStyle/>
-          <a:p>
-            <a:fld id="{F7021451-1387-4CA6-816F-3879F97B5CBC}" type="slidenum">
-              <a:rPr lang="en-US"/>
-              <a:t>14</a:t>
             </a:fld>
             <a:endParaRPr lang="en-US"/>
           </a:p>
@@ -1105,11 +820,9 @@
           <a:p>
             <a:r>
               <a:rPr lang="en-US" dirty="0"/>
-              <a:t>(≈40 s)
-La aplicación sigue haciendo lo mismo de antes: consultar puntos limpios y reportar problemas. Lo nuevo son tres capacidades que funcionan con mensajería.
-Primero, cada vez que se crea un reporte o cambia su estado, el backend publica un evento. Dos microservicios lo procesan de forma independiente: uno envía notificaciones y otro lleva las estadísticas.
-Segundo, cuando el encargado pasa un reporte a revisión, se envía una tarea y otro microservicio genera un ticket de mantención.
-Y tercero, un microservicio administrador que permite crear y eliminar colas, exchanges y bindings por REST, con una página en el frontend solo para el rol ADMIN.</a:t>
+              <a:t>(≈30 s)
+Decisión: qué es asíncrono y qué no.
+El criterio fue simple: lo que el usuario necesita ver en ese momento es síncrono, y sus consecuencias son asíncronas. Crear un reporte es síncrono, porque el vecino necesita saber que quedó guardado. Avisar a los encargados, sumar estadísticas y generar el ticket son consecuencias: si las hiciera en la misma petición, el usuario esperaría más y, si un servicio estuviera caído, el reporte fallaría. Por eso viajan como mensajes. Además, agregué un administrador de RabbitMQ para el rol ADMIN.</a:t>
             </a:r>
             <a:endParaRPr lang="en-US" dirty="0"/>
           </a:p>
@@ -1197,12 +910,13 @@
           <a:p>
             <a:r>
               <a:rPr lang="en-US" dirty="0"/>
-              <a:t>(≈60 s)
-Esta es la arquitectura desplegada hoy.
-El frontend en Angular inicia sesión contra Entra ID y llama a la API siempre a través del API Gateway, que valida el JWT y enruta cada petición al microservicio que corresponde: el backend, estadísticas, tickets o el administrador.
-Todo el backend corre en una EC2 con docker compose: ocho contenedores. El backend es el productor: publica los eventos en RabbitMQ, que es un clúster de dos nodos.
-Los consumidores son ms-notificaciones, ms-estadisticas y ms-tickets. Cada microservicio tiene su propia base de datos dentro del mismo PostgreSQL.
-En verde están las llamadas HTTP con token y en naranjo los mensajes de RabbitMQ.</a:t>
+              <a:t>(≈50 s)
+Decisiones: Gateway como única entrada, frontend separado, docker compose y una base por servicio.
+Aquí está cada pieza y dónde corre.
+Todo pasa por el API Gateway: el frontend conoce una sola URL y el token se valida antes de llegar a la máquina.
+El frontend va en su propia t3.micro, porque solo entrega archivos estáticos; si el backend se satura, la página sigue cargando.
+El backend corre con docker compose en una t3.medium: ocho contenedores. Consideré ECS o Kubernetes, pero para el alcance del curso compose me da red interna, reinicio automático y arranque ordenado con mucha menos complejidad.
+Y cada microservicio tiene su propia base, para que ninguno dependa de las tablas de otro. Las dos instancias tienen Elastic IP, así el dominio no cambia al reiniciar el laboratorio.</a:t>
             </a:r>
             <a:endParaRPr lang="en-US" dirty="0"/>
           </a:p>
@@ -1290,11 +1004,9 @@
           <a:p>
             <a:r>
               <a:rPr lang="en-US" dirty="0"/>
-              <a:t>(≈45 s)
-La identidad sigue en Microsoft Entra ID, con el flujo Authorization Code y PKCE de la evaluación anterior. Tengo tres usuarios: encargado1 con el rol ENCARGADO, usuario1 sin rol, y una cuenta administradora.
-Agregué un App Role nuevo, ADMIN, que viaja en el claim roles del token. Solo ese rol puede usar la API de administración de RabbitMQ.
-El API Gateway ahora tiene doce rutas: además de las del backend, rutas específicas hacia estadísticas, tickets y el administrador, y el método PATCH para cambiar el estado de un reporte.
-La validación del token sigue en dos capas: el Gateway rechaza con 401 los tokens inválidos, y cada microservicio vuelve a validar el token y aplica los roles, respondiendo 403 si falta el permiso.</a:t>
+              <a:t>(≈30 s)
+Decisiones: identidad delegada, App Roles y validación en dos capas.
+No programé login ni guardo contraseñas: lo delego en Entra ID, que ya trae MFA y recuperación de cuenta. Uso App Roles porque el rol llega directo en el token. Y el token se valida en dos capas: el Gateway responde 401 si es falso, y cada servicio aplica el rol con 403. Lo hice así porque los puertos de la EC2 son alcanzables desde internet: si alguien se salta el Gateway, el servicio igual lo frena.</a:t>
             </a:r>
             <a:endParaRPr lang="en-US" dirty="0"/>
           </a:p>
@@ -1382,12 +1094,12 @@
           <a:p>
             <a:r>
               <a:rPr lang="en-US" dirty="0"/>
-              <a:t>(≈60 s)
-Esta es la topología. Hay dos tipos de exchange y cada uno tiene un motivo.
-ecopunto.events es topic porque publica hechos, como "se creó un reporte", que pueden tener varios interesados. Notificaciones se suscribe a reporte.creado y reporte.resuelto; estadísticas usa el patrón reporte.asterisco y recibe cualquier evento de reporte, incluso uno nuevo, sin tocar el productor.
-ecopunto.tareas es direct porque publica órdenes de trabajo para un solo tipo de trabajador, con coincidencia exacta: ticket.mantencion.
-Y las tres colas tienen su DLQ: se configuran con x-dead-letter-exchange apuntando a ecopunto.dlx, que deriva cada mensaje fallido a la DLQ de su cola.
-Ningún nombre está escrito en el código de negocio: todos vienen del application.yml.</a:t>
+              <a:t>(≈40 s)
+Decisiones: topic para eventos, direct para tareas y una DLQ por cola.
+Elegí el exchange según el tipo de mensaje.
+• Los eventos son hechos que interesan a varios, así que usé topic. Estadísticas se suscribe a reporte.* y recibe cualquier evento nuevo sin tocar el productor. Descarté fanout porque obliga a todos a recibir todo.
+• Las tareas son órdenes para un solo responsable, así que usé direct, en un exchange aparte.
+Cada cola tiene su propia DLQ, para saber qué servicio falló. Y los nombres salen del application.yml, porque una routing key mal escrita pierde el mensaje en silencio.</a:t>
             </a:r>
             <a:endParaRPr lang="en-US" dirty="0"/>
           </a:p>
@@ -1475,13 +1187,9 @@
           <a:p>
             <a:r>
               <a:rPr lang="en-US" dirty="0"/>
-              <a:t>(≈60 s)
-Así viaja un reporte por el sistema.
-Un vecino crea un reporte. El backend lo guarda en su base y responde 201 de inmediato, sin esperar a los consumidores.
-El evento se publica recién después del commit: si la transacción falla, no sale ningún mensaje. Y uso publisher confirms para saber que el broker lo recibió.
-El exchange topic lo entrega a notificaciones, que avisa a los encargados, y a estadísticas, que actualiza los contadores.
-Cuando el encargado pasa el reporte a revisión, además del evento se envía una tarea por el exchange direct, y ms-tickets genera el ticket de mantención. Al marcarlo resuelto, se notifica al vecino.
-La clave es qué es síncrono y qué no: la operación principal responde al instante, y lo demás ocurre después. Si un consumidor está caído, el mensaje espera en la cola. Eso lo voy a mostrar en la demo.</a:t>
+              <a:t>(≈30 s)
+Decisión: publicar después del commit, con confirmación.
+El evento se publica recién después del commit: si lo publicara antes y el guardado fallara, los demás recibirían un reporte que no existe. Uso publisher confirms para saber que RabbitMQ lo recibió, y mandatory para que me devuelva lo que no calce con ninguna cola. La limitación: si el broker está caído justo después del commit, el evento queda en el log; la mejora sería el patrón *outbox*.</a:t>
             </a:r>
             <a:endParaRPr lang="en-US" dirty="0"/>
           </a:p>
@@ -1569,11 +1277,13 @@
           <a:p>
             <a:r>
               <a:rPr lang="en-US" dirty="0"/>
-              <a:t>(≈60 s)
-Para no perder mensajes, los consumidores usan ACK manual. El consumidor confirma solo después de guardar en su base; si se cae a mitad de camino, RabbitMQ vuelve a entregar el mensaje.
-Distingo dos tipos de error. Si el error es de datos, como un JSON inválido, reintentar no sirve: se rechaza sin reencolar y el mensaje va directo a su DLQ, donde RabbitMQ agrega el header x-death con el motivo.
-Si el error es transitorio, como la base de datos caída, se reintenta hasta tres veces con espera creciente, y recién ahí va a la DLQ. Nunca uso requeue en true, porque un mensaje defectuoso volvería a fallar en un bucle infinito.
-Y como RabbitMQ garantiza entrega al menos una vez, un mensaje puede llegar repetido. Cada consumidor guarda el identificador del evento y, si ya lo procesó, solo confirma. Así no se generan dos tickets para el mismo reporte.</a:t>
+              <a:t>(≈45 s)
+Decisiones: ACK manual, clasificar errores, nunca reencolar e idempotencia.
+En los consumidores:
+• ACK manual, después de guardar: si el servicio se cae a mitad de camino, el mensaje se vuelve a entregar.
+• Dos tipos de error: un JSON inválido nunca se arregla reintentando y va directo a la DLQ; una base caída sí, así que reintento tres veces.
+• Nunca reencolar, porque un mensaje que siempre falla crearía un bucle infinito. Al final va a la DLQ con el header x-death.
+• Idempotencia: un mensaje puede llegar dos veces, así que cada consumidor guarda su id. Un reporte nunca genera dos tickets.</a:t>
             </a:r>
             <a:endParaRPr lang="en-US" dirty="0"/>
           </a:p>
@@ -1661,11 +1371,9 @@
           <a:p>
             <a:r>
               <a:rPr lang="en-US" dirty="0"/>
-              <a:t>(≈45 s)
-RabbitMQ corre como un clúster de dos nodos, rabbit1 y rabbit2, levantados con docker compose. Comparten la Erlang cookie y se descubren con classic_config. Cada nodo tiene su propio Management UI.
-Los microservicios se conectan a los dos nodos, así que si uno cae se reconectan al otro.
-Las seis colas son de tipo quorum: los mensajes se replican en ambos nodos, con un líder y una réplica. Además, las colas son durables y los mensajes persistentes, que son las tres condiciones para no perder mensajes.
-Una limitación que asumo: una cola quorum necesita mayoría, y con dos nodos, si uno cae, no hay mayoría. En producción usaría tres nodos.</a:t>
+              <a:t>(≈35 s)
+Decisiones: colas quorum y por qué 2 nodos aquí y 3 en producción.
+El clúster evita que el broker sea un punto único de falla. Usé colas quorum porque replican cada mensaje en los dos nodos, y son el tipo recomendado en RabbitMQ 4, que eliminó las colas espejadas. La limitación: una cola quorum necesita mayoría. Con dos nodos, si cae uno, las colas se detienen sin perder datos. La pauta pide dos; en producción usaría tres, en máquinas distintas, porque si cae uno, los otros dos siguen siendo mayoría.</a:t>
             </a:r>
             <a:endParaRPr lang="en-US" dirty="0"/>
           </a:p>
@@ -1753,11 +1461,9 @@
           <a:p>
             <a:r>
               <a:rPr lang="en-US" dirty="0"/>
-              <a:t>(≈45 s)
-El cuarto microservicio es ms-rabbit-admin, una API REST para administrar RabbitMQ: listar, crear y eliminar colas, exchanges y bindings. Al crear una cola se puede pedir que venga con su DLQ.
-Solo el rol ADMIN puede usarlo; con cualquier otro token responde 403.
-Los DTOs están validados: no acepta nombres vacíos, ni el prefijo amq., que RabbitMQ reserva, y responde 400 con el detalle de cada campo. Tampoco elimina una cola que tiene mensajes o consumidores: responde 409.
-Toda la lógica está en RabbitAdminService; el controller solo traduce HTTP. Y cada operación queda registrada en el log con el correo de quien la hizo.</a:t>
+              <a:t>(≈25 s)
+Decisiones: servicio aparte y validación estricta.
+La administración del broker está en un microservicio aparte: es una responsabilidad delicada, así que queda aislada y solo para ADMIN, y el backend no expone nada que pueda borrar una cola. Valido los nombres —ni vacíos ni con el prefijo reservado amq.— y registro cada operación con el correo del usuario.</a:t>
             </a:r>
             <a:endParaRPr lang="en-US" dirty="0"/>
           </a:p>
@@ -2449,14 +2155,14 @@
       </p:grpSpPr>
       <p:sp>
         <p:nvSpPr>
-          <p:cNvPr id="2" name="Título"/>
+          <p:cNvPr id="2" name="Text 0"/>
           <p:cNvSpPr txBox="1"/>
           <p:nvPr/>
         </p:nvSpPr>
         <p:spPr>
           <a:xfrm>
-            <a:off x="457200" y="274320"/>
-            <a:ext cx="8229600" cy="640080"/>
+            <a:off x="457200" y="320040"/>
+            <a:ext cx="8229600" cy="731520"/>
           </a:xfrm>
           <a:prstGeom prst="rect">
             <a:avLst/>
@@ -2472,7 +2178,71 @@
               <a:buNone/>
             </a:pPr>
             <a:r>
-              <a:rPr lang="en-US" sz="3000" b="1" dirty="0">
+              <a:rPr lang="en-US" sz="3600" b="1" dirty="0">
+                <a:solidFill>
+                  <a:srgbClr val="FFFFFF"/>
+                </a:solidFill>
+                <a:latin typeface="Calibri" pitchFamily="34" charset="0"/>
+                <a:ea typeface="Calibri" pitchFamily="34" charset="-122"/>
+                <a:cs typeface="Calibri" pitchFamily="34" charset="-120"/>
+              </a:rPr>
+              <a:t>Demo en vivo</a:t>
+            </a:r>
+            <a:endParaRPr lang="en-US" sz="3600" dirty="0"/>
+          </a:p>
+        </p:txBody>
+      </p:sp>
+      <p:sp>
+        <p:nvSpPr>
+          <p:cNvPr id="3" name="Shape 1"/>
+          <p:cNvSpPr/>
+          <p:nvPr/>
+        </p:nvSpPr>
+        <p:spPr>
+          <a:xfrm>
+            <a:off x="457200" y="1325880"/>
+            <a:ext cx="502920" cy="502920"/>
+          </a:xfrm>
+          <a:prstGeom prst="ellipse">
+            <a:avLst/>
+          </a:prstGeom>
+          <a:solidFill>
+            <a:srgbClr val="52B788"/>
+          </a:solidFill>
+          <a:ln w="12700">
+            <a:solidFill>
+              <a:srgbClr val="52B788"/>
+            </a:solidFill>
+            <a:prstDash val="solid"/>
+          </a:ln>
+        </p:spPr>
+      </p:sp>
+      <p:sp>
+        <p:nvSpPr>
+          <p:cNvPr id="4" name="Text 2"/>
+          <p:cNvSpPr txBox="1"/>
+          <p:nvPr/>
+        </p:nvSpPr>
+        <p:spPr>
+          <a:xfrm>
+            <a:off x="457200" y="1325880"/>
+            <a:ext cx="502920" cy="502920"/>
+          </a:xfrm>
+          <a:prstGeom prst="rect">
+            <a:avLst/>
+          </a:prstGeom>
+          <a:noFill/>
+          <a:ln/>
+        </p:spPr>
+        <p:txBody>
+          <a:bodyPr wrap="square" lIns="0" tIns="0" rIns="0" bIns="0" rtlCol="0" anchor="ctr"/>
+          <a:lstStyle/>
+          <a:p>
+            <a:pPr algn="ctr" indent="0" marL="0">
+              <a:buNone/>
+            </a:pPr>
+            <a:r>
+              <a:rPr lang="en-US" sz="1600" b="1" dirty="0">
                 <a:solidFill>
                   <a:srgbClr val="14342B"/>
                 </a:solidFill>
@@ -2480,2319 +2250,22 @@
                 <a:ea typeface="Calibri" pitchFamily="34" charset="-122"/>
                 <a:cs typeface="Calibri" pitchFamily="34" charset="-120"/>
               </a:rPr>
-              <a:t>Evidencia: pruebas de punta a punta</a:t>
-            </a:r>
-            <a:endParaRPr lang="en-US" sz="3000" dirty="0"/>
-          </a:p>
-        </p:txBody>
-      </p:sp>
-      <p:graphicFrame>
-        <p:nvGraphicFramePr>
-          <p:cNvPr id="11" name="Table 0"/>
-          <p:cNvGraphicFramePr>
-            <a:graphicFrameLocks noGrp="1"/>
-          </p:cNvGraphicFramePr>
-          <p:nvPr>
-            <p:extLst>
-              <p:ext uri="{D42A27DB-BD31-4B8C-83A1-F6EECF244321}">
-                <p14:modId xmlns:p14="http://schemas.microsoft.com/office/powerpoint/2010/main" val="1579011935"/>
-              </p:ext>
-            </p:extLst>
-          </p:nvPr>
-        </p:nvGraphicFramePr>
-        <p:xfrm>
-          <a:off x="411480" y="1051560"/>
-          <a:ext cx="8321040" cy="914400"/>
-        </p:xfrm>
-        <a:graphic>
-          <a:graphicData uri="http://schemas.openxmlformats.org/drawingml/2006/table">
-            <a:tbl>
-              <a:tblPr/>
-              <a:tblGrid>
-                <a:gridCol w="4846320"/>
-                <a:gridCol w="1463040"/>
-                <a:gridCol w="2011680"/>
-              </a:tblGrid>
-              <a:tr h="0">
-                <a:tc>
-                  <a:txBody>
-                    <a:bodyPr/>
-                    <a:lstStyle/>
-                    <a:p>
-                      <a:pPr indent="0" marL="0">
-                        <a:buNone/>
-                      </a:pPr>
-                      <a:r>
-                        <a:rPr lang="en-US" sz="1200" b="1" dirty="0">
-                          <a:solidFill>
-                            <a:srgbClr val="FFFFFF"/>
-                          </a:solidFill>
-                          <a:latin typeface="Calibri" pitchFamily="34" charset="0"/>
-                          <a:ea typeface="Calibri" pitchFamily="34" charset="-122"/>
-                          <a:cs typeface="Calibri" pitchFamily="34" charset="-120"/>
-                        </a:rPr>
-                        <a:t>Escenario</a:t>
-                      </a:r>
-                      <a:endParaRPr lang="en-US" sz="1200" dirty="0">
-                        <a:latin typeface="Calibri" charset="0"/>
-                        <a:ea typeface="Calibri" charset="0"/>
-                        <a:cs typeface="Calibri" charset="0"/>
-                      </a:endParaRPr>
-                    </a:p>
-                  </a:txBody>
-                  <a:tcPr marL="73152" marR="73152" marT="36576" marB="36576" anchor="ctr">
-                    <a:lnL w="6350" cap="flat" cmpd="sng" algn="ctr">
-                      <a:solidFill>
-                        <a:srgbClr val="D5E8DD"/>
-                      </a:solidFill>
-                      <a:prstDash val="solid"/>
-                      <a:round/>
-                      <a:headEnd type="none" w="med" len="med"/>
-                      <a:tailEnd type="none" w="med" len="med"/>
-                    </a:lnL>
-                    <a:lnR w="6350" cap="flat" cmpd="sng" algn="ctr">
-                      <a:solidFill>
-                        <a:srgbClr val="D5E8DD"/>
-                      </a:solidFill>
-                      <a:prstDash val="solid"/>
-                      <a:round/>
-                      <a:headEnd type="none" w="med" len="med"/>
-                      <a:tailEnd type="none" w="med" len="med"/>
-                    </a:lnR>
-                    <a:lnT w="6350" cap="flat" cmpd="sng" algn="ctr">
-                      <a:solidFill>
-                        <a:srgbClr val="D5E8DD"/>
-                      </a:solidFill>
-                      <a:prstDash val="solid"/>
-                      <a:round/>
-                      <a:headEnd type="none" w="med" len="med"/>
-                      <a:tailEnd type="none" w="med" len="med"/>
-                    </a:lnT>
-                    <a:lnB w="6350" cap="flat" cmpd="sng" algn="ctr">
-                      <a:solidFill>
-                        <a:srgbClr val="D5E8DD"/>
-                      </a:solidFill>
-                      <a:prstDash val="solid"/>
-                      <a:round/>
-                      <a:headEnd type="none" w="med" len="med"/>
-                      <a:tailEnd type="none" w="med" len="med"/>
-                    </a:lnB>
-                    <a:solidFill>
-                      <a:srgbClr val="14342B"/>
-                    </a:solidFill>
-                  </a:tcPr>
-                </a:tc>
-                <a:tc>
-                  <a:txBody>
-                    <a:bodyPr/>
-                    <a:lstStyle/>
-                    <a:p>
-                      <a:pPr indent="0" marL="0">
-                        <a:buNone/>
-                      </a:pPr>
-                      <a:r>
-                        <a:rPr lang="en-US" sz="1200" b="1" dirty="0">
-                          <a:solidFill>
-                            <a:srgbClr val="FFFFFF"/>
-                          </a:solidFill>
-                          <a:latin typeface="Calibri" pitchFamily="34" charset="0"/>
-                          <a:ea typeface="Calibri" pitchFamily="34" charset="-122"/>
-                          <a:cs typeface="Calibri" pitchFamily="34" charset="-120"/>
-                        </a:rPr>
-                        <a:t>Usuario</a:t>
-                      </a:r>
-                      <a:endParaRPr lang="en-US" sz="1200" dirty="0">
-                        <a:latin typeface="Calibri" charset="0"/>
-                        <a:ea typeface="Calibri" charset="0"/>
-                        <a:cs typeface="Calibri" charset="0"/>
-                      </a:endParaRPr>
-                    </a:p>
-                  </a:txBody>
-                  <a:tcPr marL="73152" marR="73152" marT="36576" marB="36576" anchor="ctr">
-                    <a:lnL w="6350" cap="flat" cmpd="sng" algn="ctr">
-                      <a:solidFill>
-                        <a:srgbClr val="D5E8DD"/>
-                      </a:solidFill>
-                      <a:prstDash val="solid"/>
-                      <a:round/>
-                      <a:headEnd type="none" w="med" len="med"/>
-                      <a:tailEnd type="none" w="med" len="med"/>
-                    </a:lnL>
-                    <a:lnR w="6350" cap="flat" cmpd="sng" algn="ctr">
-                      <a:solidFill>
-                        <a:srgbClr val="D5E8DD"/>
-                      </a:solidFill>
-                      <a:prstDash val="solid"/>
-                      <a:round/>
-                      <a:headEnd type="none" w="med" len="med"/>
-                      <a:tailEnd type="none" w="med" len="med"/>
-                    </a:lnR>
-                    <a:lnT w="6350" cap="flat" cmpd="sng" algn="ctr">
-                      <a:solidFill>
-                        <a:srgbClr val="D5E8DD"/>
-                      </a:solidFill>
-                      <a:prstDash val="solid"/>
-                      <a:round/>
-                      <a:headEnd type="none" w="med" len="med"/>
-                      <a:tailEnd type="none" w="med" len="med"/>
-                    </a:lnT>
-                    <a:lnB w="6350" cap="flat" cmpd="sng" algn="ctr">
-                      <a:solidFill>
-                        <a:srgbClr val="D5E8DD"/>
-                      </a:solidFill>
-                      <a:prstDash val="solid"/>
-                      <a:round/>
-                      <a:headEnd type="none" w="med" len="med"/>
-                      <a:tailEnd type="none" w="med" len="med"/>
-                    </a:lnB>
-                    <a:solidFill>
-                      <a:srgbClr val="14342B"/>
-                    </a:solidFill>
-                  </a:tcPr>
-                </a:tc>
-                <a:tc>
-                  <a:txBody>
-                    <a:bodyPr/>
-                    <a:lstStyle/>
-                    <a:p>
-                      <a:pPr indent="0" marL="0">
-                        <a:buNone/>
-                      </a:pPr>
-                      <a:r>
-                        <a:rPr lang="en-US" sz="1200" b="1" dirty="0">
-                          <a:solidFill>
-                            <a:srgbClr val="FFFFFF"/>
-                          </a:solidFill>
-                          <a:latin typeface="Calibri" pitchFamily="34" charset="0"/>
-                          <a:ea typeface="Calibri" pitchFamily="34" charset="-122"/>
-                          <a:cs typeface="Calibri" pitchFamily="34" charset="-120"/>
-                        </a:rPr>
-                        <a:t>Resultado</a:t>
-                      </a:r>
-                      <a:endParaRPr lang="en-US" sz="1200" dirty="0">
-                        <a:latin typeface="Calibri" charset="0"/>
-                        <a:ea typeface="Calibri" charset="0"/>
-                        <a:cs typeface="Calibri" charset="0"/>
-                      </a:endParaRPr>
-                    </a:p>
-                  </a:txBody>
-                  <a:tcPr marL="73152" marR="73152" marT="36576" marB="36576" anchor="ctr">
-                    <a:lnL w="6350" cap="flat" cmpd="sng" algn="ctr">
-                      <a:solidFill>
-                        <a:srgbClr val="D5E8DD"/>
-                      </a:solidFill>
-                      <a:prstDash val="solid"/>
-                      <a:round/>
-                      <a:headEnd type="none" w="med" len="med"/>
-                      <a:tailEnd type="none" w="med" len="med"/>
-                    </a:lnL>
-                    <a:lnR w="6350" cap="flat" cmpd="sng" algn="ctr">
-                      <a:solidFill>
-                        <a:srgbClr val="D5E8DD"/>
-                      </a:solidFill>
-                      <a:prstDash val="solid"/>
-                      <a:round/>
-                      <a:headEnd type="none" w="med" len="med"/>
-                      <a:tailEnd type="none" w="med" len="med"/>
-                    </a:lnR>
-                    <a:lnT w="6350" cap="flat" cmpd="sng" algn="ctr">
-                      <a:solidFill>
-                        <a:srgbClr val="D5E8DD"/>
-                      </a:solidFill>
-                      <a:prstDash val="solid"/>
-                      <a:round/>
-                      <a:headEnd type="none" w="med" len="med"/>
-                      <a:tailEnd type="none" w="med" len="med"/>
-                    </a:lnT>
-                    <a:lnB w="6350" cap="flat" cmpd="sng" algn="ctr">
-                      <a:solidFill>
-                        <a:srgbClr val="D5E8DD"/>
-                      </a:solidFill>
-                      <a:prstDash val="solid"/>
-                      <a:round/>
-                      <a:headEnd type="none" w="med" len="med"/>
-                      <a:tailEnd type="none" w="med" len="med"/>
-                    </a:lnB>
-                    <a:solidFill>
-                      <a:srgbClr val="14342B"/>
-                    </a:solidFill>
-                  </a:tcPr>
-                </a:tc>
-              </a:tr>
-              <a:tr h="0">
-                <a:tc>
-                  <a:txBody>
-                    <a:bodyPr/>
-                    <a:lstStyle/>
-                    <a:p>
-                      <a:pPr indent="0" marL="0">
-                        <a:buNone/>
-                      </a:pPr>
-                      <a:r>
-                        <a:rPr lang="en-US" sz="1200" dirty="0">
-                          <a:solidFill>
-                            <a:srgbClr val="1F2A24"/>
-                          </a:solidFill>
-                          <a:latin typeface="Calibri" pitchFamily="34" charset="0"/>
-                          <a:ea typeface="Calibri" pitchFamily="34" charset="-122"/>
-                          <a:cs typeface="Calibri" pitchFamily="34" charset="-120"/>
-                        </a:rPr>
-                        <a:t>Sin token, token basura, firma de otra clave o vencido</a:t>
-                      </a:r>
-                      <a:endParaRPr lang="en-US" sz="1200" dirty="0">
-                        <a:latin typeface="Calibri" charset="0"/>
-                        <a:ea typeface="Calibri" charset="0"/>
-                        <a:cs typeface="Calibri" charset="0"/>
-                      </a:endParaRPr>
-                    </a:p>
-                  </a:txBody>
-                  <a:tcPr marL="73152" marR="73152" marT="36576" marB="36576" anchor="ctr">
-                    <a:lnL w="6350" cap="flat" cmpd="sng" algn="ctr">
-                      <a:solidFill>
-                        <a:srgbClr val="D5E8DD"/>
-                      </a:solidFill>
-                      <a:prstDash val="solid"/>
-                      <a:round/>
-                      <a:headEnd type="none" w="med" len="med"/>
-                      <a:tailEnd type="none" w="med" len="med"/>
-                    </a:lnL>
-                    <a:lnR w="6350" cap="flat" cmpd="sng" algn="ctr">
-                      <a:solidFill>
-                        <a:srgbClr val="D5E8DD"/>
-                      </a:solidFill>
-                      <a:prstDash val="solid"/>
-                      <a:round/>
-                      <a:headEnd type="none" w="med" len="med"/>
-                      <a:tailEnd type="none" w="med" len="med"/>
-                    </a:lnR>
-                    <a:lnT w="6350" cap="flat" cmpd="sng" algn="ctr">
-                      <a:solidFill>
-                        <a:srgbClr val="D5E8DD"/>
-                      </a:solidFill>
-                      <a:prstDash val="solid"/>
-                      <a:round/>
-                      <a:headEnd type="none" w="med" len="med"/>
-                      <a:tailEnd type="none" w="med" len="med"/>
-                    </a:lnT>
-                    <a:lnB w="6350" cap="flat" cmpd="sng" algn="ctr">
-                      <a:solidFill>
-                        <a:srgbClr val="D5E8DD"/>
-                      </a:solidFill>
-                      <a:prstDash val="solid"/>
-                      <a:round/>
-                      <a:headEnd type="none" w="med" len="med"/>
-                      <a:tailEnd type="none" w="med" len="med"/>
-                    </a:lnB>
-                    <a:solidFill>
-                      <a:srgbClr val="FFFFFF"/>
-                    </a:solidFill>
-                  </a:tcPr>
-                </a:tc>
-                <a:tc>
-                  <a:txBody>
-                    <a:bodyPr/>
-                    <a:lstStyle/>
-                    <a:p>
-                      <a:pPr indent="0" marL="0">
-                        <a:buNone/>
-                      </a:pPr>
-                      <a:r>
-                        <a:rPr lang="en-US" sz="1200" dirty="0">
-                          <a:solidFill>
-                            <a:srgbClr val="1F2A24"/>
-                          </a:solidFill>
-                          <a:latin typeface="Calibri" pitchFamily="34" charset="0"/>
-                          <a:ea typeface="Calibri" pitchFamily="34" charset="-122"/>
-                          <a:cs typeface="Calibri" pitchFamily="34" charset="-120"/>
-                        </a:rPr>
-                        <a:t>—</a:t>
-                      </a:r>
-                      <a:endParaRPr lang="en-US" sz="1200" dirty="0">
-                        <a:latin typeface="Calibri" charset="0"/>
-                        <a:ea typeface="Calibri" charset="0"/>
-                        <a:cs typeface="Calibri" charset="0"/>
-                      </a:endParaRPr>
-                    </a:p>
-                  </a:txBody>
-                  <a:tcPr marL="73152" marR="73152" marT="36576" marB="36576" anchor="ctr">
-                    <a:lnL w="6350" cap="flat" cmpd="sng" algn="ctr">
-                      <a:solidFill>
-                        <a:srgbClr val="D5E8DD"/>
-                      </a:solidFill>
-                      <a:prstDash val="solid"/>
-                      <a:round/>
-                      <a:headEnd type="none" w="med" len="med"/>
-                      <a:tailEnd type="none" w="med" len="med"/>
-                    </a:lnL>
-                    <a:lnR w="6350" cap="flat" cmpd="sng" algn="ctr">
-                      <a:solidFill>
-                        <a:srgbClr val="D5E8DD"/>
-                      </a:solidFill>
-                      <a:prstDash val="solid"/>
-                      <a:round/>
-                      <a:headEnd type="none" w="med" len="med"/>
-                      <a:tailEnd type="none" w="med" len="med"/>
-                    </a:lnR>
-                    <a:lnT w="6350" cap="flat" cmpd="sng" algn="ctr">
-                      <a:solidFill>
-                        <a:srgbClr val="D5E8DD"/>
-                      </a:solidFill>
-                      <a:prstDash val="solid"/>
-                      <a:round/>
-                      <a:headEnd type="none" w="med" len="med"/>
-                      <a:tailEnd type="none" w="med" len="med"/>
-                    </a:lnT>
-                    <a:lnB w="6350" cap="flat" cmpd="sng" algn="ctr">
-                      <a:solidFill>
-                        <a:srgbClr val="D5E8DD"/>
-                      </a:solidFill>
-                      <a:prstDash val="solid"/>
-                      <a:round/>
-                      <a:headEnd type="none" w="med" len="med"/>
-                      <a:tailEnd type="none" w="med" len="med"/>
-                    </a:lnB>
-                    <a:solidFill>
-                      <a:srgbClr val="FFFFFF"/>
-                    </a:solidFill>
-                  </a:tcPr>
-                </a:tc>
-                <a:tc>
-                  <a:txBody>
-                    <a:bodyPr/>
-                    <a:lstStyle/>
-                    <a:p>
-                      <a:pPr indent="0" marL="0">
-                        <a:buNone/>
-                      </a:pPr>
-                      <a:r>
-                        <a:rPr lang="en-US" sz="1200" b="1" dirty="0">
-                          <a:solidFill>
-                            <a:srgbClr val="C0392B"/>
-                          </a:solidFill>
-                          <a:latin typeface="Calibri" pitchFamily="34" charset="0"/>
-                          <a:ea typeface="Calibri" pitchFamily="34" charset="-122"/>
-                          <a:cs typeface="Calibri" pitchFamily="34" charset="-120"/>
-                        </a:rPr>
-                        <a:t>401</a:t>
-                      </a:r>
-                      <a:endParaRPr lang="en-US" sz="1200" dirty="0">
-                        <a:latin typeface="Calibri" charset="0"/>
-                        <a:ea typeface="Calibri" charset="0"/>
-                        <a:cs typeface="Calibri" charset="0"/>
-                      </a:endParaRPr>
-                    </a:p>
-                  </a:txBody>
-                  <a:tcPr marL="73152" marR="73152" marT="36576" marB="36576" anchor="ctr">
-                    <a:lnL w="6350" cap="flat" cmpd="sng" algn="ctr">
-                      <a:solidFill>
-                        <a:srgbClr val="D5E8DD"/>
-                      </a:solidFill>
-                      <a:prstDash val="solid"/>
-                      <a:round/>
-                      <a:headEnd type="none" w="med" len="med"/>
-                      <a:tailEnd type="none" w="med" len="med"/>
-                    </a:lnL>
-                    <a:lnR w="6350" cap="flat" cmpd="sng" algn="ctr">
-                      <a:solidFill>
-                        <a:srgbClr val="D5E8DD"/>
-                      </a:solidFill>
-                      <a:prstDash val="solid"/>
-                      <a:round/>
-                      <a:headEnd type="none" w="med" len="med"/>
-                      <a:tailEnd type="none" w="med" len="med"/>
-                    </a:lnR>
-                    <a:lnT w="6350" cap="flat" cmpd="sng" algn="ctr">
-                      <a:solidFill>
-                        <a:srgbClr val="D5E8DD"/>
-                      </a:solidFill>
-                      <a:prstDash val="solid"/>
-                      <a:round/>
-                      <a:headEnd type="none" w="med" len="med"/>
-                      <a:tailEnd type="none" w="med" len="med"/>
-                    </a:lnT>
-                    <a:lnB w="6350" cap="flat" cmpd="sng" algn="ctr">
-                      <a:solidFill>
-                        <a:srgbClr val="D5E8DD"/>
-                      </a:solidFill>
-                      <a:prstDash val="solid"/>
-                      <a:round/>
-                      <a:headEnd type="none" w="med" len="med"/>
-                      <a:tailEnd type="none" w="med" len="med"/>
-                    </a:lnB>
-                    <a:solidFill>
-                      <a:srgbClr val="FFFFFF"/>
-                    </a:solidFill>
-                  </a:tcPr>
-                </a:tc>
-              </a:tr>
-              <a:tr h="0">
-                <a:tc>
-                  <a:txBody>
-                    <a:bodyPr/>
-                    <a:lstStyle/>
-                    <a:p>
-                      <a:pPr indent="0" marL="0">
-                        <a:buNone/>
-                      </a:pPr>
-                      <a:r>
-                        <a:rPr lang="en-US" sz="1200" dirty="0">
-                          <a:solidFill>
-                            <a:srgbClr val="1F2A24"/>
-                          </a:solidFill>
-                          <a:latin typeface="Calibri" pitchFamily="34" charset="0"/>
-                          <a:ea typeface="Calibri" pitchFamily="34" charset="-122"/>
-                          <a:cs typeface="Calibri" pitchFamily="34" charset="-120"/>
-                        </a:rPr>
-                        <a:t>Leer reportes con reportes.read · crear sin reportes.write</a:t>
-                      </a:r>
-                      <a:endParaRPr lang="en-US" sz="1200" dirty="0">
-                        <a:latin typeface="Calibri" charset="0"/>
-                        <a:ea typeface="Calibri" charset="0"/>
-                        <a:cs typeface="Calibri" charset="0"/>
-                      </a:endParaRPr>
-                    </a:p>
-                  </a:txBody>
-                  <a:tcPr marL="73152" marR="73152" marT="36576" marB="36576" anchor="ctr">
-                    <a:lnL w="6350" cap="flat" cmpd="sng" algn="ctr">
-                      <a:solidFill>
-                        <a:srgbClr val="D5E8DD"/>
-                      </a:solidFill>
-                      <a:prstDash val="solid"/>
-                      <a:round/>
-                      <a:headEnd type="none" w="med" len="med"/>
-                      <a:tailEnd type="none" w="med" len="med"/>
-                    </a:lnL>
-                    <a:lnR w="6350" cap="flat" cmpd="sng" algn="ctr">
-                      <a:solidFill>
-                        <a:srgbClr val="D5E8DD"/>
-                      </a:solidFill>
-                      <a:prstDash val="solid"/>
-                      <a:round/>
-                      <a:headEnd type="none" w="med" len="med"/>
-                      <a:tailEnd type="none" w="med" len="med"/>
-                    </a:lnR>
-                    <a:lnT w="6350" cap="flat" cmpd="sng" algn="ctr">
-                      <a:solidFill>
-                        <a:srgbClr val="D5E8DD"/>
-                      </a:solidFill>
-                      <a:prstDash val="solid"/>
-                      <a:round/>
-                      <a:headEnd type="none" w="med" len="med"/>
-                      <a:tailEnd type="none" w="med" len="med"/>
-                    </a:lnT>
-                    <a:lnB w="6350" cap="flat" cmpd="sng" algn="ctr">
-                      <a:solidFill>
-                        <a:srgbClr val="D5E8DD"/>
-                      </a:solidFill>
-                      <a:prstDash val="solid"/>
-                      <a:round/>
-                      <a:headEnd type="none" w="med" len="med"/>
-                      <a:tailEnd type="none" w="med" len="med"/>
-                    </a:lnB>
-                    <a:solidFill>
-                      <a:srgbClr val="E8F5EE"/>
-                    </a:solidFill>
-                  </a:tcPr>
-                </a:tc>
-                <a:tc>
-                  <a:txBody>
-                    <a:bodyPr/>
-                    <a:lstStyle/>
-                    <a:p>
-                      <a:pPr indent="0" marL="0">
-                        <a:buNone/>
-                      </a:pPr>
-                      <a:r>
-                        <a:rPr lang="en-US" sz="1200" dirty="0">
-                          <a:solidFill>
-                            <a:srgbClr val="1F2A24"/>
-                          </a:solidFill>
-                          <a:latin typeface="Calibri" pitchFamily="34" charset="0"/>
-                          <a:ea typeface="Calibri" pitchFamily="34" charset="-122"/>
-                          <a:cs typeface="Calibri" pitchFamily="34" charset="-120"/>
-                        </a:rPr>
-                        <a:t>lector</a:t>
-                      </a:r>
-                      <a:endParaRPr lang="en-US" sz="1200" dirty="0">
-                        <a:latin typeface="Calibri" charset="0"/>
-                        <a:ea typeface="Calibri" charset="0"/>
-                        <a:cs typeface="Calibri" charset="0"/>
-                      </a:endParaRPr>
-                    </a:p>
-                  </a:txBody>
-                  <a:tcPr marL="73152" marR="73152" marT="36576" marB="36576" anchor="ctr">
-                    <a:lnL w="6350" cap="flat" cmpd="sng" algn="ctr">
-                      <a:solidFill>
-                        <a:srgbClr val="D5E8DD"/>
-                      </a:solidFill>
-                      <a:prstDash val="solid"/>
-                      <a:round/>
-                      <a:headEnd type="none" w="med" len="med"/>
-                      <a:tailEnd type="none" w="med" len="med"/>
-                    </a:lnL>
-                    <a:lnR w="6350" cap="flat" cmpd="sng" algn="ctr">
-                      <a:solidFill>
-                        <a:srgbClr val="D5E8DD"/>
-                      </a:solidFill>
-                      <a:prstDash val="solid"/>
-                      <a:round/>
-                      <a:headEnd type="none" w="med" len="med"/>
-                      <a:tailEnd type="none" w="med" len="med"/>
-                    </a:lnR>
-                    <a:lnT w="6350" cap="flat" cmpd="sng" algn="ctr">
-                      <a:solidFill>
-                        <a:srgbClr val="D5E8DD"/>
-                      </a:solidFill>
-                      <a:prstDash val="solid"/>
-                      <a:round/>
-                      <a:headEnd type="none" w="med" len="med"/>
-                      <a:tailEnd type="none" w="med" len="med"/>
-                    </a:lnT>
-                    <a:lnB w="6350" cap="flat" cmpd="sng" algn="ctr">
-                      <a:solidFill>
-                        <a:srgbClr val="D5E8DD"/>
-                      </a:solidFill>
-                      <a:prstDash val="solid"/>
-                      <a:round/>
-                      <a:headEnd type="none" w="med" len="med"/>
-                      <a:tailEnd type="none" w="med" len="med"/>
-                    </a:lnB>
-                    <a:solidFill>
-                      <a:srgbClr val="E8F5EE"/>
-                    </a:solidFill>
-                  </a:tcPr>
-                </a:tc>
-                <a:tc>
-                  <a:txBody>
-                    <a:bodyPr/>
-                    <a:lstStyle/>
-                    <a:p>
-                      <a:pPr indent="0" marL="0">
-                        <a:buNone/>
-                      </a:pPr>
-                      <a:r>
-                        <a:rPr lang="en-US" sz="1200" b="1" dirty="0">
-                          <a:solidFill>
-                            <a:srgbClr val="2D6A4F"/>
-                          </a:solidFill>
-                          <a:latin typeface="Calibri" pitchFamily="34" charset="0"/>
-                          <a:ea typeface="Calibri" pitchFamily="34" charset="-122"/>
-                          <a:cs typeface="Calibri" pitchFamily="34" charset="-120"/>
-                        </a:rPr>
-                        <a:t>200 · 403</a:t>
-                      </a:r>
-                      <a:endParaRPr lang="en-US" sz="1200" dirty="0">
-                        <a:latin typeface="Calibri" charset="0"/>
-                        <a:ea typeface="Calibri" charset="0"/>
-                        <a:cs typeface="Calibri" charset="0"/>
-                      </a:endParaRPr>
-                    </a:p>
-                  </a:txBody>
-                  <a:tcPr marL="73152" marR="73152" marT="36576" marB="36576" anchor="ctr">
-                    <a:lnL w="6350" cap="flat" cmpd="sng" algn="ctr">
-                      <a:solidFill>
-                        <a:srgbClr val="D5E8DD"/>
-                      </a:solidFill>
-                      <a:prstDash val="solid"/>
-                      <a:round/>
-                      <a:headEnd type="none" w="med" len="med"/>
-                      <a:tailEnd type="none" w="med" len="med"/>
-                    </a:lnL>
-                    <a:lnR w="6350" cap="flat" cmpd="sng" algn="ctr">
-                      <a:solidFill>
-                        <a:srgbClr val="D5E8DD"/>
-                      </a:solidFill>
-                      <a:prstDash val="solid"/>
-                      <a:round/>
-                      <a:headEnd type="none" w="med" len="med"/>
-                      <a:tailEnd type="none" w="med" len="med"/>
-                    </a:lnR>
-                    <a:lnT w="6350" cap="flat" cmpd="sng" algn="ctr">
-                      <a:solidFill>
-                        <a:srgbClr val="D5E8DD"/>
-                      </a:solidFill>
-                      <a:prstDash val="solid"/>
-                      <a:round/>
-                      <a:headEnd type="none" w="med" len="med"/>
-                      <a:tailEnd type="none" w="med" len="med"/>
-                    </a:lnT>
-                    <a:lnB w="6350" cap="flat" cmpd="sng" algn="ctr">
-                      <a:solidFill>
-                        <a:srgbClr val="D5E8DD"/>
-                      </a:solidFill>
-                      <a:prstDash val="solid"/>
-                      <a:round/>
-                      <a:headEnd type="none" w="med" len="med"/>
-                      <a:tailEnd type="none" w="med" len="med"/>
-                    </a:lnB>
-                    <a:solidFill>
-                      <a:srgbClr val="E8F5EE"/>
-                    </a:solidFill>
-                  </a:tcPr>
-                </a:tc>
-              </a:tr>
-              <a:tr h="0">
-                <a:tc>
-                  <a:txBody>
-                    <a:bodyPr/>
-                    <a:lstStyle/>
-                    <a:p>
-                      <a:pPr indent="0" marL="0">
-                        <a:buNone/>
-                      </a:pPr>
-                      <a:r>
-                        <a:rPr lang="en-US" sz="1200" dirty="0">
-                          <a:solidFill>
-                            <a:srgbClr val="1F2A24"/>
-                          </a:solidFill>
-                          <a:latin typeface="Calibri" pitchFamily="34" charset="0"/>
-                          <a:ea typeface="Calibri" pitchFamily="34" charset="-122"/>
-                          <a:cs typeface="Calibri" pitchFamily="34" charset="-120"/>
-                        </a:rPr>
-                        <a:t>Crear, editar o eliminar un punto limpio</a:t>
-                      </a:r>
-                      <a:endParaRPr lang="en-US" sz="1200" dirty="0">
-                        <a:latin typeface="Calibri" charset="0"/>
-                        <a:ea typeface="Calibri" charset="0"/>
-                        <a:cs typeface="Calibri" charset="0"/>
-                      </a:endParaRPr>
-                    </a:p>
-                  </a:txBody>
-                  <a:tcPr marL="73152" marR="73152" marT="36576" marB="36576" anchor="ctr">
-                    <a:lnL w="6350" cap="flat" cmpd="sng" algn="ctr">
-                      <a:solidFill>
-                        <a:srgbClr val="D5E8DD"/>
-                      </a:solidFill>
-                      <a:prstDash val="solid"/>
-                      <a:round/>
-                      <a:headEnd type="none" w="med" len="med"/>
-                      <a:tailEnd type="none" w="med" len="med"/>
-                    </a:lnL>
-                    <a:lnR w="6350" cap="flat" cmpd="sng" algn="ctr">
-                      <a:solidFill>
-                        <a:srgbClr val="D5E8DD"/>
-                      </a:solidFill>
-                      <a:prstDash val="solid"/>
-                      <a:round/>
-                      <a:headEnd type="none" w="med" len="med"/>
-                      <a:tailEnd type="none" w="med" len="med"/>
-                    </a:lnR>
-                    <a:lnT w="6350" cap="flat" cmpd="sng" algn="ctr">
-                      <a:solidFill>
-                        <a:srgbClr val="D5E8DD"/>
-                      </a:solidFill>
-                      <a:prstDash val="solid"/>
-                      <a:round/>
-                      <a:headEnd type="none" w="med" len="med"/>
-                      <a:tailEnd type="none" w="med" len="med"/>
-                    </a:lnT>
-                    <a:lnB w="6350" cap="flat" cmpd="sng" algn="ctr">
-                      <a:solidFill>
-                        <a:srgbClr val="D5E8DD"/>
-                      </a:solidFill>
-                      <a:prstDash val="solid"/>
-                      <a:round/>
-                      <a:headEnd type="none" w="med" len="med"/>
-                      <a:tailEnd type="none" w="med" len="med"/>
-                    </a:lnB>
-                    <a:solidFill>
-                      <a:srgbClr val="FFFFFF"/>
-                    </a:solidFill>
-                  </a:tcPr>
-                </a:tc>
-                <a:tc>
-                  <a:txBody>
-                    <a:bodyPr/>
-                    <a:lstStyle/>
-                    <a:p>
-                      <a:pPr indent="0" marL="0">
-                        <a:buNone/>
-                      </a:pPr>
-                      <a:r>
-                        <a:rPr lang="en-US" sz="1200" dirty="0">
-                          <a:solidFill>
-                            <a:srgbClr val="1F2A24"/>
-                          </a:solidFill>
-                          <a:latin typeface="Calibri" pitchFamily="34" charset="0"/>
-                          <a:ea typeface="Calibri" pitchFamily="34" charset="-122"/>
-                          <a:cs typeface="Calibri" pitchFamily="34" charset="-120"/>
-                        </a:rPr>
-                        <a:t>usuario sin rol</a:t>
-                      </a:r>
-                      <a:endParaRPr lang="en-US" sz="1200" dirty="0">
-                        <a:latin typeface="Calibri" charset="0"/>
-                        <a:ea typeface="Calibri" charset="0"/>
-                        <a:cs typeface="Calibri" charset="0"/>
-                      </a:endParaRPr>
-                    </a:p>
-                  </a:txBody>
-                  <a:tcPr marL="73152" marR="73152" marT="36576" marB="36576" anchor="ctr">
-                    <a:lnL w="6350" cap="flat" cmpd="sng" algn="ctr">
-                      <a:solidFill>
-                        <a:srgbClr val="D5E8DD"/>
-                      </a:solidFill>
-                      <a:prstDash val="solid"/>
-                      <a:round/>
-                      <a:headEnd type="none" w="med" len="med"/>
-                      <a:tailEnd type="none" w="med" len="med"/>
-                    </a:lnL>
-                    <a:lnR w="6350" cap="flat" cmpd="sng" algn="ctr">
-                      <a:solidFill>
-                        <a:srgbClr val="D5E8DD"/>
-                      </a:solidFill>
-                      <a:prstDash val="solid"/>
-                      <a:round/>
-                      <a:headEnd type="none" w="med" len="med"/>
-                      <a:tailEnd type="none" w="med" len="med"/>
-                    </a:lnR>
-                    <a:lnT w="6350" cap="flat" cmpd="sng" algn="ctr">
-                      <a:solidFill>
-                        <a:srgbClr val="D5E8DD"/>
-                      </a:solidFill>
-                      <a:prstDash val="solid"/>
-                      <a:round/>
-                      <a:headEnd type="none" w="med" len="med"/>
-                      <a:tailEnd type="none" w="med" len="med"/>
-                    </a:lnT>
-                    <a:lnB w="6350" cap="flat" cmpd="sng" algn="ctr">
-                      <a:solidFill>
-                        <a:srgbClr val="D5E8DD"/>
-                      </a:solidFill>
-                      <a:prstDash val="solid"/>
-                      <a:round/>
-                      <a:headEnd type="none" w="med" len="med"/>
-                      <a:tailEnd type="none" w="med" len="med"/>
-                    </a:lnB>
-                    <a:solidFill>
-                      <a:srgbClr val="FFFFFF"/>
-                    </a:solidFill>
-                  </a:tcPr>
-                </a:tc>
-                <a:tc>
-                  <a:txBody>
-                    <a:bodyPr/>
-                    <a:lstStyle/>
-                    <a:p>
-                      <a:pPr indent="0" marL="0">
-                        <a:buNone/>
-                      </a:pPr>
-                      <a:r>
-                        <a:rPr lang="en-US" sz="1200" b="1" dirty="0">
-                          <a:solidFill>
-                            <a:srgbClr val="C0392B"/>
-                          </a:solidFill>
-                          <a:latin typeface="Calibri" pitchFamily="34" charset="0"/>
-                          <a:ea typeface="Calibri" pitchFamily="34" charset="-122"/>
-                          <a:cs typeface="Calibri" pitchFamily="34" charset="-120"/>
-                        </a:rPr>
-                        <a:t>403</a:t>
-                      </a:r>
-                      <a:endParaRPr lang="en-US" sz="1200" dirty="0">
-                        <a:latin typeface="Calibri" charset="0"/>
-                        <a:ea typeface="Calibri" charset="0"/>
-                        <a:cs typeface="Calibri" charset="0"/>
-                      </a:endParaRPr>
-                    </a:p>
-                  </a:txBody>
-                  <a:tcPr marL="73152" marR="73152" marT="36576" marB="36576" anchor="ctr">
-                    <a:lnL w="6350" cap="flat" cmpd="sng" algn="ctr">
-                      <a:solidFill>
-                        <a:srgbClr val="D5E8DD"/>
-                      </a:solidFill>
-                      <a:prstDash val="solid"/>
-                      <a:round/>
-                      <a:headEnd type="none" w="med" len="med"/>
-                      <a:tailEnd type="none" w="med" len="med"/>
-                    </a:lnL>
-                    <a:lnR w="6350" cap="flat" cmpd="sng" algn="ctr">
-                      <a:solidFill>
-                        <a:srgbClr val="D5E8DD"/>
-                      </a:solidFill>
-                      <a:prstDash val="solid"/>
-                      <a:round/>
-                      <a:headEnd type="none" w="med" len="med"/>
-                      <a:tailEnd type="none" w="med" len="med"/>
-                    </a:lnR>
-                    <a:lnT w="6350" cap="flat" cmpd="sng" algn="ctr">
-                      <a:solidFill>
-                        <a:srgbClr val="D5E8DD"/>
-                      </a:solidFill>
-                      <a:prstDash val="solid"/>
-                      <a:round/>
-                      <a:headEnd type="none" w="med" len="med"/>
-                      <a:tailEnd type="none" w="med" len="med"/>
-                    </a:lnT>
-                    <a:lnB w="6350" cap="flat" cmpd="sng" algn="ctr">
-                      <a:solidFill>
-                        <a:srgbClr val="D5E8DD"/>
-                      </a:solidFill>
-                      <a:prstDash val="solid"/>
-                      <a:round/>
-                      <a:headEnd type="none" w="med" len="med"/>
-                      <a:tailEnd type="none" w="med" len="med"/>
-                    </a:lnB>
-                    <a:solidFill>
-                      <a:srgbClr val="FFFFFF"/>
-                    </a:solidFill>
-                  </a:tcPr>
-                </a:tc>
-              </a:tr>
-              <a:tr h="0">
-                <a:tc>
-                  <a:txBody>
-                    <a:bodyPr/>
-                    <a:lstStyle/>
-                    <a:p>
-                      <a:pPr indent="0" marL="0">
-                        <a:buNone/>
-                      </a:pPr>
-                      <a:r>
-                        <a:rPr lang="en-US" sz="1200" dirty="0">
-                          <a:solidFill>
-                            <a:srgbClr val="1F2A24"/>
-                          </a:solidFill>
-                          <a:latin typeface="Calibri" pitchFamily="34" charset="0"/>
-                          <a:ea typeface="Calibri" pitchFamily="34" charset="-122"/>
-                          <a:cs typeface="Calibri" pitchFamily="34" charset="-120"/>
-                        </a:rPr>
-                        <a:t>Crear, editar, eliminar punto · id inexistente</a:t>
-                      </a:r>
-                      <a:endParaRPr lang="en-US" sz="1200" dirty="0">
-                        <a:latin typeface="Calibri" charset="0"/>
-                        <a:ea typeface="Calibri" charset="0"/>
-                        <a:cs typeface="Calibri" charset="0"/>
-                      </a:endParaRPr>
-                    </a:p>
-                  </a:txBody>
-                  <a:tcPr marL="73152" marR="73152" marT="36576" marB="36576" anchor="ctr">
-                    <a:lnL w="6350" cap="flat" cmpd="sng" algn="ctr">
-                      <a:solidFill>
-                        <a:srgbClr val="D5E8DD"/>
-                      </a:solidFill>
-                      <a:prstDash val="solid"/>
-                      <a:round/>
-                      <a:headEnd type="none" w="med" len="med"/>
-                      <a:tailEnd type="none" w="med" len="med"/>
-                    </a:lnL>
-                    <a:lnR w="6350" cap="flat" cmpd="sng" algn="ctr">
-                      <a:solidFill>
-                        <a:srgbClr val="D5E8DD"/>
-                      </a:solidFill>
-                      <a:prstDash val="solid"/>
-                      <a:round/>
-                      <a:headEnd type="none" w="med" len="med"/>
-                      <a:tailEnd type="none" w="med" len="med"/>
-                    </a:lnR>
-                    <a:lnT w="6350" cap="flat" cmpd="sng" algn="ctr">
-                      <a:solidFill>
-                        <a:srgbClr val="D5E8DD"/>
-                      </a:solidFill>
-                      <a:prstDash val="solid"/>
-                      <a:round/>
-                      <a:headEnd type="none" w="med" len="med"/>
-                      <a:tailEnd type="none" w="med" len="med"/>
-                    </a:lnT>
-                    <a:lnB w="6350" cap="flat" cmpd="sng" algn="ctr">
-                      <a:solidFill>
-                        <a:srgbClr val="D5E8DD"/>
-                      </a:solidFill>
-                      <a:prstDash val="solid"/>
-                      <a:round/>
-                      <a:headEnd type="none" w="med" len="med"/>
-                      <a:tailEnd type="none" w="med" len="med"/>
-                    </a:lnB>
-                    <a:solidFill>
-                      <a:srgbClr val="E8F5EE"/>
-                    </a:solidFill>
-                  </a:tcPr>
-                </a:tc>
-                <a:tc>
-                  <a:txBody>
-                    <a:bodyPr/>
-                    <a:lstStyle/>
-                    <a:p>
-                      <a:pPr indent="0" marL="0">
-                        <a:buNone/>
-                      </a:pPr>
-                      <a:r>
-                        <a:rPr lang="en-US" sz="1200" dirty="0">
-                          <a:solidFill>
-                            <a:srgbClr val="1F2A24"/>
-                          </a:solidFill>
-                          <a:latin typeface="Calibri" pitchFamily="34" charset="0"/>
-                          <a:ea typeface="Calibri" pitchFamily="34" charset="-122"/>
-                          <a:cs typeface="Calibri" pitchFamily="34" charset="-120"/>
-                        </a:rPr>
-                        <a:t>encargado</a:t>
-                      </a:r>
-                      <a:endParaRPr lang="en-US" sz="1200" dirty="0">
-                        <a:latin typeface="Calibri" charset="0"/>
-                        <a:ea typeface="Calibri" charset="0"/>
-                        <a:cs typeface="Calibri" charset="0"/>
-                      </a:endParaRPr>
-                    </a:p>
-                  </a:txBody>
-                  <a:tcPr marL="73152" marR="73152" marT="36576" marB="36576" anchor="ctr">
-                    <a:lnL w="6350" cap="flat" cmpd="sng" algn="ctr">
-                      <a:solidFill>
-                        <a:srgbClr val="D5E8DD"/>
-                      </a:solidFill>
-                      <a:prstDash val="solid"/>
-                      <a:round/>
-                      <a:headEnd type="none" w="med" len="med"/>
-                      <a:tailEnd type="none" w="med" len="med"/>
-                    </a:lnL>
-                    <a:lnR w="6350" cap="flat" cmpd="sng" algn="ctr">
-                      <a:solidFill>
-                        <a:srgbClr val="D5E8DD"/>
-                      </a:solidFill>
-                      <a:prstDash val="solid"/>
-                      <a:round/>
-                      <a:headEnd type="none" w="med" len="med"/>
-                      <a:tailEnd type="none" w="med" len="med"/>
-                    </a:lnR>
-                    <a:lnT w="6350" cap="flat" cmpd="sng" algn="ctr">
-                      <a:solidFill>
-                        <a:srgbClr val="D5E8DD"/>
-                      </a:solidFill>
-                      <a:prstDash val="solid"/>
-                      <a:round/>
-                      <a:headEnd type="none" w="med" len="med"/>
-                      <a:tailEnd type="none" w="med" len="med"/>
-                    </a:lnT>
-                    <a:lnB w="6350" cap="flat" cmpd="sng" algn="ctr">
-                      <a:solidFill>
-                        <a:srgbClr val="D5E8DD"/>
-                      </a:solidFill>
-                      <a:prstDash val="solid"/>
-                      <a:round/>
-                      <a:headEnd type="none" w="med" len="med"/>
-                      <a:tailEnd type="none" w="med" len="med"/>
-                    </a:lnB>
-                    <a:solidFill>
-                      <a:srgbClr val="E8F5EE"/>
-                    </a:solidFill>
-                  </a:tcPr>
-                </a:tc>
-                <a:tc>
-                  <a:txBody>
-                    <a:bodyPr/>
-                    <a:lstStyle/>
-                    <a:p>
-                      <a:pPr indent="0" marL="0">
-                        <a:buNone/>
-                      </a:pPr>
-                      <a:r>
-                        <a:rPr lang="en-US" sz="1200" b="1" dirty="0">
-                          <a:solidFill>
-                            <a:srgbClr val="2D6A4F"/>
-                          </a:solidFill>
-                          <a:latin typeface="Calibri" pitchFamily="34" charset="0"/>
-                          <a:ea typeface="Calibri" pitchFamily="34" charset="-122"/>
-                          <a:cs typeface="Calibri" pitchFamily="34" charset="-120"/>
-                        </a:rPr>
-                        <a:t>201 · 200 · 204 · 404</a:t>
-                      </a:r>
-                      <a:endParaRPr lang="en-US" sz="1200" dirty="0">
-                        <a:latin typeface="Calibri" charset="0"/>
-                        <a:ea typeface="Calibri" charset="0"/>
-                        <a:cs typeface="Calibri" charset="0"/>
-                      </a:endParaRPr>
-                    </a:p>
-                  </a:txBody>
-                  <a:tcPr marL="73152" marR="73152" marT="36576" marB="36576" anchor="ctr">
-                    <a:lnL w="6350" cap="flat" cmpd="sng" algn="ctr">
-                      <a:solidFill>
-                        <a:srgbClr val="D5E8DD"/>
-                      </a:solidFill>
-                      <a:prstDash val="solid"/>
-                      <a:round/>
-                      <a:headEnd type="none" w="med" len="med"/>
-                      <a:tailEnd type="none" w="med" len="med"/>
-                    </a:lnL>
-                    <a:lnR w="6350" cap="flat" cmpd="sng" algn="ctr">
-                      <a:solidFill>
-                        <a:srgbClr val="D5E8DD"/>
-                      </a:solidFill>
-                      <a:prstDash val="solid"/>
-                      <a:round/>
-                      <a:headEnd type="none" w="med" len="med"/>
-                      <a:tailEnd type="none" w="med" len="med"/>
-                    </a:lnR>
-                    <a:lnT w="6350" cap="flat" cmpd="sng" algn="ctr">
-                      <a:solidFill>
-                        <a:srgbClr val="D5E8DD"/>
-                      </a:solidFill>
-                      <a:prstDash val="solid"/>
-                      <a:round/>
-                      <a:headEnd type="none" w="med" len="med"/>
-                      <a:tailEnd type="none" w="med" len="med"/>
-                    </a:lnT>
-                    <a:lnB w="6350" cap="flat" cmpd="sng" algn="ctr">
-                      <a:solidFill>
-                        <a:srgbClr val="D5E8DD"/>
-                      </a:solidFill>
-                      <a:prstDash val="solid"/>
-                      <a:round/>
-                      <a:headEnd type="none" w="med" len="med"/>
-                      <a:tailEnd type="none" w="med" len="med"/>
-                    </a:lnB>
-                    <a:solidFill>
-                      <a:srgbClr val="E8F5EE"/>
-                    </a:solidFill>
-                  </a:tcPr>
-                </a:tc>
-              </a:tr>
-              <a:tr h="0">
-                <a:tc>
-                  <a:txBody>
-                    <a:bodyPr/>
-                    <a:lstStyle/>
-                    <a:p>
-                      <a:pPr indent="0" marL="0">
-                        <a:buNone/>
-                      </a:pPr>
-                      <a:r>
-                        <a:rPr lang="en-US" sz="1200" dirty="0">
-                          <a:solidFill>
-                            <a:srgbClr val="1F2A24"/>
-                          </a:solidFill>
-                          <a:latin typeface="Calibri" pitchFamily="34" charset="0"/>
-                          <a:ea typeface="Calibri" pitchFamily="34" charset="-122"/>
-                          <a:cs typeface="Calibri" pitchFamily="34" charset="-120"/>
-                        </a:rPr>
-                        <a:t>Crear reporte · descripción vacía</a:t>
-                      </a:r>
-                      <a:endParaRPr lang="en-US" sz="1200" dirty="0">
-                        <a:latin typeface="Calibri" charset="0"/>
-                        <a:ea typeface="Calibri" charset="0"/>
-                        <a:cs typeface="Calibri" charset="0"/>
-                      </a:endParaRPr>
-                    </a:p>
-                  </a:txBody>
-                  <a:tcPr marL="73152" marR="73152" marT="36576" marB="36576" anchor="ctr">
-                    <a:lnL w="6350" cap="flat" cmpd="sng" algn="ctr">
-                      <a:solidFill>
-                        <a:srgbClr val="D5E8DD"/>
-                      </a:solidFill>
-                      <a:prstDash val="solid"/>
-                      <a:round/>
-                      <a:headEnd type="none" w="med" len="med"/>
-                      <a:tailEnd type="none" w="med" len="med"/>
-                    </a:lnL>
-                    <a:lnR w="6350" cap="flat" cmpd="sng" algn="ctr">
-                      <a:solidFill>
-                        <a:srgbClr val="D5E8DD"/>
-                      </a:solidFill>
-                      <a:prstDash val="solid"/>
-                      <a:round/>
-                      <a:headEnd type="none" w="med" len="med"/>
-                      <a:tailEnd type="none" w="med" len="med"/>
-                    </a:lnR>
-                    <a:lnT w="6350" cap="flat" cmpd="sng" algn="ctr">
-                      <a:solidFill>
-                        <a:srgbClr val="D5E8DD"/>
-                      </a:solidFill>
-                      <a:prstDash val="solid"/>
-                      <a:round/>
-                      <a:headEnd type="none" w="med" len="med"/>
-                      <a:tailEnd type="none" w="med" len="med"/>
-                    </a:lnT>
-                    <a:lnB w="6350" cap="flat" cmpd="sng" algn="ctr">
-                      <a:solidFill>
-                        <a:srgbClr val="D5E8DD"/>
-                      </a:solidFill>
-                      <a:prstDash val="solid"/>
-                      <a:round/>
-                      <a:headEnd type="none" w="med" len="med"/>
-                      <a:tailEnd type="none" w="med" len="med"/>
-                    </a:lnB>
-                    <a:solidFill>
-                      <a:srgbClr val="FFFFFF"/>
-                    </a:solidFill>
-                  </a:tcPr>
-                </a:tc>
-                <a:tc>
-                  <a:txBody>
-                    <a:bodyPr/>
-                    <a:lstStyle/>
-                    <a:p>
-                      <a:pPr indent="0" marL="0">
-                        <a:buNone/>
-                      </a:pPr>
-                      <a:r>
-                        <a:rPr lang="en-US" sz="1200" dirty="0">
-                          <a:solidFill>
-                            <a:srgbClr val="1F2A24"/>
-                          </a:solidFill>
-                          <a:latin typeface="Calibri" pitchFamily="34" charset="0"/>
-                          <a:ea typeface="Calibri" pitchFamily="34" charset="-122"/>
-                          <a:cs typeface="Calibri" pitchFamily="34" charset="-120"/>
-                        </a:rPr>
-                        <a:t>vecino</a:t>
-                      </a:r>
-                      <a:endParaRPr lang="en-US" sz="1200" dirty="0">
-                        <a:latin typeface="Calibri" charset="0"/>
-                        <a:ea typeface="Calibri" charset="0"/>
-                        <a:cs typeface="Calibri" charset="0"/>
-                      </a:endParaRPr>
-                    </a:p>
-                  </a:txBody>
-                  <a:tcPr marL="73152" marR="73152" marT="36576" marB="36576" anchor="ctr">
-                    <a:lnL w="6350" cap="flat" cmpd="sng" algn="ctr">
-                      <a:solidFill>
-                        <a:srgbClr val="D5E8DD"/>
-                      </a:solidFill>
-                      <a:prstDash val="solid"/>
-                      <a:round/>
-                      <a:headEnd type="none" w="med" len="med"/>
-                      <a:tailEnd type="none" w="med" len="med"/>
-                    </a:lnL>
-                    <a:lnR w="6350" cap="flat" cmpd="sng" algn="ctr">
-                      <a:solidFill>
-                        <a:srgbClr val="D5E8DD"/>
-                      </a:solidFill>
-                      <a:prstDash val="solid"/>
-                      <a:round/>
-                      <a:headEnd type="none" w="med" len="med"/>
-                      <a:tailEnd type="none" w="med" len="med"/>
-                    </a:lnR>
-                    <a:lnT w="6350" cap="flat" cmpd="sng" algn="ctr">
-                      <a:solidFill>
-                        <a:srgbClr val="D5E8DD"/>
-                      </a:solidFill>
-                      <a:prstDash val="solid"/>
-                      <a:round/>
-                      <a:headEnd type="none" w="med" len="med"/>
-                      <a:tailEnd type="none" w="med" len="med"/>
-                    </a:lnT>
-                    <a:lnB w="6350" cap="flat" cmpd="sng" algn="ctr">
-                      <a:solidFill>
-                        <a:srgbClr val="D5E8DD"/>
-                      </a:solidFill>
-                      <a:prstDash val="solid"/>
-                      <a:round/>
-                      <a:headEnd type="none" w="med" len="med"/>
-                      <a:tailEnd type="none" w="med" len="med"/>
-                    </a:lnB>
-                    <a:solidFill>
-                      <a:srgbClr val="FFFFFF"/>
-                    </a:solidFill>
-                  </a:tcPr>
-                </a:tc>
-                <a:tc>
-                  <a:txBody>
-                    <a:bodyPr/>
-                    <a:lstStyle/>
-                    <a:p>
-                      <a:pPr indent="0" marL="0">
-                        <a:buNone/>
-                      </a:pPr>
-                      <a:r>
-                        <a:rPr lang="en-US" sz="1200" b="1" dirty="0">
-                          <a:solidFill>
-                            <a:srgbClr val="2D6A4F"/>
-                          </a:solidFill>
-                          <a:latin typeface="Calibri" pitchFamily="34" charset="0"/>
-                          <a:ea typeface="Calibri" pitchFamily="34" charset="-122"/>
-                          <a:cs typeface="Calibri" pitchFamily="34" charset="-120"/>
-                        </a:rPr>
-                        <a:t>201 · 400</a:t>
-                      </a:r>
-                      <a:endParaRPr lang="en-US" sz="1200" dirty="0">
-                        <a:latin typeface="Calibri" charset="0"/>
-                        <a:ea typeface="Calibri" charset="0"/>
-                        <a:cs typeface="Calibri" charset="0"/>
-                      </a:endParaRPr>
-                    </a:p>
-                  </a:txBody>
-                  <a:tcPr marL="73152" marR="73152" marT="36576" marB="36576" anchor="ctr">
-                    <a:lnL w="6350" cap="flat" cmpd="sng" algn="ctr">
-                      <a:solidFill>
-                        <a:srgbClr val="D5E8DD"/>
-                      </a:solidFill>
-                      <a:prstDash val="solid"/>
-                      <a:round/>
-                      <a:headEnd type="none" w="med" len="med"/>
-                      <a:tailEnd type="none" w="med" len="med"/>
-                    </a:lnL>
-                    <a:lnR w="6350" cap="flat" cmpd="sng" algn="ctr">
-                      <a:solidFill>
-                        <a:srgbClr val="D5E8DD"/>
-                      </a:solidFill>
-                      <a:prstDash val="solid"/>
-                      <a:round/>
-                      <a:headEnd type="none" w="med" len="med"/>
-                      <a:tailEnd type="none" w="med" len="med"/>
-                    </a:lnR>
-                    <a:lnT w="6350" cap="flat" cmpd="sng" algn="ctr">
-                      <a:solidFill>
-                        <a:srgbClr val="D5E8DD"/>
-                      </a:solidFill>
-                      <a:prstDash val="solid"/>
-                      <a:round/>
-                      <a:headEnd type="none" w="med" len="med"/>
-                      <a:tailEnd type="none" w="med" len="med"/>
-                    </a:lnT>
-                    <a:lnB w="6350" cap="flat" cmpd="sng" algn="ctr">
-                      <a:solidFill>
-                        <a:srgbClr val="D5E8DD"/>
-                      </a:solidFill>
-                      <a:prstDash val="solid"/>
-                      <a:round/>
-                      <a:headEnd type="none" w="med" len="med"/>
-                      <a:tailEnd type="none" w="med" len="med"/>
-                    </a:lnB>
-                    <a:solidFill>
-                      <a:srgbClr val="FFFFFF"/>
-                    </a:solidFill>
-                  </a:tcPr>
-                </a:tc>
-              </a:tr>
-              <a:tr h="0">
-                <a:tc>
-                  <a:txBody>
-                    <a:bodyPr/>
-                    <a:lstStyle/>
-                    <a:p>
-                      <a:pPr indent="0" marL="0">
-                        <a:buNone/>
-                      </a:pPr>
-                      <a:r>
-                        <a:rPr lang="en-US" sz="1200" dirty="0">
-                          <a:solidFill>
-                            <a:srgbClr val="1F2A24"/>
-                          </a:solidFill>
-                          <a:latin typeface="Calibri" pitchFamily="34" charset="0"/>
-                          <a:ea typeface="Calibri" pitchFamily="34" charset="-122"/>
-                          <a:cs typeface="Calibri" pitchFamily="34" charset="-120"/>
-                        </a:rPr>
-                        <a:t>Pasar a revisión y resolver · transición inválida</a:t>
-                      </a:r>
-                      <a:endParaRPr lang="en-US" sz="1200" dirty="0">
-                        <a:latin typeface="Calibri" charset="0"/>
-                        <a:ea typeface="Calibri" charset="0"/>
-                        <a:cs typeface="Calibri" charset="0"/>
-                      </a:endParaRPr>
-                    </a:p>
-                  </a:txBody>
-                  <a:tcPr marL="73152" marR="73152" marT="36576" marB="36576" anchor="ctr">
-                    <a:lnL w="6350" cap="flat" cmpd="sng" algn="ctr">
-                      <a:solidFill>
-                        <a:srgbClr val="D5E8DD"/>
-                      </a:solidFill>
-                      <a:prstDash val="solid"/>
-                      <a:round/>
-                      <a:headEnd type="none" w="med" len="med"/>
-                      <a:tailEnd type="none" w="med" len="med"/>
-                    </a:lnL>
-                    <a:lnR w="6350" cap="flat" cmpd="sng" algn="ctr">
-                      <a:solidFill>
-                        <a:srgbClr val="D5E8DD"/>
-                      </a:solidFill>
-                      <a:prstDash val="solid"/>
-                      <a:round/>
-                      <a:headEnd type="none" w="med" len="med"/>
-                      <a:tailEnd type="none" w="med" len="med"/>
-                    </a:lnR>
-                    <a:lnT w="6350" cap="flat" cmpd="sng" algn="ctr">
-                      <a:solidFill>
-                        <a:srgbClr val="D5E8DD"/>
-                      </a:solidFill>
-                      <a:prstDash val="solid"/>
-                      <a:round/>
-                      <a:headEnd type="none" w="med" len="med"/>
-                      <a:tailEnd type="none" w="med" len="med"/>
-                    </a:lnT>
-                    <a:lnB w="6350" cap="flat" cmpd="sng" algn="ctr">
-                      <a:solidFill>
-                        <a:srgbClr val="D5E8DD"/>
-                      </a:solidFill>
-                      <a:prstDash val="solid"/>
-                      <a:round/>
-                      <a:headEnd type="none" w="med" len="med"/>
-                      <a:tailEnd type="none" w="med" len="med"/>
-                    </a:lnB>
-                    <a:solidFill>
-                      <a:srgbClr val="E8F5EE"/>
-                    </a:solidFill>
-                  </a:tcPr>
-                </a:tc>
-                <a:tc>
-                  <a:txBody>
-                    <a:bodyPr/>
-                    <a:lstStyle/>
-                    <a:p>
-                      <a:pPr indent="0" marL="0">
-                        <a:buNone/>
-                      </a:pPr>
-                      <a:r>
-                        <a:rPr lang="en-US" sz="1200" dirty="0">
-                          <a:solidFill>
-                            <a:srgbClr val="1F2A24"/>
-                          </a:solidFill>
-                          <a:latin typeface="Calibri" pitchFamily="34" charset="0"/>
-                          <a:ea typeface="Calibri" pitchFamily="34" charset="-122"/>
-                          <a:cs typeface="Calibri" pitchFamily="34" charset="-120"/>
-                        </a:rPr>
-                        <a:t>encargado</a:t>
-                      </a:r>
-                      <a:endParaRPr lang="en-US" sz="1200" dirty="0">
-                        <a:latin typeface="Calibri" charset="0"/>
-                        <a:ea typeface="Calibri" charset="0"/>
-                        <a:cs typeface="Calibri" charset="0"/>
-                      </a:endParaRPr>
-                    </a:p>
-                  </a:txBody>
-                  <a:tcPr marL="73152" marR="73152" marT="36576" marB="36576" anchor="ctr">
-                    <a:lnL w="6350" cap="flat" cmpd="sng" algn="ctr">
-                      <a:solidFill>
-                        <a:srgbClr val="D5E8DD"/>
-                      </a:solidFill>
-                      <a:prstDash val="solid"/>
-                      <a:round/>
-                      <a:headEnd type="none" w="med" len="med"/>
-                      <a:tailEnd type="none" w="med" len="med"/>
-                    </a:lnL>
-                    <a:lnR w="6350" cap="flat" cmpd="sng" algn="ctr">
-                      <a:solidFill>
-                        <a:srgbClr val="D5E8DD"/>
-                      </a:solidFill>
-                      <a:prstDash val="solid"/>
-                      <a:round/>
-                      <a:headEnd type="none" w="med" len="med"/>
-                      <a:tailEnd type="none" w="med" len="med"/>
-                    </a:lnR>
-                    <a:lnT w="6350" cap="flat" cmpd="sng" algn="ctr">
-                      <a:solidFill>
-                        <a:srgbClr val="D5E8DD"/>
-                      </a:solidFill>
-                      <a:prstDash val="solid"/>
-                      <a:round/>
-                      <a:headEnd type="none" w="med" len="med"/>
-                      <a:tailEnd type="none" w="med" len="med"/>
-                    </a:lnT>
-                    <a:lnB w="6350" cap="flat" cmpd="sng" algn="ctr">
-                      <a:solidFill>
-                        <a:srgbClr val="D5E8DD"/>
-                      </a:solidFill>
-                      <a:prstDash val="solid"/>
-                      <a:round/>
-                      <a:headEnd type="none" w="med" len="med"/>
-                      <a:tailEnd type="none" w="med" len="med"/>
-                    </a:lnB>
-                    <a:solidFill>
-                      <a:srgbClr val="E8F5EE"/>
-                    </a:solidFill>
-                  </a:tcPr>
-                </a:tc>
-                <a:tc>
-                  <a:txBody>
-                    <a:bodyPr/>
-                    <a:lstStyle/>
-                    <a:p>
-                      <a:pPr indent="0" marL="0">
-                        <a:buNone/>
-                      </a:pPr>
-                      <a:r>
-                        <a:rPr lang="en-US" sz="1200" b="1" dirty="0">
-                          <a:solidFill>
-                            <a:srgbClr val="2D6A4F"/>
-                          </a:solidFill>
-                          <a:latin typeface="Calibri" pitchFamily="34" charset="0"/>
-                          <a:ea typeface="Calibri" pitchFamily="34" charset="-122"/>
-                          <a:cs typeface="Calibri" pitchFamily="34" charset="-120"/>
-                        </a:rPr>
-                        <a:t>200 · 409</a:t>
-                      </a:r>
-                      <a:endParaRPr lang="en-US" sz="1200" dirty="0">
-                        <a:latin typeface="Calibri" charset="0"/>
-                        <a:ea typeface="Calibri" charset="0"/>
-                        <a:cs typeface="Calibri" charset="0"/>
-                      </a:endParaRPr>
-                    </a:p>
-                  </a:txBody>
-                  <a:tcPr marL="73152" marR="73152" marT="36576" marB="36576" anchor="ctr">
-                    <a:lnL w="6350" cap="flat" cmpd="sng" algn="ctr">
-                      <a:solidFill>
-                        <a:srgbClr val="D5E8DD"/>
-                      </a:solidFill>
-                      <a:prstDash val="solid"/>
-                      <a:round/>
-                      <a:headEnd type="none" w="med" len="med"/>
-                      <a:tailEnd type="none" w="med" len="med"/>
-                    </a:lnL>
-                    <a:lnR w="6350" cap="flat" cmpd="sng" algn="ctr">
-                      <a:solidFill>
-                        <a:srgbClr val="D5E8DD"/>
-                      </a:solidFill>
-                      <a:prstDash val="solid"/>
-                      <a:round/>
-                      <a:headEnd type="none" w="med" len="med"/>
-                      <a:tailEnd type="none" w="med" len="med"/>
-                    </a:lnR>
-                    <a:lnT w="6350" cap="flat" cmpd="sng" algn="ctr">
-                      <a:solidFill>
-                        <a:srgbClr val="D5E8DD"/>
-                      </a:solidFill>
-                      <a:prstDash val="solid"/>
-                      <a:round/>
-                      <a:headEnd type="none" w="med" len="med"/>
-                      <a:tailEnd type="none" w="med" len="med"/>
-                    </a:lnT>
-                    <a:lnB w="6350" cap="flat" cmpd="sng" algn="ctr">
-                      <a:solidFill>
-                        <a:srgbClr val="D5E8DD"/>
-                      </a:solidFill>
-                      <a:prstDash val="solid"/>
-                      <a:round/>
-                      <a:headEnd type="none" w="med" len="med"/>
-                      <a:tailEnd type="none" w="med" len="med"/>
-                    </a:lnB>
-                    <a:solidFill>
-                      <a:srgbClr val="E8F5EE"/>
-                    </a:solidFill>
-                  </a:tcPr>
-                </a:tc>
-              </a:tr>
-              <a:tr h="0">
-                <a:tc>
-                  <a:txBody>
-                    <a:bodyPr/>
-                    <a:lstStyle/>
-                    <a:p>
-                      <a:pPr indent="0" marL="0">
-                        <a:buNone/>
-                      </a:pPr>
-                      <a:r>
-                        <a:rPr lang="en-US" sz="1200" dirty="0">
-                          <a:solidFill>
-                            <a:srgbClr val="1F2A24"/>
-                          </a:solidFill>
-                          <a:latin typeface="Calibri" pitchFamily="34" charset="0"/>
-                          <a:ea typeface="Calibri" pitchFamily="34" charset="-122"/>
-                          <a:cs typeface="Calibri" pitchFamily="34" charset="-120"/>
-                        </a:rPr>
-                        <a:t>Ver tickets sin rol · estadísticas sin token</a:t>
-                      </a:r>
-                      <a:endParaRPr lang="en-US" sz="1200" dirty="0">
-                        <a:latin typeface="Calibri" charset="0"/>
-                        <a:ea typeface="Calibri" charset="0"/>
-                        <a:cs typeface="Calibri" charset="0"/>
-                      </a:endParaRPr>
-                    </a:p>
-                  </a:txBody>
-                  <a:tcPr marL="73152" marR="73152" marT="36576" marB="36576" anchor="ctr">
-                    <a:lnL w="6350" cap="flat" cmpd="sng" algn="ctr">
-                      <a:solidFill>
-                        <a:srgbClr val="D5E8DD"/>
-                      </a:solidFill>
-                      <a:prstDash val="solid"/>
-                      <a:round/>
-                      <a:headEnd type="none" w="med" len="med"/>
-                      <a:tailEnd type="none" w="med" len="med"/>
-                    </a:lnL>
-                    <a:lnR w="6350" cap="flat" cmpd="sng" algn="ctr">
-                      <a:solidFill>
-                        <a:srgbClr val="D5E8DD"/>
-                      </a:solidFill>
-                      <a:prstDash val="solid"/>
-                      <a:round/>
-                      <a:headEnd type="none" w="med" len="med"/>
-                      <a:tailEnd type="none" w="med" len="med"/>
-                    </a:lnR>
-                    <a:lnT w="6350" cap="flat" cmpd="sng" algn="ctr">
-                      <a:solidFill>
-                        <a:srgbClr val="D5E8DD"/>
-                      </a:solidFill>
-                      <a:prstDash val="solid"/>
-                      <a:round/>
-                      <a:headEnd type="none" w="med" len="med"/>
-                      <a:tailEnd type="none" w="med" len="med"/>
-                    </a:lnT>
-                    <a:lnB w="6350" cap="flat" cmpd="sng" algn="ctr">
-                      <a:solidFill>
-                        <a:srgbClr val="D5E8DD"/>
-                      </a:solidFill>
-                      <a:prstDash val="solid"/>
-                      <a:round/>
-                      <a:headEnd type="none" w="med" len="med"/>
-                      <a:tailEnd type="none" w="med" len="med"/>
-                    </a:lnB>
-                    <a:solidFill>
-                      <a:srgbClr val="FFFFFF"/>
-                    </a:solidFill>
-                  </a:tcPr>
-                </a:tc>
-                <a:tc>
-                  <a:txBody>
-                    <a:bodyPr/>
-                    <a:lstStyle/>
-                    <a:p>
-                      <a:pPr indent="0" marL="0">
-                        <a:buNone/>
-                      </a:pPr>
-                      <a:r>
-                        <a:rPr lang="en-US" sz="1200" dirty="0">
-                          <a:solidFill>
-                            <a:srgbClr val="1F2A24"/>
-                          </a:solidFill>
-                          <a:latin typeface="Calibri" pitchFamily="34" charset="0"/>
-                          <a:ea typeface="Calibri" pitchFamily="34" charset="-122"/>
-                          <a:cs typeface="Calibri" pitchFamily="34" charset="-120"/>
-                        </a:rPr>
-                        <a:t>vecino · —</a:t>
-                      </a:r>
-                      <a:endParaRPr lang="en-US" sz="1200" dirty="0">
-                        <a:latin typeface="Calibri" charset="0"/>
-                        <a:ea typeface="Calibri" charset="0"/>
-                        <a:cs typeface="Calibri" charset="0"/>
-                      </a:endParaRPr>
-                    </a:p>
-                  </a:txBody>
-                  <a:tcPr marL="73152" marR="73152" marT="36576" marB="36576" anchor="ctr">
-                    <a:lnL w="6350" cap="flat" cmpd="sng" algn="ctr">
-                      <a:solidFill>
-                        <a:srgbClr val="D5E8DD"/>
-                      </a:solidFill>
-                      <a:prstDash val="solid"/>
-                      <a:round/>
-                      <a:headEnd type="none" w="med" len="med"/>
-                      <a:tailEnd type="none" w="med" len="med"/>
-                    </a:lnL>
-                    <a:lnR w="6350" cap="flat" cmpd="sng" algn="ctr">
-                      <a:solidFill>
-                        <a:srgbClr val="D5E8DD"/>
-                      </a:solidFill>
-                      <a:prstDash val="solid"/>
-                      <a:round/>
-                      <a:headEnd type="none" w="med" len="med"/>
-                      <a:tailEnd type="none" w="med" len="med"/>
-                    </a:lnR>
-                    <a:lnT w="6350" cap="flat" cmpd="sng" algn="ctr">
-                      <a:solidFill>
-                        <a:srgbClr val="D5E8DD"/>
-                      </a:solidFill>
-                      <a:prstDash val="solid"/>
-                      <a:round/>
-                      <a:headEnd type="none" w="med" len="med"/>
-                      <a:tailEnd type="none" w="med" len="med"/>
-                    </a:lnT>
-                    <a:lnB w="6350" cap="flat" cmpd="sng" algn="ctr">
-                      <a:solidFill>
-                        <a:srgbClr val="D5E8DD"/>
-                      </a:solidFill>
-                      <a:prstDash val="solid"/>
-                      <a:round/>
-                      <a:headEnd type="none" w="med" len="med"/>
-                      <a:tailEnd type="none" w="med" len="med"/>
-                    </a:lnB>
-                    <a:solidFill>
-                      <a:srgbClr val="FFFFFF"/>
-                    </a:solidFill>
-                  </a:tcPr>
-                </a:tc>
-                <a:tc>
-                  <a:txBody>
-                    <a:bodyPr/>
-                    <a:lstStyle/>
-                    <a:p>
-                      <a:pPr indent="0" marL="0">
-                        <a:buNone/>
-                      </a:pPr>
-                      <a:r>
-                        <a:rPr lang="en-US" sz="1200" b="1" dirty="0">
-                          <a:solidFill>
-                            <a:srgbClr val="C0392B"/>
-                          </a:solidFill>
-                          <a:latin typeface="Calibri" pitchFamily="34" charset="0"/>
-                          <a:ea typeface="Calibri" pitchFamily="34" charset="-122"/>
-                          <a:cs typeface="Calibri" pitchFamily="34" charset="-120"/>
-                        </a:rPr>
-                        <a:t>403 · 401</a:t>
-                      </a:r>
-                      <a:endParaRPr lang="en-US" sz="1200" dirty="0">
-                        <a:latin typeface="Calibri" charset="0"/>
-                        <a:ea typeface="Calibri" charset="0"/>
-                        <a:cs typeface="Calibri" charset="0"/>
-                      </a:endParaRPr>
-                    </a:p>
-                  </a:txBody>
-                  <a:tcPr marL="73152" marR="73152" marT="36576" marB="36576" anchor="ctr">
-                    <a:lnL w="6350" cap="flat" cmpd="sng" algn="ctr">
-                      <a:solidFill>
-                        <a:srgbClr val="D5E8DD"/>
-                      </a:solidFill>
-                      <a:prstDash val="solid"/>
-                      <a:round/>
-                      <a:headEnd type="none" w="med" len="med"/>
-                      <a:tailEnd type="none" w="med" len="med"/>
-                    </a:lnL>
-                    <a:lnR w="6350" cap="flat" cmpd="sng" algn="ctr">
-                      <a:solidFill>
-                        <a:srgbClr val="D5E8DD"/>
-                      </a:solidFill>
-                      <a:prstDash val="solid"/>
-                      <a:round/>
-                      <a:headEnd type="none" w="med" len="med"/>
-                      <a:tailEnd type="none" w="med" len="med"/>
-                    </a:lnR>
-                    <a:lnT w="6350" cap="flat" cmpd="sng" algn="ctr">
-                      <a:solidFill>
-                        <a:srgbClr val="D5E8DD"/>
-                      </a:solidFill>
-                      <a:prstDash val="solid"/>
-                      <a:round/>
-                      <a:headEnd type="none" w="med" len="med"/>
-                      <a:tailEnd type="none" w="med" len="med"/>
-                    </a:lnT>
-                    <a:lnB w="6350" cap="flat" cmpd="sng" algn="ctr">
-                      <a:solidFill>
-                        <a:srgbClr val="D5E8DD"/>
-                      </a:solidFill>
-                      <a:prstDash val="solid"/>
-                      <a:round/>
-                      <a:headEnd type="none" w="med" len="med"/>
-                      <a:tailEnd type="none" w="med" len="med"/>
-                    </a:lnB>
-                    <a:solidFill>
-                      <a:srgbClr val="FFFFFF"/>
-                    </a:solidFill>
-                  </a:tcPr>
-                </a:tc>
-              </a:tr>
-              <a:tr h="0">
-                <a:tc>
-                  <a:txBody>
-                    <a:bodyPr/>
-                    <a:lstStyle/>
-                    <a:p>
-                      <a:pPr indent="0" marL="0">
-                        <a:buNone/>
-                      </a:pPr>
-                      <a:r>
-                        <a:rPr lang="en-US" sz="1200" dirty="0">
-                          <a:solidFill>
-                            <a:srgbClr val="1F2A24"/>
-                          </a:solidFill>
-                          <a:latin typeface="Calibri" pitchFamily="34" charset="0"/>
-                          <a:ea typeface="Calibri" pitchFamily="34" charset="-122"/>
-                          <a:cs typeface="Calibri" pitchFamily="34" charset="-120"/>
-                        </a:rPr>
-                        <a:t>Admin sin rol · nombre amq.x · cola repetida · cola con consumidor</a:t>
-                      </a:r>
-                      <a:endParaRPr lang="en-US" sz="1200" dirty="0">
-                        <a:latin typeface="Calibri" charset="0"/>
-                        <a:ea typeface="Calibri" charset="0"/>
-                        <a:cs typeface="Calibri" charset="0"/>
-                      </a:endParaRPr>
-                    </a:p>
-                  </a:txBody>
-                  <a:tcPr marL="73152" marR="73152" marT="36576" marB="36576" anchor="ctr">
-                    <a:lnL w="6350" cap="flat" cmpd="sng" algn="ctr">
-                      <a:solidFill>
-                        <a:srgbClr val="D5E8DD"/>
-                      </a:solidFill>
-                      <a:prstDash val="solid"/>
-                      <a:round/>
-                      <a:headEnd type="none" w="med" len="med"/>
-                      <a:tailEnd type="none" w="med" len="med"/>
-                    </a:lnL>
-                    <a:lnR w="6350" cap="flat" cmpd="sng" algn="ctr">
-                      <a:solidFill>
-                        <a:srgbClr val="D5E8DD"/>
-                      </a:solidFill>
-                      <a:prstDash val="solid"/>
-                      <a:round/>
-                      <a:headEnd type="none" w="med" len="med"/>
-                      <a:tailEnd type="none" w="med" len="med"/>
-                    </a:lnR>
-                    <a:lnT w="6350" cap="flat" cmpd="sng" algn="ctr">
-                      <a:solidFill>
-                        <a:srgbClr val="D5E8DD"/>
-                      </a:solidFill>
-                      <a:prstDash val="solid"/>
-                      <a:round/>
-                      <a:headEnd type="none" w="med" len="med"/>
-                      <a:tailEnd type="none" w="med" len="med"/>
-                    </a:lnT>
-                    <a:lnB w="6350" cap="flat" cmpd="sng" algn="ctr">
-                      <a:solidFill>
-                        <a:srgbClr val="D5E8DD"/>
-                      </a:solidFill>
-                      <a:prstDash val="solid"/>
-                      <a:round/>
-                      <a:headEnd type="none" w="med" len="med"/>
-                      <a:tailEnd type="none" w="med" len="med"/>
-                    </a:lnB>
-                    <a:solidFill>
-                      <a:srgbClr val="E8F5EE"/>
-                    </a:solidFill>
-                  </a:tcPr>
-                </a:tc>
-                <a:tc>
-                  <a:txBody>
-                    <a:bodyPr/>
-                    <a:lstStyle/>
-                    <a:p>
-                      <a:pPr indent="0" marL="0">
-                        <a:buNone/>
-                      </a:pPr>
-                      <a:r>
-                        <a:rPr lang="en-US" sz="1200" dirty="0">
-                          <a:solidFill>
-                            <a:srgbClr val="1F2A24"/>
-                          </a:solidFill>
-                          <a:latin typeface="Calibri" pitchFamily="34" charset="0"/>
-                          <a:ea typeface="Calibri" pitchFamily="34" charset="-122"/>
-                          <a:cs typeface="Calibri" pitchFamily="34" charset="-120"/>
-                        </a:rPr>
-                        <a:t>encargado · admin</a:t>
-                      </a:r>
-                      <a:endParaRPr lang="en-US" sz="1200" dirty="0">
-                        <a:latin typeface="Calibri" charset="0"/>
-                        <a:ea typeface="Calibri" charset="0"/>
-                        <a:cs typeface="Calibri" charset="0"/>
-                      </a:endParaRPr>
-                    </a:p>
-                  </a:txBody>
-                  <a:tcPr marL="73152" marR="73152" marT="36576" marB="36576" anchor="ctr">
-                    <a:lnL w="6350" cap="flat" cmpd="sng" algn="ctr">
-                      <a:solidFill>
-                        <a:srgbClr val="D5E8DD"/>
-                      </a:solidFill>
-                      <a:prstDash val="solid"/>
-                      <a:round/>
-                      <a:headEnd type="none" w="med" len="med"/>
-                      <a:tailEnd type="none" w="med" len="med"/>
-                    </a:lnL>
-                    <a:lnR w="6350" cap="flat" cmpd="sng" algn="ctr">
-                      <a:solidFill>
-                        <a:srgbClr val="D5E8DD"/>
-                      </a:solidFill>
-                      <a:prstDash val="solid"/>
-                      <a:round/>
-                      <a:headEnd type="none" w="med" len="med"/>
-                      <a:tailEnd type="none" w="med" len="med"/>
-                    </a:lnR>
-                    <a:lnT w="6350" cap="flat" cmpd="sng" algn="ctr">
-                      <a:solidFill>
-                        <a:srgbClr val="D5E8DD"/>
-                      </a:solidFill>
-                      <a:prstDash val="solid"/>
-                      <a:round/>
-                      <a:headEnd type="none" w="med" len="med"/>
-                      <a:tailEnd type="none" w="med" len="med"/>
-                    </a:lnT>
-                    <a:lnB w="6350" cap="flat" cmpd="sng" algn="ctr">
-                      <a:solidFill>
-                        <a:srgbClr val="D5E8DD"/>
-                      </a:solidFill>
-                      <a:prstDash val="solid"/>
-                      <a:round/>
-                      <a:headEnd type="none" w="med" len="med"/>
-                      <a:tailEnd type="none" w="med" len="med"/>
-                    </a:lnB>
-                    <a:solidFill>
-                      <a:srgbClr val="E8F5EE"/>
-                    </a:solidFill>
-                  </a:tcPr>
-                </a:tc>
-                <a:tc>
-                  <a:txBody>
-                    <a:bodyPr/>
-                    <a:lstStyle/>
-                    <a:p>
-                      <a:pPr indent="0" marL="0">
-                        <a:buNone/>
-                      </a:pPr>
-                      <a:r>
-                        <a:rPr lang="en-US" sz="1200" b="1" dirty="0">
-                          <a:solidFill>
-                            <a:srgbClr val="2D6A4F"/>
-                          </a:solidFill>
-                          <a:latin typeface="Calibri" pitchFamily="34" charset="0"/>
-                          <a:ea typeface="Calibri" pitchFamily="34" charset="-122"/>
-                          <a:cs typeface="Calibri" pitchFamily="34" charset="-120"/>
-                        </a:rPr>
-                        <a:t>403 · 400 · 409 · 409</a:t>
-                      </a:r>
-                      <a:endParaRPr lang="en-US" sz="1200" dirty="0">
-                        <a:latin typeface="Calibri" charset="0"/>
-                        <a:ea typeface="Calibri" charset="0"/>
-                        <a:cs typeface="Calibri" charset="0"/>
-                      </a:endParaRPr>
-                    </a:p>
-                  </a:txBody>
-                  <a:tcPr marL="73152" marR="73152" marT="36576" marB="36576" anchor="ctr">
-                    <a:lnL w="6350" cap="flat" cmpd="sng" algn="ctr">
-                      <a:solidFill>
-                        <a:srgbClr val="D5E8DD"/>
-                      </a:solidFill>
-                      <a:prstDash val="solid"/>
-                      <a:round/>
-                      <a:headEnd type="none" w="med" len="med"/>
-                      <a:tailEnd type="none" w="med" len="med"/>
-                    </a:lnL>
-                    <a:lnR w="6350" cap="flat" cmpd="sng" algn="ctr">
-                      <a:solidFill>
-                        <a:srgbClr val="D5E8DD"/>
-                      </a:solidFill>
-                      <a:prstDash val="solid"/>
-                      <a:round/>
-                      <a:headEnd type="none" w="med" len="med"/>
-                      <a:tailEnd type="none" w="med" len="med"/>
-                    </a:lnR>
-                    <a:lnT w="6350" cap="flat" cmpd="sng" algn="ctr">
-                      <a:solidFill>
-                        <a:srgbClr val="D5E8DD"/>
-                      </a:solidFill>
-                      <a:prstDash val="solid"/>
-                      <a:round/>
-                      <a:headEnd type="none" w="med" len="med"/>
-                      <a:tailEnd type="none" w="med" len="med"/>
-                    </a:lnT>
-                    <a:lnB w="6350" cap="flat" cmpd="sng" algn="ctr">
-                      <a:solidFill>
-                        <a:srgbClr val="D5E8DD"/>
-                      </a:solidFill>
-                      <a:prstDash val="solid"/>
-                      <a:round/>
-                      <a:headEnd type="none" w="med" len="med"/>
-                      <a:tailEnd type="none" w="med" len="med"/>
-                    </a:lnB>
-                    <a:solidFill>
-                      <a:srgbClr val="E8F5EE"/>
-                    </a:solidFill>
-                  </a:tcPr>
-                </a:tc>
-              </a:tr>
-              <a:tr h="0">
-                <a:tc>
-                  <a:txBody>
-                    <a:bodyPr/>
-                    <a:lstStyle/>
-                    <a:p>
-                      <a:pPr indent="0" marL="0">
-                        <a:buNone/>
-                      </a:pPr>
-                      <a:r>
-                        <a:rPr lang="en-US" sz="1200" dirty="0">
-                          <a:solidFill>
-                            <a:srgbClr val="1F2A24"/>
-                          </a:solidFill>
-                          <a:latin typeface="Calibri" pitchFamily="34" charset="0"/>
-                          <a:ea typeface="Calibri" pitchFamily="34" charset="-122"/>
-                          <a:cs typeface="Calibri" pitchFamily="34" charset="-120"/>
-                        </a:rPr>
-                        <a:t>Mensaje con JSON inválido en ecopunto.tareas</a:t>
-                      </a:r>
-                      <a:endParaRPr lang="en-US" sz="1200" dirty="0">
-                        <a:latin typeface="Calibri" charset="0"/>
-                        <a:ea typeface="Calibri" charset="0"/>
-                        <a:cs typeface="Calibri" charset="0"/>
-                      </a:endParaRPr>
-                    </a:p>
-                  </a:txBody>
-                  <a:tcPr marL="73152" marR="73152" marT="36576" marB="36576" anchor="ctr">
-                    <a:lnL w="6350" cap="flat" cmpd="sng" algn="ctr">
-                      <a:solidFill>
-                        <a:srgbClr val="D5E8DD"/>
-                      </a:solidFill>
-                      <a:prstDash val="solid"/>
-                      <a:round/>
-                      <a:headEnd type="none" w="med" len="med"/>
-                      <a:tailEnd type="none" w="med" len="med"/>
-                    </a:lnL>
-                    <a:lnR w="6350" cap="flat" cmpd="sng" algn="ctr">
-                      <a:solidFill>
-                        <a:srgbClr val="D5E8DD"/>
-                      </a:solidFill>
-                      <a:prstDash val="solid"/>
-                      <a:round/>
-                      <a:headEnd type="none" w="med" len="med"/>
-                      <a:tailEnd type="none" w="med" len="med"/>
-                    </a:lnR>
-                    <a:lnT w="6350" cap="flat" cmpd="sng" algn="ctr">
-                      <a:solidFill>
-                        <a:srgbClr val="D5E8DD"/>
-                      </a:solidFill>
-                      <a:prstDash val="solid"/>
-                      <a:round/>
-                      <a:headEnd type="none" w="med" len="med"/>
-                      <a:tailEnd type="none" w="med" len="med"/>
-                    </a:lnT>
-                    <a:lnB w="6350" cap="flat" cmpd="sng" algn="ctr">
-                      <a:solidFill>
-                        <a:srgbClr val="D5E8DD"/>
-                      </a:solidFill>
-                      <a:prstDash val="solid"/>
-                      <a:round/>
-                      <a:headEnd type="none" w="med" len="med"/>
-                      <a:tailEnd type="none" w="med" len="med"/>
-                    </a:lnB>
-                    <a:solidFill>
-                      <a:srgbClr val="FFFFFF"/>
-                    </a:solidFill>
-                  </a:tcPr>
-                </a:tc>
-                <a:tc>
-                  <a:txBody>
-                    <a:bodyPr/>
-                    <a:lstStyle/>
-                    <a:p>
-                      <a:pPr indent="0" marL="0">
-                        <a:buNone/>
-                      </a:pPr>
-                      <a:r>
-                        <a:rPr lang="en-US" sz="1200" dirty="0">
-                          <a:solidFill>
-                            <a:srgbClr val="1F2A24"/>
-                          </a:solidFill>
-                          <a:latin typeface="Calibri" pitchFamily="34" charset="0"/>
-                          <a:ea typeface="Calibri" pitchFamily="34" charset="-122"/>
-                          <a:cs typeface="Calibri" pitchFamily="34" charset="-120"/>
-                        </a:rPr>
-                        <a:t>—</a:t>
-                      </a:r>
-                      <a:endParaRPr lang="en-US" sz="1200" dirty="0">
-                        <a:latin typeface="Calibri" charset="0"/>
-                        <a:ea typeface="Calibri" charset="0"/>
-                        <a:cs typeface="Calibri" charset="0"/>
-                      </a:endParaRPr>
-                    </a:p>
-                  </a:txBody>
-                  <a:tcPr marL="73152" marR="73152" marT="36576" marB="36576" anchor="ctr">
-                    <a:lnL w="6350" cap="flat" cmpd="sng" algn="ctr">
-                      <a:solidFill>
-                        <a:srgbClr val="D5E8DD"/>
-                      </a:solidFill>
-                      <a:prstDash val="solid"/>
-                      <a:round/>
-                      <a:headEnd type="none" w="med" len="med"/>
-                      <a:tailEnd type="none" w="med" len="med"/>
-                    </a:lnL>
-                    <a:lnR w="6350" cap="flat" cmpd="sng" algn="ctr">
-                      <a:solidFill>
-                        <a:srgbClr val="D5E8DD"/>
-                      </a:solidFill>
-                      <a:prstDash val="solid"/>
-                      <a:round/>
-                      <a:headEnd type="none" w="med" len="med"/>
-                      <a:tailEnd type="none" w="med" len="med"/>
-                    </a:lnR>
-                    <a:lnT w="6350" cap="flat" cmpd="sng" algn="ctr">
-                      <a:solidFill>
-                        <a:srgbClr val="D5E8DD"/>
-                      </a:solidFill>
-                      <a:prstDash val="solid"/>
-                      <a:round/>
-                      <a:headEnd type="none" w="med" len="med"/>
-                      <a:tailEnd type="none" w="med" len="med"/>
-                    </a:lnT>
-                    <a:lnB w="6350" cap="flat" cmpd="sng" algn="ctr">
-                      <a:solidFill>
-                        <a:srgbClr val="D5E8DD"/>
-                      </a:solidFill>
-                      <a:prstDash val="solid"/>
-                      <a:round/>
-                      <a:headEnd type="none" w="med" len="med"/>
-                      <a:tailEnd type="none" w="med" len="med"/>
-                    </a:lnB>
-                    <a:solidFill>
-                      <a:srgbClr val="FFFFFF"/>
-                    </a:solidFill>
-                  </a:tcPr>
-                </a:tc>
-                <a:tc>
-                  <a:txBody>
-                    <a:bodyPr/>
-                    <a:lstStyle/>
-                    <a:p>
-                      <a:pPr indent="0" marL="0">
-                        <a:buNone/>
-                      </a:pPr>
-                      <a:r>
-                        <a:rPr lang="en-US" sz="1200" b="1" dirty="0">
-                          <a:solidFill>
-                            <a:srgbClr val="2D6A4F"/>
-                          </a:solidFill>
-                          <a:latin typeface="Calibri" pitchFamily="34" charset="0"/>
-                          <a:ea typeface="Calibri" pitchFamily="34" charset="-122"/>
-                          <a:cs typeface="Calibri" pitchFamily="34" charset="-120"/>
-                        </a:rPr>
-                        <a:t>DLQ con x-death</a:t>
-                      </a:r>
-                      <a:endParaRPr lang="en-US" sz="1200" dirty="0">
-                        <a:latin typeface="Calibri" charset="0"/>
-                        <a:ea typeface="Calibri" charset="0"/>
-                        <a:cs typeface="Calibri" charset="0"/>
-                      </a:endParaRPr>
-                    </a:p>
-                  </a:txBody>
-                  <a:tcPr marL="73152" marR="73152" marT="36576" marB="36576" anchor="ctr">
-                    <a:lnL w="6350" cap="flat" cmpd="sng" algn="ctr">
-                      <a:solidFill>
-                        <a:srgbClr val="D5E8DD"/>
-                      </a:solidFill>
-                      <a:prstDash val="solid"/>
-                      <a:round/>
-                      <a:headEnd type="none" w="med" len="med"/>
-                      <a:tailEnd type="none" w="med" len="med"/>
-                    </a:lnL>
-                    <a:lnR w="6350" cap="flat" cmpd="sng" algn="ctr">
-                      <a:solidFill>
-                        <a:srgbClr val="D5E8DD"/>
-                      </a:solidFill>
-                      <a:prstDash val="solid"/>
-                      <a:round/>
-                      <a:headEnd type="none" w="med" len="med"/>
-                      <a:tailEnd type="none" w="med" len="med"/>
-                    </a:lnR>
-                    <a:lnT w="6350" cap="flat" cmpd="sng" algn="ctr">
-                      <a:solidFill>
-                        <a:srgbClr val="D5E8DD"/>
-                      </a:solidFill>
-                      <a:prstDash val="solid"/>
-                      <a:round/>
-                      <a:headEnd type="none" w="med" len="med"/>
-                      <a:tailEnd type="none" w="med" len="med"/>
-                    </a:lnT>
-                    <a:lnB w="6350" cap="flat" cmpd="sng" algn="ctr">
-                      <a:solidFill>
-                        <a:srgbClr val="D5E8DD"/>
-                      </a:solidFill>
-                      <a:prstDash val="solid"/>
-                      <a:round/>
-                      <a:headEnd type="none" w="med" len="med"/>
-                      <a:tailEnd type="none" w="med" len="med"/>
-                    </a:lnB>
-                    <a:solidFill>
-                      <a:srgbClr val="FFFFFF"/>
-                    </a:solidFill>
-                  </a:tcPr>
-                </a:tc>
-              </a:tr>
-              <a:tr h="0">
-                <a:tc>
-                  <a:txBody>
-                    <a:bodyPr/>
-                    <a:lstStyle/>
-                    <a:p>
-                      <a:pPr indent="0" marL="0">
-                        <a:buNone/>
-                      </a:pPr>
-                      <a:r>
-                        <a:rPr lang="en-US" sz="1200" dirty="0">
-                          <a:solidFill>
-                            <a:srgbClr val="1F2A24"/>
-                          </a:solidFill>
-                          <a:latin typeface="Calibri" pitchFamily="34" charset="0"/>
-                          <a:ea typeface="Calibri" pitchFamily="34" charset="-122"/>
-                          <a:cs typeface="Calibri" pitchFamily="34" charset="-120"/>
-                        </a:rPr>
-                        <a:t>ms-tickets detenido al pasar a revisión</a:t>
-                      </a:r>
-                      <a:endParaRPr lang="en-US" sz="1200" dirty="0">
-                        <a:latin typeface="Calibri" charset="0"/>
-                        <a:ea typeface="Calibri" charset="0"/>
-                        <a:cs typeface="Calibri" charset="0"/>
-                      </a:endParaRPr>
-                    </a:p>
-                  </a:txBody>
-                  <a:tcPr marL="73152" marR="73152" marT="36576" marB="36576" anchor="ctr">
-                    <a:lnL w="6350" cap="flat" cmpd="sng" algn="ctr">
-                      <a:solidFill>
-                        <a:srgbClr val="D5E8DD"/>
-                      </a:solidFill>
-                      <a:prstDash val="solid"/>
-                      <a:round/>
-                      <a:headEnd type="none" w="med" len="med"/>
-                      <a:tailEnd type="none" w="med" len="med"/>
-                    </a:lnL>
-                    <a:lnR w="6350" cap="flat" cmpd="sng" algn="ctr">
-                      <a:solidFill>
-                        <a:srgbClr val="D5E8DD"/>
-                      </a:solidFill>
-                      <a:prstDash val="solid"/>
-                      <a:round/>
-                      <a:headEnd type="none" w="med" len="med"/>
-                      <a:tailEnd type="none" w="med" len="med"/>
-                    </a:lnR>
-                    <a:lnT w="6350" cap="flat" cmpd="sng" algn="ctr">
-                      <a:solidFill>
-                        <a:srgbClr val="D5E8DD"/>
-                      </a:solidFill>
-                      <a:prstDash val="solid"/>
-                      <a:round/>
-                      <a:headEnd type="none" w="med" len="med"/>
-                      <a:tailEnd type="none" w="med" len="med"/>
-                    </a:lnT>
-                    <a:lnB w="6350" cap="flat" cmpd="sng" algn="ctr">
-                      <a:solidFill>
-                        <a:srgbClr val="D5E8DD"/>
-                      </a:solidFill>
-                      <a:prstDash val="solid"/>
-                      <a:round/>
-                      <a:headEnd type="none" w="med" len="med"/>
-                      <a:tailEnd type="none" w="med" len="med"/>
-                    </a:lnB>
-                    <a:solidFill>
-                      <a:srgbClr val="E8F5EE"/>
-                    </a:solidFill>
-                  </a:tcPr>
-                </a:tc>
-                <a:tc>
-                  <a:txBody>
-                    <a:bodyPr/>
-                    <a:lstStyle/>
-                    <a:p>
-                      <a:pPr indent="0" marL="0">
-                        <a:buNone/>
-                      </a:pPr>
-                      <a:r>
-                        <a:rPr lang="en-US" sz="1200" dirty="0">
-                          <a:solidFill>
-                            <a:srgbClr val="1F2A24"/>
-                          </a:solidFill>
-                          <a:latin typeface="Calibri" pitchFamily="34" charset="0"/>
-                          <a:ea typeface="Calibri" pitchFamily="34" charset="-122"/>
-                          <a:cs typeface="Calibri" pitchFamily="34" charset="-120"/>
-                        </a:rPr>
-                        <a:t>encargado</a:t>
-                      </a:r>
-                      <a:endParaRPr lang="en-US" sz="1200" dirty="0">
-                        <a:latin typeface="Calibri" charset="0"/>
-                        <a:ea typeface="Calibri" charset="0"/>
-                        <a:cs typeface="Calibri" charset="0"/>
-                      </a:endParaRPr>
-                    </a:p>
-                  </a:txBody>
-                  <a:tcPr marL="73152" marR="73152" marT="36576" marB="36576" anchor="ctr">
-                    <a:lnL w="6350" cap="flat" cmpd="sng" algn="ctr">
-                      <a:solidFill>
-                        <a:srgbClr val="D5E8DD"/>
-                      </a:solidFill>
-                      <a:prstDash val="solid"/>
-                      <a:round/>
-                      <a:headEnd type="none" w="med" len="med"/>
-                      <a:tailEnd type="none" w="med" len="med"/>
-                    </a:lnL>
-                    <a:lnR w="6350" cap="flat" cmpd="sng" algn="ctr">
-                      <a:solidFill>
-                        <a:srgbClr val="D5E8DD"/>
-                      </a:solidFill>
-                      <a:prstDash val="solid"/>
-                      <a:round/>
-                      <a:headEnd type="none" w="med" len="med"/>
-                      <a:tailEnd type="none" w="med" len="med"/>
-                    </a:lnR>
-                    <a:lnT w="6350" cap="flat" cmpd="sng" algn="ctr">
-                      <a:solidFill>
-                        <a:srgbClr val="D5E8DD"/>
-                      </a:solidFill>
-                      <a:prstDash val="solid"/>
-                      <a:round/>
-                      <a:headEnd type="none" w="med" len="med"/>
-                      <a:tailEnd type="none" w="med" len="med"/>
-                    </a:lnT>
-                    <a:lnB w="6350" cap="flat" cmpd="sng" algn="ctr">
-                      <a:solidFill>
-                        <a:srgbClr val="D5E8DD"/>
-                      </a:solidFill>
-                      <a:prstDash val="solid"/>
-                      <a:round/>
-                      <a:headEnd type="none" w="med" len="med"/>
-                      <a:tailEnd type="none" w="med" len="med"/>
-                    </a:lnB>
-                    <a:solidFill>
-                      <a:srgbClr val="E8F5EE"/>
-                    </a:solidFill>
-                  </a:tcPr>
-                </a:tc>
-                <a:tc>
-                  <a:txBody>
-                    <a:bodyPr/>
-                    <a:lstStyle/>
-                    <a:p>
-                      <a:pPr indent="0" marL="0">
-                        <a:buNone/>
-                      </a:pPr>
-                      <a:r>
-                        <a:rPr lang="en-US" sz="1200" b="1" dirty="0">
-                          <a:solidFill>
-                            <a:srgbClr val="2D6A4F"/>
-                          </a:solidFill>
-                          <a:latin typeface="Calibri" pitchFamily="34" charset="0"/>
-                          <a:ea typeface="Calibri" pitchFamily="34" charset="-122"/>
-                          <a:cs typeface="Calibri" pitchFamily="34" charset="-120"/>
-                        </a:rPr>
-                        <a:t>200 en 0,04 s; ticket al volver</a:t>
-                      </a:r>
-                      <a:endParaRPr lang="en-US" sz="1200" dirty="0">
-                        <a:latin typeface="Calibri" charset="0"/>
-                        <a:ea typeface="Calibri" charset="0"/>
-                        <a:cs typeface="Calibri" charset="0"/>
-                      </a:endParaRPr>
-                    </a:p>
-                  </a:txBody>
-                  <a:tcPr marL="73152" marR="73152" marT="36576" marB="36576" anchor="ctr">
-                    <a:lnL w="6350" cap="flat" cmpd="sng" algn="ctr">
-                      <a:solidFill>
-                        <a:srgbClr val="D5E8DD"/>
-                      </a:solidFill>
-                      <a:prstDash val="solid"/>
-                      <a:round/>
-                      <a:headEnd type="none" w="med" len="med"/>
-                      <a:tailEnd type="none" w="med" len="med"/>
-                    </a:lnL>
-                    <a:lnR w="6350" cap="flat" cmpd="sng" algn="ctr">
-                      <a:solidFill>
-                        <a:srgbClr val="D5E8DD"/>
-                      </a:solidFill>
-                      <a:prstDash val="solid"/>
-                      <a:round/>
-                      <a:headEnd type="none" w="med" len="med"/>
-                      <a:tailEnd type="none" w="med" len="med"/>
-                    </a:lnR>
-                    <a:lnT w="6350" cap="flat" cmpd="sng" algn="ctr">
-                      <a:solidFill>
-                        <a:srgbClr val="D5E8DD"/>
-                      </a:solidFill>
-                      <a:prstDash val="solid"/>
-                      <a:round/>
-                      <a:headEnd type="none" w="med" len="med"/>
-                      <a:tailEnd type="none" w="med" len="med"/>
-                    </a:lnT>
-                    <a:lnB w="6350" cap="flat" cmpd="sng" algn="ctr">
-                      <a:solidFill>
-                        <a:srgbClr val="D5E8DD"/>
-                      </a:solidFill>
-                      <a:prstDash val="solid"/>
-                      <a:round/>
-                      <a:headEnd type="none" w="med" len="med"/>
-                      <a:tailEnd type="none" w="med" len="med"/>
-                    </a:lnB>
-                    <a:solidFill>
-                      <a:srgbClr val="E8F5EE"/>
-                    </a:solidFill>
-                  </a:tcPr>
-                </a:tc>
-              </a:tr>
-            </a:tbl>
-          </a:graphicData>
-        </a:graphic>
-      </p:graphicFrame>
-      <p:sp>
-        <p:nvSpPr>
-          <p:cNvPr id="4" name="Text 1"/>
+              <a:t>1</a:t>
+            </a:r>
+            <a:endParaRPr lang="en-US" sz="1600" dirty="0"/>
+          </a:p>
+        </p:txBody>
+      </p:sp>
+      <p:sp>
+        <p:nvSpPr>
+          <p:cNvPr id="5" name="Text 3"/>
           <p:cNvSpPr txBox="1"/>
           <p:nvPr/>
         </p:nvSpPr>
         <p:spPr>
           <a:xfrm>
-            <a:off x="411480" y="4480560"/>
-            <a:ext cx="8321040" cy="365760"/>
+            <a:off x="1143000" y="1280160"/>
+            <a:ext cx="3383280" cy="640080"/>
           </a:xfrm>
           <a:prstGeom prst="rect">
             <a:avLst/>
@@ -4801,24 +2274,539 @@
           <a:ln/>
         </p:spPr>
         <p:txBody>
-          <a:bodyPr wrap="square" lIns="0" tIns="0" rIns="0" bIns="0" rtlCol="0" anchor="t"/>
+          <a:bodyPr wrap="square" lIns="0" tIns="0" rIns="0" bIns="0" rtlCol="0" anchor="ctr"/>
           <a:lstStyle/>
           <a:p>
             <a:pPr indent="0" marL="0">
               <a:buNone/>
             </a:pPr>
             <a:r>
-              <a:rPr lang="en-US" sz="1100" dirty="0">
-                <a:solidFill>
-                  <a:srgbClr val="5C6B63"/>
-                </a:solidFill>
-                <a:latin typeface="Calibri" pitchFamily="34" charset="0"/>
-                <a:ea typeface="Calibri" pitchFamily="34" charset="-122"/>
-                <a:cs typeface="Calibri" pitchFamily="34" charset="-120"/>
-              </a:rPr>
-              <a:t>38 de 38 pruebas de API correctas, más las de mensajería, sobre el stack completo en docker compose. Script reproducible en docs/evidencia/.</a:t>
-            </a:r>
-            <a:endParaRPr lang="en-US" sz="1100" dirty="0"/>
+              <a:rPr lang="en-US" sz="1400" dirty="0">
+                <a:solidFill>
+                  <a:srgbClr val="FFFFFF"/>
+                </a:solidFill>
+                <a:latin typeface="Calibri" pitchFamily="34" charset="0"/>
+                <a:ea typeface="Calibri" pitchFamily="34" charset="-122"/>
+                <a:cs typeface="Calibri" pitchFamily="34" charset="-120"/>
+              </a:rPr>
+              <a:t>AWS: rutas del API Gateway, authorizer JWT y CORS</a:t>
+            </a:r>
+            <a:endParaRPr lang="en-US" sz="1400" dirty="0"/>
+          </a:p>
+        </p:txBody>
+      </p:sp>
+      <p:sp>
+        <p:nvSpPr>
+          <p:cNvPr id="6" name="Shape 4"/>
+          <p:cNvSpPr/>
+          <p:nvPr/>
+        </p:nvSpPr>
+        <p:spPr>
+          <a:xfrm>
+            <a:off x="4663440" y="1325880"/>
+            <a:ext cx="502920" cy="502920"/>
+          </a:xfrm>
+          <a:prstGeom prst="ellipse">
+            <a:avLst/>
+          </a:prstGeom>
+          <a:solidFill>
+            <a:srgbClr val="52B788"/>
+          </a:solidFill>
+          <a:ln w="12700">
+            <a:solidFill>
+              <a:srgbClr val="52B788"/>
+            </a:solidFill>
+            <a:prstDash val="solid"/>
+          </a:ln>
+        </p:spPr>
+      </p:sp>
+      <p:sp>
+        <p:nvSpPr>
+          <p:cNvPr id="7" name="Text 5"/>
+          <p:cNvSpPr txBox="1"/>
+          <p:nvPr/>
+        </p:nvSpPr>
+        <p:spPr>
+          <a:xfrm>
+            <a:off x="4663440" y="1325880"/>
+            <a:ext cx="502920" cy="502920"/>
+          </a:xfrm>
+          <a:prstGeom prst="rect">
+            <a:avLst/>
+          </a:prstGeom>
+          <a:noFill/>
+          <a:ln/>
+        </p:spPr>
+        <p:txBody>
+          <a:bodyPr wrap="square" lIns="0" tIns="0" rIns="0" bIns="0" rtlCol="0" anchor="ctr"/>
+          <a:lstStyle/>
+          <a:p>
+            <a:pPr algn="ctr" indent="0" marL="0">
+              <a:buNone/>
+            </a:pPr>
+            <a:r>
+              <a:rPr lang="en-US" sz="1600" b="1" dirty="0">
+                <a:solidFill>
+                  <a:srgbClr val="14342B"/>
+                </a:solidFill>
+                <a:latin typeface="Calibri" pitchFamily="34" charset="0"/>
+                <a:ea typeface="Calibri" pitchFamily="34" charset="-122"/>
+                <a:cs typeface="Calibri" pitchFamily="34" charset="-120"/>
+              </a:rPr>
+              <a:t>2</a:t>
+            </a:r>
+            <a:endParaRPr lang="en-US" sz="1600" dirty="0"/>
+          </a:p>
+        </p:txBody>
+      </p:sp>
+      <p:sp>
+        <p:nvSpPr>
+          <p:cNvPr id="8" name="Text 6"/>
+          <p:cNvSpPr txBox="1"/>
+          <p:nvPr/>
+        </p:nvSpPr>
+        <p:spPr>
+          <a:xfrm>
+            <a:off x="5349240" y="1280160"/>
+            <a:ext cx="3383280" cy="640080"/>
+          </a:xfrm>
+          <a:prstGeom prst="rect">
+            <a:avLst/>
+          </a:prstGeom>
+          <a:noFill/>
+          <a:ln/>
+        </p:spPr>
+        <p:txBody>
+          <a:bodyPr wrap="square" lIns="0" tIns="0" rIns="0" bIns="0" rtlCol="0" anchor="ctr"/>
+          <a:lstStyle/>
+          <a:p>
+            <a:pPr indent="0" marL="0">
+              <a:buNone/>
+            </a:pPr>
+            <a:r>
+              <a:rPr lang="en-US" sz="1400" dirty="0">
+                <a:solidFill>
+                  <a:srgbClr val="FFFFFF"/>
+                </a:solidFill>
+                <a:latin typeface="Calibri" pitchFamily="34" charset="0"/>
+                <a:ea typeface="Calibri" pitchFamily="34" charset="-122"/>
+                <a:cs typeface="Calibri" pitchFamily="34" charset="-120"/>
+              </a:rPr>
+              <a:t>Entra ID: usuarios del tenant y App Roles ENCARGADO y ADMIN</a:t>
+            </a:r>
+            <a:endParaRPr lang="en-US" sz="1400" dirty="0"/>
+          </a:p>
+        </p:txBody>
+      </p:sp>
+      <p:sp>
+        <p:nvSpPr>
+          <p:cNvPr id="9" name="Shape 7"/>
+          <p:cNvSpPr/>
+          <p:nvPr/>
+        </p:nvSpPr>
+        <p:spPr>
+          <a:xfrm>
+            <a:off x="457200" y="2423160"/>
+            <a:ext cx="502920" cy="502920"/>
+          </a:xfrm>
+          <a:prstGeom prst="ellipse">
+            <a:avLst/>
+          </a:prstGeom>
+          <a:solidFill>
+            <a:srgbClr val="52B788"/>
+          </a:solidFill>
+          <a:ln w="12700">
+            <a:solidFill>
+              <a:srgbClr val="52B788"/>
+            </a:solidFill>
+            <a:prstDash val="solid"/>
+          </a:ln>
+        </p:spPr>
+      </p:sp>
+      <p:sp>
+        <p:nvSpPr>
+          <p:cNvPr id="10" name="Text 8"/>
+          <p:cNvSpPr txBox="1"/>
+          <p:nvPr/>
+        </p:nvSpPr>
+        <p:spPr>
+          <a:xfrm>
+            <a:off x="457200" y="2423160"/>
+            <a:ext cx="502920" cy="502920"/>
+          </a:xfrm>
+          <a:prstGeom prst="rect">
+            <a:avLst/>
+          </a:prstGeom>
+          <a:noFill/>
+          <a:ln/>
+        </p:spPr>
+        <p:txBody>
+          <a:bodyPr wrap="square" lIns="0" tIns="0" rIns="0" bIns="0" rtlCol="0" anchor="ctr"/>
+          <a:lstStyle/>
+          <a:p>
+            <a:pPr algn="ctr" indent="0" marL="0">
+              <a:buNone/>
+            </a:pPr>
+            <a:r>
+              <a:rPr lang="en-US" sz="1600" b="1" dirty="0">
+                <a:solidFill>
+                  <a:srgbClr val="14342B"/>
+                </a:solidFill>
+                <a:latin typeface="Calibri" pitchFamily="34" charset="0"/>
+                <a:ea typeface="Calibri" pitchFamily="34" charset="-122"/>
+                <a:cs typeface="Calibri" pitchFamily="34" charset="-120"/>
+              </a:rPr>
+              <a:t>3</a:t>
+            </a:r>
+            <a:endParaRPr lang="en-US" sz="1600" dirty="0"/>
+          </a:p>
+        </p:txBody>
+      </p:sp>
+      <p:sp>
+        <p:nvSpPr>
+          <p:cNvPr id="11" name="Text 9"/>
+          <p:cNvSpPr txBox="1"/>
+          <p:nvPr/>
+        </p:nvSpPr>
+        <p:spPr>
+          <a:xfrm>
+            <a:off x="1143000" y="2377440"/>
+            <a:ext cx="3383280" cy="640080"/>
+          </a:xfrm>
+          <a:prstGeom prst="rect">
+            <a:avLst/>
+          </a:prstGeom>
+          <a:noFill/>
+          <a:ln/>
+        </p:spPr>
+        <p:txBody>
+          <a:bodyPr wrap="square" lIns="0" tIns="0" rIns="0" bIns="0" rtlCol="0" anchor="ctr"/>
+          <a:lstStyle/>
+          <a:p>
+            <a:pPr indent="0" marL="0">
+              <a:buNone/>
+            </a:pPr>
+            <a:r>
+              <a:rPr lang="en-US" sz="1400" dirty="0">
+                <a:solidFill>
+                  <a:srgbClr val="FFFFFF"/>
+                </a:solidFill>
+                <a:latin typeface="Calibri" pitchFamily="34" charset="0"/>
+                <a:ea typeface="Calibri" pitchFamily="34" charset="-122"/>
+                <a:cs typeface="Calibri" pitchFamily="34" charset="-120"/>
+              </a:rPr>
+              <a:t>JWT: sin token y token falso → 401; con sesión → 200; sin rol → 403</a:t>
+            </a:r>
+            <a:endParaRPr lang="en-US" sz="1400" dirty="0"/>
+          </a:p>
+        </p:txBody>
+      </p:sp>
+      <p:sp>
+        <p:nvSpPr>
+          <p:cNvPr id="12" name="Shape 10"/>
+          <p:cNvSpPr/>
+          <p:nvPr/>
+        </p:nvSpPr>
+        <p:spPr>
+          <a:xfrm>
+            <a:off x="4663440" y="2423160"/>
+            <a:ext cx="502920" cy="502920"/>
+          </a:xfrm>
+          <a:prstGeom prst="ellipse">
+            <a:avLst/>
+          </a:prstGeom>
+          <a:solidFill>
+            <a:srgbClr val="52B788"/>
+          </a:solidFill>
+          <a:ln w="12700">
+            <a:solidFill>
+              <a:srgbClr val="52B788"/>
+            </a:solidFill>
+            <a:prstDash val="solid"/>
+          </a:ln>
+        </p:spPr>
+      </p:sp>
+      <p:sp>
+        <p:nvSpPr>
+          <p:cNvPr id="13" name="Text 11"/>
+          <p:cNvSpPr txBox="1"/>
+          <p:nvPr/>
+        </p:nvSpPr>
+        <p:spPr>
+          <a:xfrm>
+            <a:off x="4663440" y="2423160"/>
+            <a:ext cx="502920" cy="502920"/>
+          </a:xfrm>
+          <a:prstGeom prst="rect">
+            <a:avLst/>
+          </a:prstGeom>
+          <a:noFill/>
+          <a:ln/>
+        </p:spPr>
+        <p:txBody>
+          <a:bodyPr wrap="square" lIns="0" tIns="0" rIns="0" bIns="0" rtlCol="0" anchor="ctr"/>
+          <a:lstStyle/>
+          <a:p>
+            <a:pPr algn="ctr" indent="0" marL="0">
+              <a:buNone/>
+            </a:pPr>
+            <a:r>
+              <a:rPr lang="en-US" sz="1600" b="1" dirty="0">
+                <a:solidFill>
+                  <a:srgbClr val="14342B"/>
+                </a:solidFill>
+                <a:latin typeface="Calibri" pitchFamily="34" charset="0"/>
+                <a:ea typeface="Calibri" pitchFamily="34" charset="-122"/>
+                <a:cs typeface="Calibri" pitchFamily="34" charset="-120"/>
+              </a:rPr>
+              <a:t>4</a:t>
+            </a:r>
+            <a:endParaRPr lang="en-US" sz="1600" dirty="0"/>
+          </a:p>
+        </p:txBody>
+      </p:sp>
+      <p:sp>
+        <p:nvSpPr>
+          <p:cNvPr id="14" name="Text 12"/>
+          <p:cNvSpPr txBox="1"/>
+          <p:nvPr/>
+        </p:nvSpPr>
+        <p:spPr>
+          <a:xfrm>
+            <a:off x="5349240" y="2377440"/>
+            <a:ext cx="3383280" cy="640080"/>
+          </a:xfrm>
+          <a:prstGeom prst="rect">
+            <a:avLst/>
+          </a:prstGeom>
+          <a:noFill/>
+          <a:ln/>
+        </p:spPr>
+        <p:txBody>
+          <a:bodyPr wrap="square" lIns="0" tIns="0" rIns="0" bIns="0" rtlCol="0" anchor="ctr"/>
+          <a:lstStyle/>
+          <a:p>
+            <a:pPr indent="0" marL="0">
+              <a:buNone/>
+            </a:pPr>
+            <a:r>
+              <a:rPr lang="en-US" sz="1400" dirty="0">
+                <a:solidFill>
+                  <a:srgbClr val="FFFFFF"/>
+                </a:solidFill>
+                <a:latin typeface="Calibri" pitchFamily="34" charset="0"/>
+                <a:ea typeface="Calibri" pitchFamily="34" charset="-122"/>
+                <a:cs typeface="Calibri" pitchFamily="34" charset="-120"/>
+              </a:rPr>
+              <a:t>Flujo: reporte → eventos; revisión → ticket; resuelto → estadísticas</a:t>
+            </a:r>
+            <a:endParaRPr lang="en-US" sz="1400" dirty="0"/>
+          </a:p>
+        </p:txBody>
+      </p:sp>
+      <p:sp>
+        <p:nvSpPr>
+          <p:cNvPr id="15" name="Shape 13"/>
+          <p:cNvSpPr/>
+          <p:nvPr/>
+        </p:nvSpPr>
+        <p:spPr>
+          <a:xfrm>
+            <a:off x="457200" y="3520440"/>
+            <a:ext cx="502920" cy="502920"/>
+          </a:xfrm>
+          <a:prstGeom prst="ellipse">
+            <a:avLst/>
+          </a:prstGeom>
+          <a:solidFill>
+            <a:srgbClr val="52B788"/>
+          </a:solidFill>
+          <a:ln w="12700">
+            <a:solidFill>
+              <a:srgbClr val="52B788"/>
+            </a:solidFill>
+            <a:prstDash val="solid"/>
+          </a:ln>
+        </p:spPr>
+      </p:sp>
+      <p:sp>
+        <p:nvSpPr>
+          <p:cNvPr id="16" name="Text 14"/>
+          <p:cNvSpPr txBox="1"/>
+          <p:nvPr/>
+        </p:nvSpPr>
+        <p:spPr>
+          <a:xfrm>
+            <a:off x="457200" y="3520440"/>
+            <a:ext cx="502920" cy="502920"/>
+          </a:xfrm>
+          <a:prstGeom prst="rect">
+            <a:avLst/>
+          </a:prstGeom>
+          <a:noFill/>
+          <a:ln/>
+        </p:spPr>
+        <p:txBody>
+          <a:bodyPr wrap="square" lIns="0" tIns="0" rIns="0" bIns="0" rtlCol="0" anchor="ctr"/>
+          <a:lstStyle/>
+          <a:p>
+            <a:pPr algn="ctr" indent="0" marL="0">
+              <a:buNone/>
+            </a:pPr>
+            <a:r>
+              <a:rPr lang="en-US" sz="1600" b="1" dirty="0">
+                <a:solidFill>
+                  <a:srgbClr val="14342B"/>
+                </a:solidFill>
+                <a:latin typeface="Calibri" pitchFamily="34" charset="0"/>
+                <a:ea typeface="Calibri" pitchFamily="34" charset="-122"/>
+                <a:cs typeface="Calibri" pitchFamily="34" charset="-120"/>
+              </a:rPr>
+              <a:t>5</a:t>
+            </a:r>
+            <a:endParaRPr lang="en-US" sz="1600" dirty="0"/>
+          </a:p>
+        </p:txBody>
+      </p:sp>
+      <p:sp>
+        <p:nvSpPr>
+          <p:cNvPr id="17" name="Text 15"/>
+          <p:cNvSpPr txBox="1"/>
+          <p:nvPr/>
+        </p:nvSpPr>
+        <p:spPr>
+          <a:xfrm>
+            <a:off x="1143000" y="3474720"/>
+            <a:ext cx="3383280" cy="640080"/>
+          </a:xfrm>
+          <a:prstGeom prst="rect">
+            <a:avLst/>
+          </a:prstGeom>
+          <a:noFill/>
+          <a:ln/>
+        </p:spPr>
+        <p:txBody>
+          <a:bodyPr wrap="square" lIns="0" tIns="0" rIns="0" bIns="0" rtlCol="0" anchor="ctr"/>
+          <a:lstStyle/>
+          <a:p>
+            <a:pPr indent="0" marL="0">
+              <a:buNone/>
+            </a:pPr>
+            <a:r>
+              <a:rPr lang="en-US" sz="1400" dirty="0">
+                <a:solidFill>
+                  <a:srgbClr val="FFFFFF"/>
+                </a:solidFill>
+                <a:latin typeface="Calibri" pitchFamily="34" charset="0"/>
+                <a:ea typeface="Calibri" pitchFamily="34" charset="-122"/>
+                <a:cs typeface="Calibri" pitchFamily="34" charset="-120"/>
+              </a:rPr>
+              <a:t>Falla controlada: mensaje inválido a la DLQ y consumidor caído</a:t>
+            </a:r>
+            <a:endParaRPr lang="en-US" sz="1400" dirty="0"/>
+          </a:p>
+        </p:txBody>
+      </p:sp>
+      <p:sp>
+        <p:nvSpPr>
+          <p:cNvPr id="18" name="Shape 16"/>
+          <p:cNvSpPr/>
+          <p:nvPr/>
+        </p:nvSpPr>
+        <p:spPr>
+          <a:xfrm>
+            <a:off x="4663440" y="3520440"/>
+            <a:ext cx="502920" cy="502920"/>
+          </a:xfrm>
+          <a:prstGeom prst="ellipse">
+            <a:avLst/>
+          </a:prstGeom>
+          <a:solidFill>
+            <a:srgbClr val="52B788"/>
+          </a:solidFill>
+          <a:ln w="12700">
+            <a:solidFill>
+              <a:srgbClr val="52B788"/>
+            </a:solidFill>
+            <a:prstDash val="solid"/>
+          </a:ln>
+        </p:spPr>
+      </p:sp>
+      <p:sp>
+        <p:nvSpPr>
+          <p:cNvPr id="19" name="Text 17"/>
+          <p:cNvSpPr txBox="1"/>
+          <p:nvPr/>
+        </p:nvSpPr>
+        <p:spPr>
+          <a:xfrm>
+            <a:off x="4663440" y="3520440"/>
+            <a:ext cx="502920" cy="502920"/>
+          </a:xfrm>
+          <a:prstGeom prst="rect">
+            <a:avLst/>
+          </a:prstGeom>
+          <a:noFill/>
+          <a:ln/>
+        </p:spPr>
+        <p:txBody>
+          <a:bodyPr wrap="square" lIns="0" tIns="0" rIns="0" bIns="0" rtlCol="0" anchor="ctr"/>
+          <a:lstStyle/>
+          <a:p>
+            <a:pPr algn="ctr" indent="0" marL="0">
+              <a:buNone/>
+            </a:pPr>
+            <a:r>
+              <a:rPr lang="en-US" sz="1600" b="1" dirty="0">
+                <a:solidFill>
+                  <a:srgbClr val="14342B"/>
+                </a:solidFill>
+                <a:latin typeface="Calibri" pitchFamily="34" charset="0"/>
+                <a:ea typeface="Calibri" pitchFamily="34" charset="-122"/>
+                <a:cs typeface="Calibri" pitchFamily="34" charset="-120"/>
+              </a:rPr>
+              <a:t>6</a:t>
+            </a:r>
+            <a:endParaRPr lang="en-US" sz="1600" dirty="0"/>
+          </a:p>
+        </p:txBody>
+      </p:sp>
+      <p:sp>
+        <p:nvSpPr>
+          <p:cNvPr id="20" name="Text 18"/>
+          <p:cNvSpPr txBox="1"/>
+          <p:nvPr/>
+        </p:nvSpPr>
+        <p:spPr>
+          <a:xfrm>
+            <a:off x="5349240" y="3474720"/>
+            <a:ext cx="3383280" cy="640080"/>
+          </a:xfrm>
+          <a:prstGeom prst="rect">
+            <a:avLst/>
+          </a:prstGeom>
+          <a:noFill/>
+          <a:ln/>
+        </p:spPr>
+        <p:txBody>
+          <a:bodyPr wrap="square" lIns="0" tIns="0" rIns="0" bIns="0" rtlCol="0" anchor="ctr"/>
+          <a:lstStyle/>
+          <a:p>
+            <a:pPr indent="0" marL="0">
+              <a:buNone/>
+            </a:pPr>
+            <a:r>
+              <a:rPr lang="en-US" sz="1400" dirty="0">
+                <a:solidFill>
+                  <a:srgbClr val="FFFFFF"/>
+                </a:solidFill>
+                <a:latin typeface="Calibri" pitchFamily="34" charset="0"/>
+                <a:ea typeface="Calibri" pitchFamily="34" charset="-122"/>
+                <a:cs typeface="Calibri" pitchFamily="34" charset="-120"/>
+              </a:rPr>
+              <a:t>Clúster: docker compose ps, nodos, colas quorum y exchanges</a:t>
+            </a:r>
+            <a:endParaRPr lang="en-US" sz="1400" dirty="0"/>
           </a:p>
         </p:txBody>
       </p:sp>
@@ -4849,1866 +2837,6 @@
       </p:grpSpPr>
       <p:sp>
         <p:nvSpPr>
-          <p:cNvPr id="2" name="Título"/>
-          <p:cNvSpPr txBox="1"/>
-          <p:nvPr/>
-        </p:nvSpPr>
-        <p:spPr>
-          <a:xfrm>
-            <a:off x="457200" y="274320"/>
-            <a:ext cx="8229600" cy="640080"/>
-          </a:xfrm>
-          <a:prstGeom prst="rect">
-            <a:avLst/>
-          </a:prstGeom>
-          <a:noFill/>
-          <a:ln/>
-        </p:spPr>
-        <p:txBody>
-          <a:bodyPr wrap="square" lIns="0" tIns="0" rIns="0" bIns="0" rtlCol="0" anchor="ctr"/>
-          <a:lstStyle/>
-          <a:p>
-            <a:pPr indent="0" marL="0">
-              <a:buNone/>
-            </a:pPr>
-            <a:r>
-              <a:rPr lang="en-US" sz="3000" b="1" dirty="0">
-                <a:solidFill>
-                  <a:srgbClr val="14342B"/>
-                </a:solidFill>
-                <a:latin typeface="Calibri" pitchFamily="34" charset="0"/>
-                <a:ea typeface="Calibri" pitchFamily="34" charset="-122"/>
-                <a:cs typeface="Calibri" pitchFamily="34" charset="-120"/>
-              </a:rPr>
-              <a:t>Evidencia: RabbitMQ en la nube</a:t>
-            </a:r>
-            <a:endParaRPr lang="en-US" sz="3000" dirty="0"/>
-          </a:p>
-        </p:txBody>
-      </p:sp>
-      <p:sp>
-        <p:nvSpPr>
-          <p:cNvPr id="3" name="Shape 1"/>
-          <p:cNvSpPr/>
-          <p:nvPr/>
-        </p:nvSpPr>
-        <p:spPr>
-          <a:xfrm>
-            <a:off x="457200" y="1097280"/>
-            <a:ext cx="4754880" cy="3611880"/>
-          </a:xfrm>
-          <a:prstGeom prst="roundRect">
-            <a:avLst>
-              <a:gd name="adj" fmla="val 3038"/>
-            </a:avLst>
-          </a:prstGeom>
-          <a:solidFill>
-            <a:srgbClr val="FFFFFF"/>
-          </a:solidFill>
-          <a:ln w="12700">
-            <a:solidFill>
-              <a:srgbClr val="FFFFFF"/>
-            </a:solidFill>
-            <a:prstDash val="solid"/>
-          </a:ln>
-          <a:effectLst>
-            <a:outerShdw sx="100000" sy="100000" kx="0" ky="0" algn="bl" rotWithShape="0" blurRad="76200" dist="25400" dir="5400000">
-              <a:srgbClr val="000000">
-                <a:alpha val="12000"/>
-              </a:srgbClr>
-            </a:outerShdw>
-          </a:effectLst>
-        </p:spPr>
-      </p:sp>
-      <p:sp>
-        <p:nvSpPr>
-          <p:cNvPr id="4" name="Text 2"/>
-          <p:cNvSpPr txBox="1"/>
-          <p:nvPr/>
-        </p:nvSpPr>
-        <p:spPr>
-          <a:xfrm>
-            <a:off x="640080" y="1207008"/>
-            <a:ext cx="4389120" cy="274320"/>
-          </a:xfrm>
-          <a:prstGeom prst="rect">
-            <a:avLst/>
-          </a:prstGeom>
-          <a:noFill/>
-          <a:ln/>
-        </p:spPr>
-        <p:txBody>
-          <a:bodyPr wrap="square" lIns="0" tIns="0" rIns="0" bIns="0" rtlCol="0" anchor="t"/>
-          <a:lstStyle/>
-          <a:p>
-            <a:pPr indent="0" marL="0">
-              <a:buNone/>
-            </a:pPr>
-            <a:r>
-              <a:rPr lang="en-US" sz="1200" b="1" dirty="0">
-                <a:solidFill>
-                  <a:srgbClr val="14342B"/>
-                </a:solidFill>
-                <a:latin typeface="Calibri" pitchFamily="34" charset="0"/>
-                <a:ea typeface="Calibri" pitchFamily="34" charset="-122"/>
-                <a:cs typeface="Calibri" pitchFamily="34" charset="-120"/>
-              </a:rPr>
-              <a:t>AWS · los dos nodos del clúster en ejecución</a:t>
-            </a:r>
-            <a:endParaRPr lang="en-US" sz="1200" dirty="0"/>
-          </a:p>
-        </p:txBody>
-      </p:sp>
-      <p:pic>
-        <p:nvPicPr>
-          <p:cNvPr id="5" name="Image 0" descr="Nodos rabbit1 y rabbit2">    </p:cNvPr>
-          <p:cNvPicPr>
-            <a:picLocks noChangeAspect="1"/>
-          </p:cNvPicPr>
-          <p:nvPr/>
-        </p:nvPicPr>
-        <p:blipFill>
-          <a:blip r:embed="rId1"/>
-          <a:stretch>
-            <a:fillRect/>
-          </a:stretch>
-        </p:blipFill>
-        <p:spPr>
-          <a:xfrm>
-            <a:off x="640080" y="1536192"/>
-            <a:ext cx="4389120" cy="884629"/>
-          </a:xfrm>
-          <a:prstGeom prst="rect">
-            <a:avLst/>
-          </a:prstGeom>
-        </p:spPr>
-      </p:pic>
-      <p:sp>
-        <p:nvSpPr>
-          <p:cNvPr id="6" name="Text 3"/>
-          <p:cNvSpPr txBox="1"/>
-          <p:nvPr/>
-        </p:nvSpPr>
-        <p:spPr>
-          <a:xfrm>
-            <a:off x="640080" y="2514600"/>
-            <a:ext cx="4389120" cy="274320"/>
-          </a:xfrm>
-          <a:prstGeom prst="rect">
-            <a:avLst/>
-          </a:prstGeom>
-          <a:noFill/>
-          <a:ln/>
-        </p:spPr>
-        <p:txBody>
-          <a:bodyPr wrap="square" lIns="0" tIns="0" rIns="0" bIns="0" rtlCol="0" anchor="t"/>
-          <a:lstStyle/>
-          <a:p>
-            <a:pPr indent="0" marL="0">
-              <a:buNone/>
-            </a:pPr>
-            <a:r>
-              <a:rPr lang="en-US" sz="1200" b="1" dirty="0">
-                <a:solidFill>
-                  <a:srgbClr val="14342B"/>
-                </a:solidFill>
-                <a:latin typeface="Calibri" pitchFamily="34" charset="0"/>
-                <a:ea typeface="Calibri" pitchFamily="34" charset="-122"/>
-                <a:cs typeface="Calibri" pitchFamily="34" charset="-120"/>
-              </a:rPr>
-              <a:t>AWS · 6 colas quorum, cada una con su DLX y DLK</a:t>
-            </a:r>
-            <a:endParaRPr lang="en-US" sz="1200" dirty="0"/>
-          </a:p>
-        </p:txBody>
-      </p:sp>
-      <p:pic>
-        <p:nvPicPr>
-          <p:cNvPr id="7" name="Image 1" descr="Colas quorum con DLQ">    </p:cNvPr>
-          <p:cNvPicPr>
-            <a:picLocks noChangeAspect="1"/>
-          </p:cNvPicPr>
-          <p:nvPr/>
-        </p:nvPicPr>
-        <p:blipFill>
-          <a:blip r:embed="rId2"/>
-          <a:stretch>
-            <a:fillRect/>
-          </a:stretch>
-        </p:blipFill>
-        <p:spPr>
-          <a:xfrm>
-            <a:off x="640080" y="2816352"/>
-            <a:ext cx="4389120" cy="1335682"/>
-          </a:xfrm>
-          <a:prstGeom prst="rect">
-            <a:avLst/>
-          </a:prstGeom>
-        </p:spPr>
-      </p:pic>
-      <p:sp>
-        <p:nvSpPr>
-          <p:cNvPr id="8" name="Shape 4"/>
-          <p:cNvSpPr/>
-          <p:nvPr/>
-        </p:nvSpPr>
-        <p:spPr>
-          <a:xfrm>
-            <a:off x="5440680" y="1097280"/>
-            <a:ext cx="3246120" cy="3611880"/>
-          </a:xfrm>
-          <a:prstGeom prst="roundRect">
-            <a:avLst>
-              <a:gd name="adj" fmla="val 3380"/>
-            </a:avLst>
-          </a:prstGeom>
-          <a:solidFill>
-            <a:srgbClr val="FFFFFF"/>
-          </a:solidFill>
-          <a:ln w="12700">
-            <a:solidFill>
-              <a:srgbClr val="FFFFFF"/>
-            </a:solidFill>
-            <a:prstDash val="solid"/>
-          </a:ln>
-          <a:effectLst>
-            <a:outerShdw sx="100000" sy="100000" kx="0" ky="0" algn="bl" rotWithShape="0" blurRad="76200" dist="25400" dir="5400000">
-              <a:srgbClr val="000000">
-                <a:alpha val="12000"/>
-              </a:srgbClr>
-            </a:outerShdw>
-          </a:effectLst>
-        </p:spPr>
-      </p:sp>
-      <p:sp>
-        <p:nvSpPr>
-          <p:cNvPr id="9" name="Text 5"/>
-          <p:cNvSpPr txBox="1"/>
-          <p:nvPr/>
-        </p:nvSpPr>
-        <p:spPr>
-          <a:xfrm>
-            <a:off x="5577840" y="1207008"/>
-            <a:ext cx="2971800" cy="274320"/>
-          </a:xfrm>
-          <a:prstGeom prst="rect">
-            <a:avLst/>
-          </a:prstGeom>
-          <a:noFill/>
-          <a:ln/>
-        </p:spPr>
-        <p:txBody>
-          <a:bodyPr wrap="square" lIns="0" tIns="0" rIns="0" bIns="0" rtlCol="0" anchor="t"/>
-          <a:lstStyle/>
-          <a:p>
-            <a:pPr indent="0" marL="0">
-              <a:buNone/>
-            </a:pPr>
-            <a:r>
-              <a:rPr lang="en-US" sz="1200" b="1" dirty="0">
-                <a:solidFill>
-                  <a:srgbClr val="14342B"/>
-                </a:solidFill>
-                <a:latin typeface="Calibri" pitchFamily="34" charset="0"/>
-                <a:ea typeface="Calibri" pitchFamily="34" charset="-122"/>
-                <a:cs typeface="Calibri" pitchFamily="34" charset="-120"/>
-              </a:rPr>
-              <a:t>AWS · mensaje inválido en la DLQ (x-death)</a:t>
-            </a:r>
-            <a:endParaRPr lang="en-US" sz="1200" dirty="0"/>
-          </a:p>
-        </p:txBody>
-      </p:sp>
-      <p:pic>
-        <p:nvPicPr>
-          <p:cNvPr id="10" name="Image 2" descr="Mensaje en tickets.mantencion.dlq">    </p:cNvPr>
-          <p:cNvPicPr>
-            <a:picLocks noChangeAspect="1"/>
-          </p:cNvPicPr>
-          <p:nvPr/>
-        </p:nvPicPr>
-        <p:blipFill>
-          <a:blip r:embed="rId3"/>
-          <a:stretch>
-            <a:fillRect/>
-          </a:stretch>
-        </p:blipFill>
-        <p:spPr>
-          <a:xfrm>
-            <a:off x="5577840" y="1508760"/>
-            <a:ext cx="2971800" cy="2468880"/>
-          </a:xfrm>
-          <a:prstGeom prst="rect">
-            <a:avLst/>
-          </a:prstGeom>
-        </p:spPr>
-      </p:pic>
-    </p:spTree>
-  </p:cSld>
-  <p:clrMapOvr>
-    <a:masterClrMapping/>
-  </p:clrMapOvr>
-</p:sld>
-</file>
-
-<file path=ppt/slides/slide12.xml><?xml version="1.0" encoding="utf-8"?>
-<p:sld xmlns:a="http://schemas.openxmlformats.org/drawingml/2006/main" xmlns:r="http://schemas.openxmlformats.org/officeDocument/2006/relationships" xmlns:p="http://schemas.openxmlformats.org/presentationml/2006/main">
-  <p:cSld name="Slide 12">
-    <p:spTree>
-      <p:nvGrpSpPr>
-        <p:cNvPr id="1" name=""/>
-        <p:cNvGrpSpPr/>
-        <p:nvPr/>
-      </p:nvGrpSpPr>
-      <p:grpSpPr>
-        <a:xfrm>
-          <a:off x="0" y="0"/>
-          <a:ext cx="0" cy="0"/>
-          <a:chOff x="0" y="0"/>
-          <a:chExt cx="0" cy="0"/>
-        </a:xfrm>
-      </p:grpSpPr>
-      <p:sp>
-        <p:nvSpPr>
-          <p:cNvPr id="2" name="Título"/>
-          <p:cNvSpPr txBox="1"/>
-          <p:nvPr/>
-        </p:nvSpPr>
-        <p:spPr>
-          <a:xfrm>
-            <a:off x="457200" y="274320"/>
-            <a:ext cx="8229600" cy="640080"/>
-          </a:xfrm>
-          <a:prstGeom prst="rect">
-            <a:avLst/>
-          </a:prstGeom>
-          <a:noFill/>
-          <a:ln/>
-        </p:spPr>
-        <p:txBody>
-          <a:bodyPr wrap="square" lIns="0" tIns="0" rIns="0" bIns="0" rtlCol="0" anchor="ctr"/>
-          <a:lstStyle/>
-          <a:p>
-            <a:pPr indent="0" marL="0">
-              <a:buNone/>
-            </a:pPr>
-            <a:r>
-              <a:rPr lang="en-US" sz="3000" b="1" dirty="0">
-                <a:solidFill>
-                  <a:srgbClr val="14342B"/>
-                </a:solidFill>
-                <a:latin typeface="Calibri" pitchFamily="34" charset="0"/>
-                <a:ea typeface="Calibri" pitchFamily="34" charset="-122"/>
-                <a:cs typeface="Calibri" pitchFamily="34" charset="-120"/>
-              </a:rPr>
-              <a:t>Despliegue en AWS</a:t>
-            </a:r>
-            <a:endParaRPr lang="en-US" sz="3000" dirty="0"/>
-          </a:p>
-        </p:txBody>
-      </p:sp>
-      <p:sp>
-        <p:nvSpPr>
-          <p:cNvPr id="3" name="Text 1"/>
-          <p:cNvSpPr txBox="1"/>
-          <p:nvPr/>
-        </p:nvSpPr>
-        <p:spPr>
-          <a:xfrm>
-            <a:off x="457200" y="1097280"/>
-            <a:ext cx="2560320" cy="914400"/>
-          </a:xfrm>
-          <a:prstGeom prst="rect">
-            <a:avLst/>
-          </a:prstGeom>
-          <a:noFill/>
-          <a:ln/>
-        </p:spPr>
-        <p:txBody>
-          <a:bodyPr wrap="square" lIns="0" tIns="0" rIns="0" bIns="0" rtlCol="0" anchor="ctr"/>
-          <a:lstStyle/>
-          <a:p>
-            <a:pPr algn="ctr" indent="0" marL="0">
-              <a:buNone/>
-            </a:pPr>
-            <a:r>
-              <a:rPr lang="en-US" sz="6000" b="1" dirty="0">
-                <a:solidFill>
-                  <a:srgbClr val="2D6A4F"/>
-                </a:solidFill>
-                <a:latin typeface="Calibri" pitchFamily="34" charset="0"/>
-                <a:ea typeface="Calibri" pitchFamily="34" charset="-122"/>
-                <a:cs typeface="Calibri" pitchFamily="34" charset="-120"/>
-              </a:rPr>
-              <a:t>2</a:t>
-            </a:r>
-            <a:endParaRPr lang="en-US" sz="6000" dirty="0"/>
-          </a:p>
-        </p:txBody>
-      </p:sp>
-      <p:sp>
-        <p:nvSpPr>
-          <p:cNvPr id="4" name="Text 2"/>
-          <p:cNvSpPr txBox="1"/>
-          <p:nvPr/>
-        </p:nvSpPr>
-        <p:spPr>
-          <a:xfrm>
-            <a:off x="457200" y="2011680"/>
-            <a:ext cx="2560320" cy="640080"/>
-          </a:xfrm>
-          <a:prstGeom prst="rect">
-            <a:avLst/>
-          </a:prstGeom>
-          <a:noFill/>
-          <a:ln/>
-        </p:spPr>
-        <p:txBody>
-          <a:bodyPr wrap="square" lIns="0" tIns="0" rIns="0" bIns="0" rtlCol="0" anchor="t"/>
-          <a:lstStyle/>
-          <a:p>
-            <a:pPr algn="ctr" indent="0" marL="0">
-              <a:buNone/>
-            </a:pPr>
-            <a:r>
-              <a:rPr lang="en-US" sz="1300" dirty="0">
-                <a:solidFill>
-                  <a:srgbClr val="5C6B63"/>
-                </a:solidFill>
-                <a:latin typeface="Calibri" pitchFamily="34" charset="0"/>
-                <a:ea typeface="Calibri" pitchFamily="34" charset="-122"/>
-                <a:cs typeface="Calibri" pitchFamily="34" charset="-120"/>
-              </a:rPr>
-              <a:t>instancias EC2</a:t>
-            </a:r>
-            <a:endParaRPr lang="en-US" sz="1300" dirty="0"/>
-          </a:p>
-          <a:p>
-            <a:pPr algn="ctr" indent="0" marL="0">
-              <a:buNone/>
-            </a:pPr>
-            <a:r>
-              <a:rPr lang="en-US" sz="1300" dirty="0">
-                <a:solidFill>
-                  <a:srgbClr val="5C6B63"/>
-                </a:solidFill>
-                <a:latin typeface="Calibri" pitchFamily="34" charset="0"/>
-                <a:ea typeface="Calibri" pitchFamily="34" charset="-122"/>
-                <a:cs typeface="Calibri" pitchFamily="34" charset="-120"/>
-              </a:rPr>
-              <a:t>(frontend y backend)</a:t>
-            </a:r>
-            <a:endParaRPr lang="en-US" sz="1300" dirty="0"/>
-          </a:p>
-        </p:txBody>
-      </p:sp>
-      <p:sp>
-        <p:nvSpPr>
-          <p:cNvPr id="5" name="Text 3"/>
-          <p:cNvSpPr txBox="1"/>
-          <p:nvPr/>
-        </p:nvSpPr>
-        <p:spPr>
-          <a:xfrm>
-            <a:off x="3246120" y="1097280"/>
-            <a:ext cx="2560320" cy="914400"/>
-          </a:xfrm>
-          <a:prstGeom prst="rect">
-            <a:avLst/>
-          </a:prstGeom>
-          <a:noFill/>
-          <a:ln/>
-        </p:spPr>
-        <p:txBody>
-          <a:bodyPr wrap="square" lIns="0" tIns="0" rIns="0" bIns="0" rtlCol="0" anchor="ctr"/>
-          <a:lstStyle/>
-          <a:p>
-            <a:pPr algn="ctr" indent="0" marL="0">
-              <a:buNone/>
-            </a:pPr>
-            <a:r>
-              <a:rPr lang="en-US" sz="6000" b="1" dirty="0">
-                <a:solidFill>
-                  <a:srgbClr val="2D6A4F"/>
-                </a:solidFill>
-                <a:latin typeface="Calibri" pitchFamily="34" charset="0"/>
-                <a:ea typeface="Calibri" pitchFamily="34" charset="-122"/>
-                <a:cs typeface="Calibri" pitchFamily="34" charset="-120"/>
-              </a:rPr>
-              <a:t>8</a:t>
-            </a:r>
-            <a:endParaRPr lang="en-US" sz="6000" dirty="0"/>
-          </a:p>
-        </p:txBody>
-      </p:sp>
-      <p:sp>
-        <p:nvSpPr>
-          <p:cNvPr id="6" name="Text 4"/>
-          <p:cNvSpPr txBox="1"/>
-          <p:nvPr/>
-        </p:nvSpPr>
-        <p:spPr>
-          <a:xfrm>
-            <a:off x="3246120" y="2011680"/>
-            <a:ext cx="2560320" cy="640080"/>
-          </a:xfrm>
-          <a:prstGeom prst="rect">
-            <a:avLst/>
-          </a:prstGeom>
-          <a:noFill/>
-          <a:ln/>
-        </p:spPr>
-        <p:txBody>
-          <a:bodyPr wrap="square" lIns="0" tIns="0" rIns="0" bIns="0" rtlCol="0" anchor="t"/>
-          <a:lstStyle/>
-          <a:p>
-            <a:pPr algn="ctr" indent="0" marL="0">
-              <a:buNone/>
-            </a:pPr>
-            <a:r>
-              <a:rPr lang="en-US" sz="1300" dirty="0">
-                <a:solidFill>
-                  <a:srgbClr val="5C6B63"/>
-                </a:solidFill>
-                <a:latin typeface="Calibri" pitchFamily="34" charset="0"/>
-                <a:ea typeface="Calibri" pitchFamily="34" charset="-122"/>
-                <a:cs typeface="Calibri" pitchFamily="34" charset="-120"/>
-              </a:rPr>
-              <a:t>contenedores con</a:t>
-            </a:r>
-            <a:endParaRPr lang="en-US" sz="1300" dirty="0"/>
-          </a:p>
-          <a:p>
-            <a:pPr algn="ctr" indent="0" marL="0">
-              <a:buNone/>
-            </a:pPr>
-            <a:r>
-              <a:rPr lang="en-US" sz="1300" dirty="0">
-                <a:solidFill>
-                  <a:srgbClr val="5C6B63"/>
-                </a:solidFill>
-                <a:latin typeface="Calibri" pitchFamily="34" charset="0"/>
-                <a:ea typeface="Calibri" pitchFamily="34" charset="-122"/>
-                <a:cs typeface="Calibri" pitchFamily="34" charset="-120"/>
-              </a:rPr>
-              <a:t>docker compose</a:t>
-            </a:r>
-            <a:endParaRPr lang="en-US" sz="1300" dirty="0"/>
-          </a:p>
-        </p:txBody>
-      </p:sp>
-      <p:sp>
-        <p:nvSpPr>
-          <p:cNvPr id="7" name="Text 5"/>
-          <p:cNvSpPr txBox="1"/>
-          <p:nvPr/>
-        </p:nvSpPr>
-        <p:spPr>
-          <a:xfrm>
-            <a:off x="6035040" y="1097280"/>
-            <a:ext cx="2560320" cy="914400"/>
-          </a:xfrm>
-          <a:prstGeom prst="rect">
-            <a:avLst/>
-          </a:prstGeom>
-          <a:noFill/>
-          <a:ln/>
-        </p:spPr>
-        <p:txBody>
-          <a:bodyPr wrap="square" lIns="0" tIns="0" rIns="0" bIns="0" rtlCol="0" anchor="ctr"/>
-          <a:lstStyle/>
-          <a:p>
-            <a:pPr algn="ctr" indent="0" marL="0">
-              <a:buNone/>
-            </a:pPr>
-            <a:r>
-              <a:rPr lang="en-US" sz="6000" b="1" dirty="0">
-                <a:solidFill>
-                  <a:srgbClr val="F4A261"/>
-                </a:solidFill>
-                <a:latin typeface="Calibri" pitchFamily="34" charset="0"/>
-                <a:ea typeface="Calibri" pitchFamily="34" charset="-122"/>
-                <a:cs typeface="Calibri" pitchFamily="34" charset="-120"/>
-              </a:rPr>
-              <a:t>2</a:t>
-            </a:r>
-            <a:endParaRPr lang="en-US" sz="6000" dirty="0"/>
-          </a:p>
-        </p:txBody>
-      </p:sp>
-      <p:sp>
-        <p:nvSpPr>
-          <p:cNvPr id="8" name="Text 6"/>
-          <p:cNvSpPr txBox="1"/>
-          <p:nvPr/>
-        </p:nvSpPr>
-        <p:spPr>
-          <a:xfrm>
-            <a:off x="6035040" y="2011680"/>
-            <a:ext cx="2560320" cy="640080"/>
-          </a:xfrm>
-          <a:prstGeom prst="rect">
-            <a:avLst/>
-          </a:prstGeom>
-          <a:noFill/>
-          <a:ln/>
-        </p:spPr>
-        <p:txBody>
-          <a:bodyPr wrap="square" lIns="0" tIns="0" rIns="0" bIns="0" rtlCol="0" anchor="t"/>
-          <a:lstStyle/>
-          <a:p>
-            <a:pPr algn="ctr" indent="0" marL="0">
-              <a:buNone/>
-            </a:pPr>
-            <a:r>
-              <a:rPr lang="en-US" sz="1300" dirty="0">
-                <a:solidFill>
-                  <a:srgbClr val="5C6B63"/>
-                </a:solidFill>
-                <a:latin typeface="Calibri" pitchFamily="34" charset="0"/>
-                <a:ea typeface="Calibri" pitchFamily="34" charset="-122"/>
-                <a:cs typeface="Calibri" pitchFamily="34" charset="-120"/>
-              </a:rPr>
-              <a:t>nodos RabbitMQ</a:t>
-            </a:r>
-            <a:endParaRPr lang="en-US" sz="1300" dirty="0"/>
-          </a:p>
-          <a:p>
-            <a:pPr algn="ctr" indent="0" marL="0">
-              <a:buNone/>
-            </a:pPr>
-            <a:r>
-              <a:rPr lang="en-US" sz="1300" dirty="0">
-                <a:solidFill>
-                  <a:srgbClr val="5C6B63"/>
-                </a:solidFill>
-                <a:latin typeface="Calibri" pitchFamily="34" charset="0"/>
-                <a:ea typeface="Calibri" pitchFamily="34" charset="-122"/>
-                <a:cs typeface="Calibri" pitchFamily="34" charset="-120"/>
-              </a:rPr>
-              <a:t>en clúster</a:t>
-            </a:r>
-            <a:endParaRPr lang="en-US" sz="1300" dirty="0"/>
-          </a:p>
-        </p:txBody>
-      </p:sp>
-      <p:sp>
-        <p:nvSpPr>
-          <p:cNvPr id="9" name="Shape 7"/>
-          <p:cNvSpPr/>
-          <p:nvPr/>
-        </p:nvSpPr>
-        <p:spPr>
-          <a:xfrm>
-            <a:off x="457200" y="2926080"/>
-            <a:ext cx="502920" cy="502920"/>
-          </a:xfrm>
-          <a:prstGeom prst="ellipse">
-            <a:avLst/>
-          </a:prstGeom>
-          <a:solidFill>
-            <a:srgbClr val="E8F5EE"/>
-          </a:solidFill>
-          <a:ln w="12700">
-            <a:solidFill>
-              <a:srgbClr val="E8F5EE"/>
-            </a:solidFill>
-            <a:prstDash val="solid"/>
-          </a:ln>
-        </p:spPr>
-      </p:sp>
-      <p:pic>
-        <p:nvPicPr>
-          <p:cNvPr id="10" name="Image 0" descr="preencoded.png">    </p:cNvPr>
-          <p:cNvPicPr>
-            <a:picLocks noChangeAspect="1"/>
-          </p:cNvPicPr>
-          <p:nvPr/>
-        </p:nvPicPr>
-        <p:blipFill>
-          <a:blip r:embed="rId1"/>
-          <a:stretch>
-            <a:fillRect/>
-          </a:stretch>
-        </p:blipFill>
-        <p:spPr>
-          <a:xfrm>
-            <a:off x="577901" y="3046781"/>
-            <a:ext cx="261518" cy="261518"/>
-          </a:xfrm>
-          <a:prstGeom prst="rect">
-            <a:avLst/>
-          </a:prstGeom>
-        </p:spPr>
-      </p:pic>
-      <p:sp>
-        <p:nvSpPr>
-          <p:cNvPr id="11" name="Text 8"/>
-          <p:cNvSpPr txBox="1"/>
-          <p:nvPr/>
-        </p:nvSpPr>
-        <p:spPr>
-          <a:xfrm>
-            <a:off x="1097280" y="2907792"/>
-            <a:ext cx="3383280" cy="292608"/>
-          </a:xfrm>
-          <a:prstGeom prst="rect">
-            <a:avLst/>
-          </a:prstGeom>
-          <a:noFill/>
-          <a:ln/>
-        </p:spPr>
-        <p:txBody>
-          <a:bodyPr wrap="square" lIns="0" tIns="0" rIns="0" bIns="0" rtlCol="0" anchor="t"/>
-          <a:lstStyle/>
-          <a:p>
-            <a:pPr indent="0" marL="0">
-              <a:buNone/>
-            </a:pPr>
-            <a:r>
-              <a:rPr lang="en-US" sz="1300" b="1" dirty="0">
-                <a:solidFill>
-                  <a:srgbClr val="14342B"/>
-                </a:solidFill>
-                <a:latin typeface="Calibri" pitchFamily="34" charset="0"/>
-                <a:ea typeface="Calibri" pitchFamily="34" charset="-122"/>
-                <a:cs typeface="Calibri" pitchFamily="34" charset="-120"/>
-              </a:rPr>
-              <a:t>Arranque ordenado</a:t>
-            </a:r>
-            <a:endParaRPr lang="en-US" sz="1300" dirty="0"/>
-          </a:p>
-        </p:txBody>
-      </p:sp>
-      <p:sp>
-        <p:nvSpPr>
-          <p:cNvPr id="12" name="Text 9"/>
-          <p:cNvSpPr txBox="1"/>
-          <p:nvPr/>
-        </p:nvSpPr>
-        <p:spPr>
-          <a:xfrm>
-            <a:off x="1097280" y="3200400"/>
-            <a:ext cx="3383280" cy="457200"/>
-          </a:xfrm>
-          <a:prstGeom prst="rect">
-            <a:avLst/>
-          </a:prstGeom>
-          <a:noFill/>
-          <a:ln/>
-        </p:spPr>
-        <p:txBody>
-          <a:bodyPr wrap="square" lIns="0" tIns="0" rIns="0" bIns="0" rtlCol="0" anchor="t"/>
-          <a:lstStyle/>
-          <a:p>
-            <a:pPr indent="0" marL="0">
-              <a:buNone/>
-            </a:pPr>
-            <a:r>
-              <a:rPr lang="en-US" sz="1100" dirty="0">
-                <a:solidFill>
-                  <a:srgbClr val="1F2A24"/>
-                </a:solidFill>
-                <a:latin typeface="Calibri" pitchFamily="34" charset="0"/>
-                <a:ea typeface="Calibri" pitchFamily="34" charset="-122"/>
-                <a:cs typeface="Calibri" pitchFamily="34" charset="-120"/>
-              </a:rPr>
-              <a:t>Healthchecks y depends_on: los servicios esperan a PostgreSQL y a los dos nodos.</a:t>
-            </a:r>
-            <a:endParaRPr lang="en-US" sz="1100" dirty="0"/>
-          </a:p>
-        </p:txBody>
-      </p:sp>
-      <p:sp>
-        <p:nvSpPr>
-          <p:cNvPr id="13" name="Shape 10"/>
-          <p:cNvSpPr/>
-          <p:nvPr/>
-        </p:nvSpPr>
-        <p:spPr>
-          <a:xfrm>
-            <a:off x="4663440" y="2926080"/>
-            <a:ext cx="502920" cy="502920"/>
-          </a:xfrm>
-          <a:prstGeom prst="ellipse">
-            <a:avLst/>
-          </a:prstGeom>
-          <a:solidFill>
-            <a:srgbClr val="E8F5EE"/>
-          </a:solidFill>
-          <a:ln w="12700">
-            <a:solidFill>
-              <a:srgbClr val="E8F5EE"/>
-            </a:solidFill>
-            <a:prstDash val="solid"/>
-          </a:ln>
-        </p:spPr>
-      </p:sp>
-      <p:pic>
-        <p:nvPicPr>
-          <p:cNvPr id="14" name="Image 1" descr="preencoded.png">    </p:cNvPr>
-          <p:cNvPicPr>
-            <a:picLocks noChangeAspect="1"/>
-          </p:cNvPicPr>
-          <p:nvPr/>
-        </p:nvPicPr>
-        <p:blipFill>
-          <a:blip r:embed="rId2"/>
-          <a:stretch>
-            <a:fillRect/>
-          </a:stretch>
-        </p:blipFill>
-        <p:spPr>
-          <a:xfrm>
-            <a:off x="4784141" y="3046781"/>
-            <a:ext cx="261518" cy="261518"/>
-          </a:xfrm>
-          <a:prstGeom prst="rect">
-            <a:avLst/>
-          </a:prstGeom>
-        </p:spPr>
-      </p:pic>
-      <p:sp>
-        <p:nvSpPr>
-          <p:cNvPr id="15" name="Text 11"/>
-          <p:cNvSpPr txBox="1"/>
-          <p:nvPr/>
-        </p:nvSpPr>
-        <p:spPr>
-          <a:xfrm>
-            <a:off x="5303520" y="2907792"/>
-            <a:ext cx="3383280" cy="292608"/>
-          </a:xfrm>
-          <a:prstGeom prst="rect">
-            <a:avLst/>
-          </a:prstGeom>
-          <a:noFill/>
-          <a:ln/>
-        </p:spPr>
-        <p:txBody>
-          <a:bodyPr wrap="square" lIns="0" tIns="0" rIns="0" bIns="0" rtlCol="0" anchor="t"/>
-          <a:lstStyle/>
-          <a:p>
-            <a:pPr indent="0" marL="0">
-              <a:buNone/>
-            </a:pPr>
-            <a:r>
-              <a:rPr lang="en-US" sz="1300" b="1" dirty="0">
-                <a:solidFill>
-                  <a:srgbClr val="14342B"/>
-                </a:solidFill>
-                <a:latin typeface="Calibri" pitchFamily="34" charset="0"/>
-                <a:ea typeface="Calibri" pitchFamily="34" charset="-122"/>
-                <a:cs typeface="Calibri" pitchFamily="34" charset="-120"/>
-              </a:rPr>
-              <a:t>Una base por microservicio</a:t>
-            </a:r>
-            <a:endParaRPr lang="en-US" sz="1300" dirty="0"/>
-          </a:p>
-        </p:txBody>
-      </p:sp>
-      <p:sp>
-        <p:nvSpPr>
-          <p:cNvPr id="16" name="Text 12"/>
-          <p:cNvSpPr txBox="1"/>
-          <p:nvPr/>
-        </p:nvSpPr>
-        <p:spPr>
-          <a:xfrm>
-            <a:off x="5303520" y="3200400"/>
-            <a:ext cx="3383280" cy="457200"/>
-          </a:xfrm>
-          <a:prstGeom prst="rect">
-            <a:avLst/>
-          </a:prstGeom>
-          <a:noFill/>
-          <a:ln/>
-        </p:spPr>
-        <p:txBody>
-          <a:bodyPr wrap="square" lIns="0" tIns="0" rIns="0" bIns="0" rtlCol="0" anchor="t"/>
-          <a:lstStyle/>
-          <a:p>
-            <a:pPr indent="0" marL="0">
-              <a:buNone/>
-            </a:pPr>
-            <a:r>
-              <a:rPr lang="en-US" sz="1100" dirty="0">
-                <a:solidFill>
-                  <a:srgbClr val="1F2A24"/>
-                </a:solidFill>
-                <a:latin typeface="Calibri" pitchFamily="34" charset="0"/>
-                <a:ea typeface="Calibri" pitchFamily="34" charset="-122"/>
-                <a:cs typeface="Calibri" pitchFamily="34" charset="-120"/>
-              </a:rPr>
-              <a:t>Cuatro bases en PostgreSQL, con volumen persistente y sin puerto expuesto.</a:t>
-            </a:r>
-            <a:endParaRPr lang="en-US" sz="1100" dirty="0"/>
-          </a:p>
-        </p:txBody>
-      </p:sp>
-      <p:sp>
-        <p:nvSpPr>
-          <p:cNvPr id="17" name="Shape 13"/>
-          <p:cNvSpPr/>
-          <p:nvPr/>
-        </p:nvSpPr>
-        <p:spPr>
-          <a:xfrm>
-            <a:off x="457200" y="3794760"/>
-            <a:ext cx="502920" cy="502920"/>
-          </a:xfrm>
-          <a:prstGeom prst="ellipse">
-            <a:avLst/>
-          </a:prstGeom>
-          <a:solidFill>
-            <a:srgbClr val="E8F5EE"/>
-          </a:solidFill>
-          <a:ln w="12700">
-            <a:solidFill>
-              <a:srgbClr val="E8F5EE"/>
-            </a:solidFill>
-            <a:prstDash val="solid"/>
-          </a:ln>
-        </p:spPr>
-      </p:sp>
-      <p:pic>
-        <p:nvPicPr>
-          <p:cNvPr id="18" name="Image 2" descr="preencoded.png">    </p:cNvPr>
-          <p:cNvPicPr>
-            <a:picLocks noChangeAspect="1"/>
-          </p:cNvPicPr>
-          <p:nvPr/>
-        </p:nvPicPr>
-        <p:blipFill>
-          <a:blip r:embed="rId3"/>
-          <a:stretch>
-            <a:fillRect/>
-          </a:stretch>
-        </p:blipFill>
-        <p:spPr>
-          <a:xfrm>
-            <a:off x="577901" y="3915461"/>
-            <a:ext cx="261518" cy="261518"/>
-          </a:xfrm>
-          <a:prstGeom prst="rect">
-            <a:avLst/>
-          </a:prstGeom>
-        </p:spPr>
-      </p:pic>
-      <p:sp>
-        <p:nvSpPr>
-          <p:cNvPr id="19" name="Text 14"/>
-          <p:cNvSpPr txBox="1"/>
-          <p:nvPr/>
-        </p:nvSpPr>
-        <p:spPr>
-          <a:xfrm>
-            <a:off x="1097280" y="3776472"/>
-            <a:ext cx="3383280" cy="292608"/>
-          </a:xfrm>
-          <a:prstGeom prst="rect">
-            <a:avLst/>
-          </a:prstGeom>
-          <a:noFill/>
-          <a:ln/>
-        </p:spPr>
-        <p:txBody>
-          <a:bodyPr wrap="square" lIns="0" tIns="0" rIns="0" bIns="0" rtlCol="0" anchor="t"/>
-          <a:lstStyle/>
-          <a:p>
-            <a:pPr indent="0" marL="0">
-              <a:buNone/>
-            </a:pPr>
-            <a:r>
-              <a:rPr lang="en-US" sz="1300" b="1" dirty="0">
-                <a:solidFill>
-                  <a:srgbClr val="14342B"/>
-                </a:solidFill>
-                <a:latin typeface="Calibri" pitchFamily="34" charset="0"/>
-                <a:ea typeface="Calibri" pitchFamily="34" charset="-122"/>
-                <a:cs typeface="Calibri" pitchFamily="34" charset="-120"/>
-              </a:rPr>
-              <a:t>IP fija</a:t>
-            </a:r>
-            <a:endParaRPr lang="en-US" sz="1300" dirty="0"/>
-          </a:p>
-        </p:txBody>
-      </p:sp>
-      <p:sp>
-        <p:nvSpPr>
-          <p:cNvPr id="20" name="Text 15"/>
-          <p:cNvSpPr txBox="1"/>
-          <p:nvPr/>
-        </p:nvSpPr>
-        <p:spPr>
-          <a:xfrm>
-            <a:off x="1097280" y="4069080"/>
-            <a:ext cx="3383280" cy="457200"/>
-          </a:xfrm>
-          <a:prstGeom prst="rect">
-            <a:avLst/>
-          </a:prstGeom>
-          <a:noFill/>
-          <a:ln/>
-        </p:spPr>
-        <p:txBody>
-          <a:bodyPr wrap="square" lIns="0" tIns="0" rIns="0" bIns="0" rtlCol="0" anchor="t"/>
-          <a:lstStyle/>
-          <a:p>
-            <a:pPr indent="0" marL="0">
-              <a:buNone/>
-            </a:pPr>
-            <a:r>
-              <a:rPr lang="en-US" sz="1100" dirty="0">
-                <a:solidFill>
-                  <a:srgbClr val="1F2A24"/>
-                </a:solidFill>
-                <a:latin typeface="Calibri" pitchFamily="34" charset="0"/>
-                <a:ea typeface="Calibri" pitchFamily="34" charset="-122"/>
-                <a:cs typeface="Calibri" pitchFamily="34" charset="-120"/>
-              </a:rPr>
-              <a:t>Elastic IP en ambas instancias: el dominio no cambia al reiniciar el laboratorio.</a:t>
-            </a:r>
-            <a:endParaRPr lang="en-US" sz="1100" dirty="0"/>
-          </a:p>
-        </p:txBody>
-      </p:sp>
-      <p:sp>
-        <p:nvSpPr>
-          <p:cNvPr id="21" name="Shape 16"/>
-          <p:cNvSpPr/>
-          <p:nvPr/>
-        </p:nvSpPr>
-        <p:spPr>
-          <a:xfrm>
-            <a:off x="4663440" y="3794760"/>
-            <a:ext cx="502920" cy="502920"/>
-          </a:xfrm>
-          <a:prstGeom prst="ellipse">
-            <a:avLst/>
-          </a:prstGeom>
-          <a:solidFill>
-            <a:srgbClr val="E8F5EE"/>
-          </a:solidFill>
-          <a:ln w="12700">
-            <a:solidFill>
-              <a:srgbClr val="E8F5EE"/>
-            </a:solidFill>
-            <a:prstDash val="solid"/>
-          </a:ln>
-        </p:spPr>
-      </p:sp>
-      <p:pic>
-        <p:nvPicPr>
-          <p:cNvPr id="22" name="Image 3" descr="preencoded.png">    </p:cNvPr>
-          <p:cNvPicPr>
-            <a:picLocks noChangeAspect="1"/>
-          </p:cNvPicPr>
-          <p:nvPr/>
-        </p:nvPicPr>
-        <p:blipFill>
-          <a:blip r:embed="rId4"/>
-          <a:stretch>
-            <a:fillRect/>
-          </a:stretch>
-        </p:blipFill>
-        <p:spPr>
-          <a:xfrm>
-            <a:off x="4784141" y="3915461"/>
-            <a:ext cx="261518" cy="261518"/>
-          </a:xfrm>
-          <a:prstGeom prst="rect">
-            <a:avLst/>
-          </a:prstGeom>
-        </p:spPr>
-      </p:pic>
-      <p:sp>
-        <p:nvSpPr>
-          <p:cNvPr id="23" name="Text 17"/>
-          <p:cNvSpPr txBox="1"/>
-          <p:nvPr/>
-        </p:nvSpPr>
-        <p:spPr>
-          <a:xfrm>
-            <a:off x="5303520" y="3776472"/>
-            <a:ext cx="3383280" cy="292608"/>
-          </a:xfrm>
-          <a:prstGeom prst="rect">
-            <a:avLst/>
-          </a:prstGeom>
-          <a:noFill/>
-          <a:ln/>
-        </p:spPr>
-        <p:txBody>
-          <a:bodyPr wrap="square" lIns="0" tIns="0" rIns="0" bIns="0" rtlCol="0" anchor="t"/>
-          <a:lstStyle/>
-          <a:p>
-            <a:pPr indent="0" marL="0">
-              <a:buNone/>
-            </a:pPr>
-            <a:r>
-              <a:rPr lang="en-US" sz="1300" b="1" dirty="0">
-                <a:solidFill>
-                  <a:srgbClr val="14342B"/>
-                </a:solidFill>
-                <a:latin typeface="Calibri" pitchFamily="34" charset="0"/>
-                <a:ea typeface="Calibri" pitchFamily="34" charset="-122"/>
-                <a:cs typeface="Calibri" pitchFamily="34" charset="-120"/>
-              </a:rPr>
-              <a:t>HTTPS y secretos</a:t>
-            </a:r>
-            <a:endParaRPr lang="en-US" sz="1300" dirty="0"/>
-          </a:p>
-        </p:txBody>
-      </p:sp>
-      <p:sp>
-        <p:nvSpPr>
-          <p:cNvPr id="24" name="Text 18"/>
-          <p:cNvSpPr txBox="1"/>
-          <p:nvPr/>
-        </p:nvSpPr>
-        <p:spPr>
-          <a:xfrm>
-            <a:off x="5303520" y="4069080"/>
-            <a:ext cx="3383280" cy="457200"/>
-          </a:xfrm>
-          <a:prstGeom prst="rect">
-            <a:avLst/>
-          </a:prstGeom>
-          <a:noFill/>
-          <a:ln/>
-        </p:spPr>
-        <p:txBody>
-          <a:bodyPr wrap="square" lIns="0" tIns="0" rIns="0" bIns="0" rtlCol="0" anchor="t"/>
-          <a:lstStyle/>
-          <a:p>
-            <a:pPr indent="0" marL="0">
-              <a:buNone/>
-            </a:pPr>
-            <a:r>
-              <a:rPr lang="en-US" sz="1100" dirty="0">
-                <a:solidFill>
-                  <a:srgbClr val="1F2A24"/>
-                </a:solidFill>
-                <a:latin typeface="Calibri" pitchFamily="34" charset="0"/>
-                <a:ea typeface="Calibri" pitchFamily="34" charset="-122"/>
-                <a:cs typeface="Calibri" pitchFamily="34" charset="-120"/>
-              </a:rPr>
-              <a:t>Let's Encrypt en el frontend; las contraseñas viven solo en el .env de la instancia.</a:t>
-            </a:r>
-            <a:endParaRPr lang="en-US" sz="1100" dirty="0"/>
-          </a:p>
-        </p:txBody>
-      </p:sp>
-    </p:spTree>
-  </p:cSld>
-  <p:clrMapOvr>
-    <a:masterClrMapping/>
-  </p:clrMapOvr>
-</p:sld>
-</file>
-
-<file path=ppt/slides/slide13.xml><?xml version="1.0" encoding="utf-8"?>
-<p:sld xmlns:a="http://schemas.openxmlformats.org/drawingml/2006/main" xmlns:r="http://schemas.openxmlformats.org/officeDocument/2006/relationships" xmlns:p="http://schemas.openxmlformats.org/presentationml/2006/main">
-  <p:cSld name="Slide 13">
-    <p:spTree>
-      <p:nvGrpSpPr>
-        <p:cNvPr id="1" name=""/>
-        <p:cNvGrpSpPr/>
-        <p:nvPr/>
-      </p:nvGrpSpPr>
-      <p:grpSpPr>
-        <a:xfrm>
-          <a:off x="0" y="0"/>
-          <a:ext cx="0" cy="0"/>
-          <a:chOff x="0" y="0"/>
-          <a:chExt cx="0" cy="0"/>
-        </a:xfrm>
-      </p:grpSpPr>
-      <p:sp>
-        <p:nvSpPr>
-          <p:cNvPr id="2" name="Text 0"/>
-          <p:cNvSpPr txBox="1"/>
-          <p:nvPr/>
-        </p:nvSpPr>
-        <p:spPr>
-          <a:xfrm>
-            <a:off x="457200" y="320040"/>
-            <a:ext cx="8229600" cy="731520"/>
-          </a:xfrm>
-          <a:prstGeom prst="rect">
-            <a:avLst/>
-          </a:prstGeom>
-          <a:noFill/>
-          <a:ln/>
-        </p:spPr>
-        <p:txBody>
-          <a:bodyPr wrap="square" lIns="0" tIns="0" rIns="0" bIns="0" rtlCol="0" anchor="ctr"/>
-          <a:lstStyle/>
-          <a:p>
-            <a:pPr indent="0" marL="0">
-              <a:buNone/>
-            </a:pPr>
-            <a:r>
-              <a:rPr lang="en-US" sz="3600" b="1" dirty="0">
-                <a:solidFill>
-                  <a:srgbClr val="FFFFFF"/>
-                </a:solidFill>
-                <a:latin typeface="Calibri" pitchFamily="34" charset="0"/>
-                <a:ea typeface="Calibri" pitchFamily="34" charset="-122"/>
-                <a:cs typeface="Calibri" pitchFamily="34" charset="-120"/>
-              </a:rPr>
-              <a:t>Demo en vivo</a:t>
-            </a:r>
-            <a:endParaRPr lang="en-US" sz="3600" dirty="0"/>
-          </a:p>
-        </p:txBody>
-      </p:sp>
-      <p:sp>
-        <p:nvSpPr>
-          <p:cNvPr id="3" name="Shape 1"/>
-          <p:cNvSpPr/>
-          <p:nvPr/>
-        </p:nvSpPr>
-        <p:spPr>
-          <a:xfrm>
-            <a:off x="457200" y="1325880"/>
-            <a:ext cx="502920" cy="502920"/>
-          </a:xfrm>
-          <a:prstGeom prst="ellipse">
-            <a:avLst/>
-          </a:prstGeom>
-          <a:solidFill>
-            <a:srgbClr val="52B788"/>
-          </a:solidFill>
-          <a:ln w="12700">
-            <a:solidFill>
-              <a:srgbClr val="52B788"/>
-            </a:solidFill>
-            <a:prstDash val="solid"/>
-          </a:ln>
-        </p:spPr>
-      </p:sp>
-      <p:sp>
-        <p:nvSpPr>
-          <p:cNvPr id="4" name="Text 2"/>
-          <p:cNvSpPr txBox="1"/>
-          <p:nvPr/>
-        </p:nvSpPr>
-        <p:spPr>
-          <a:xfrm>
-            <a:off x="457200" y="1325880"/>
-            <a:ext cx="502920" cy="502920"/>
-          </a:xfrm>
-          <a:prstGeom prst="rect">
-            <a:avLst/>
-          </a:prstGeom>
-          <a:noFill/>
-          <a:ln/>
-        </p:spPr>
-        <p:txBody>
-          <a:bodyPr wrap="square" lIns="0" tIns="0" rIns="0" bIns="0" rtlCol="0" anchor="ctr"/>
-          <a:lstStyle/>
-          <a:p>
-            <a:pPr algn="ctr" indent="0" marL="0">
-              <a:buNone/>
-            </a:pPr>
-            <a:r>
-              <a:rPr lang="en-US" sz="1600" b="1" dirty="0">
-                <a:solidFill>
-                  <a:srgbClr val="14342B"/>
-                </a:solidFill>
-                <a:latin typeface="Calibri" pitchFamily="34" charset="0"/>
-                <a:ea typeface="Calibri" pitchFamily="34" charset="-122"/>
-                <a:cs typeface="Calibri" pitchFamily="34" charset="-120"/>
-              </a:rPr>
-              <a:t>1</a:t>
-            </a:r>
-            <a:endParaRPr lang="en-US" sz="1600" dirty="0"/>
-          </a:p>
-        </p:txBody>
-      </p:sp>
-      <p:sp>
-        <p:nvSpPr>
-          <p:cNvPr id="5" name="Text 3"/>
-          <p:cNvSpPr txBox="1"/>
-          <p:nvPr/>
-        </p:nvSpPr>
-        <p:spPr>
-          <a:xfrm>
-            <a:off x="1143000" y="1280160"/>
-            <a:ext cx="3383280" cy="640080"/>
-          </a:xfrm>
-          <a:prstGeom prst="rect">
-            <a:avLst/>
-          </a:prstGeom>
-          <a:noFill/>
-          <a:ln/>
-        </p:spPr>
-        <p:txBody>
-          <a:bodyPr wrap="square" lIns="0" tIns="0" rIns="0" bIns="0" rtlCol="0" anchor="ctr"/>
-          <a:lstStyle/>
-          <a:p>
-            <a:pPr indent="0" marL="0">
-              <a:buNone/>
-            </a:pPr>
-            <a:r>
-              <a:rPr lang="en-US" sz="1400" dirty="0">
-                <a:solidFill>
-                  <a:srgbClr val="FFFFFF"/>
-                </a:solidFill>
-                <a:latin typeface="Calibri" pitchFamily="34" charset="0"/>
-                <a:ea typeface="Calibri" pitchFamily="34" charset="-122"/>
-                <a:cs typeface="Calibri" pitchFamily="34" charset="-120"/>
-              </a:rPr>
-              <a:t>AWS: API Gateway con sus rutas, el authorizer JWT y CORS</a:t>
-            </a:r>
-            <a:endParaRPr lang="en-US" sz="1400" dirty="0"/>
-          </a:p>
-        </p:txBody>
-      </p:sp>
-      <p:sp>
-        <p:nvSpPr>
-          <p:cNvPr id="6" name="Shape 4"/>
-          <p:cNvSpPr/>
-          <p:nvPr/>
-        </p:nvSpPr>
-        <p:spPr>
-          <a:xfrm>
-            <a:off x="4663440" y="1325880"/>
-            <a:ext cx="502920" cy="502920"/>
-          </a:xfrm>
-          <a:prstGeom prst="ellipse">
-            <a:avLst/>
-          </a:prstGeom>
-          <a:solidFill>
-            <a:srgbClr val="52B788"/>
-          </a:solidFill>
-          <a:ln w="12700">
-            <a:solidFill>
-              <a:srgbClr val="52B788"/>
-            </a:solidFill>
-            <a:prstDash val="solid"/>
-          </a:ln>
-        </p:spPr>
-      </p:sp>
-      <p:sp>
-        <p:nvSpPr>
-          <p:cNvPr id="7" name="Text 5"/>
-          <p:cNvSpPr txBox="1"/>
-          <p:nvPr/>
-        </p:nvSpPr>
-        <p:spPr>
-          <a:xfrm>
-            <a:off x="4663440" y="1325880"/>
-            <a:ext cx="502920" cy="502920"/>
-          </a:xfrm>
-          <a:prstGeom prst="rect">
-            <a:avLst/>
-          </a:prstGeom>
-          <a:noFill/>
-          <a:ln/>
-        </p:spPr>
-        <p:txBody>
-          <a:bodyPr wrap="square" lIns="0" tIns="0" rIns="0" bIns="0" rtlCol="0" anchor="ctr"/>
-          <a:lstStyle/>
-          <a:p>
-            <a:pPr algn="ctr" indent="0" marL="0">
-              <a:buNone/>
-            </a:pPr>
-            <a:r>
-              <a:rPr lang="en-US" sz="1600" b="1" dirty="0">
-                <a:solidFill>
-                  <a:srgbClr val="14342B"/>
-                </a:solidFill>
-                <a:latin typeface="Calibri" pitchFamily="34" charset="0"/>
-                <a:ea typeface="Calibri" pitchFamily="34" charset="-122"/>
-                <a:cs typeface="Calibri" pitchFamily="34" charset="-120"/>
-              </a:rPr>
-              <a:t>2</a:t>
-            </a:r>
-            <a:endParaRPr lang="en-US" sz="1600" dirty="0"/>
-          </a:p>
-        </p:txBody>
-      </p:sp>
-      <p:sp>
-        <p:nvSpPr>
-          <p:cNvPr id="8" name="Text 6"/>
-          <p:cNvSpPr txBox="1"/>
-          <p:nvPr/>
-        </p:nvSpPr>
-        <p:spPr>
-          <a:xfrm>
-            <a:off x="5349240" y="1280160"/>
-            <a:ext cx="3383280" cy="640080"/>
-          </a:xfrm>
-          <a:prstGeom prst="rect">
-            <a:avLst/>
-          </a:prstGeom>
-          <a:noFill/>
-          <a:ln/>
-        </p:spPr>
-        <p:txBody>
-          <a:bodyPr wrap="square" lIns="0" tIns="0" rIns="0" bIns="0" rtlCol="0" anchor="ctr"/>
-          <a:lstStyle/>
-          <a:p>
-            <a:pPr indent="0" marL="0">
-              <a:buNone/>
-            </a:pPr>
-            <a:r>
-              <a:rPr lang="en-US" sz="1400" dirty="0">
-                <a:solidFill>
-                  <a:srgbClr val="FFFFFF"/>
-                </a:solidFill>
-                <a:latin typeface="Calibri" pitchFamily="34" charset="0"/>
-                <a:ea typeface="Calibri" pitchFamily="34" charset="-122"/>
-                <a:cs typeface="Calibri" pitchFamily="34" charset="-120"/>
-              </a:rPr>
-              <a:t>Entra ID: usuarios y App roles ENCARGADO y ADMIN</a:t>
-            </a:r>
-            <a:endParaRPr lang="en-US" sz="1400" dirty="0"/>
-          </a:p>
-        </p:txBody>
-      </p:sp>
-      <p:sp>
-        <p:nvSpPr>
-          <p:cNvPr id="9" name="Shape 7"/>
-          <p:cNvSpPr/>
-          <p:nvPr/>
-        </p:nvSpPr>
-        <p:spPr>
-          <a:xfrm>
-            <a:off x="457200" y="2423160"/>
-            <a:ext cx="502920" cy="502920"/>
-          </a:xfrm>
-          <a:prstGeom prst="ellipse">
-            <a:avLst/>
-          </a:prstGeom>
-          <a:solidFill>
-            <a:srgbClr val="52B788"/>
-          </a:solidFill>
-          <a:ln w="12700">
-            <a:solidFill>
-              <a:srgbClr val="52B788"/>
-            </a:solidFill>
-            <a:prstDash val="solid"/>
-          </a:ln>
-        </p:spPr>
-      </p:sp>
-      <p:sp>
-        <p:nvSpPr>
-          <p:cNvPr id="10" name="Text 8"/>
-          <p:cNvSpPr txBox="1"/>
-          <p:nvPr/>
-        </p:nvSpPr>
-        <p:spPr>
-          <a:xfrm>
-            <a:off x="457200" y="2423160"/>
-            <a:ext cx="502920" cy="502920"/>
-          </a:xfrm>
-          <a:prstGeom prst="rect">
-            <a:avLst/>
-          </a:prstGeom>
-          <a:noFill/>
-          <a:ln/>
-        </p:spPr>
-        <p:txBody>
-          <a:bodyPr wrap="square" lIns="0" tIns="0" rIns="0" bIns="0" rtlCol="0" anchor="ctr"/>
-          <a:lstStyle/>
-          <a:p>
-            <a:pPr algn="ctr" indent="0" marL="0">
-              <a:buNone/>
-            </a:pPr>
-            <a:r>
-              <a:rPr lang="en-US" sz="1600" b="1" dirty="0">
-                <a:solidFill>
-                  <a:srgbClr val="14342B"/>
-                </a:solidFill>
-                <a:latin typeface="Calibri" pitchFamily="34" charset="0"/>
-                <a:ea typeface="Calibri" pitchFamily="34" charset="-122"/>
-                <a:cs typeface="Calibri" pitchFamily="34" charset="-120"/>
-              </a:rPr>
-              <a:t>3</a:t>
-            </a:r>
-            <a:endParaRPr lang="en-US" sz="1600" dirty="0"/>
-          </a:p>
-        </p:txBody>
-      </p:sp>
-      <p:sp>
-        <p:nvSpPr>
-          <p:cNvPr id="11" name="Text 9"/>
-          <p:cNvSpPr txBox="1"/>
-          <p:nvPr/>
-        </p:nvSpPr>
-        <p:spPr>
-          <a:xfrm>
-            <a:off x="1143000" y="2377440"/>
-            <a:ext cx="3383280" cy="640080"/>
-          </a:xfrm>
-          <a:prstGeom prst="rect">
-            <a:avLst/>
-          </a:prstGeom>
-          <a:noFill/>
-          <a:ln/>
-        </p:spPr>
-        <p:txBody>
-          <a:bodyPr wrap="square" lIns="0" tIns="0" rIns="0" bIns="0" rtlCol="0" anchor="ctr"/>
-          <a:lstStyle/>
-          <a:p>
-            <a:pPr indent="0" marL="0">
-              <a:buNone/>
-            </a:pPr>
-            <a:r>
-              <a:rPr lang="en-US" sz="1400" dirty="0">
-                <a:solidFill>
-                  <a:srgbClr val="FFFFFF"/>
-                </a:solidFill>
-                <a:latin typeface="Calibri" pitchFamily="34" charset="0"/>
-                <a:ea typeface="Calibri" pitchFamily="34" charset="-122"/>
-                <a:cs typeface="Calibri" pitchFamily="34" charset="-120"/>
-              </a:rPr>
-              <a:t>Login con PKCE y crear un reporte, con la pestaña Red abierta</a:t>
-            </a:r>
-            <a:endParaRPr lang="en-US" sz="1400" dirty="0"/>
-          </a:p>
-        </p:txBody>
-      </p:sp>
-      <p:sp>
-        <p:nvSpPr>
-          <p:cNvPr id="12" name="Shape 10"/>
-          <p:cNvSpPr/>
-          <p:nvPr/>
-        </p:nvSpPr>
-        <p:spPr>
-          <a:xfrm>
-            <a:off x="4663440" y="2423160"/>
-            <a:ext cx="502920" cy="502920"/>
-          </a:xfrm>
-          <a:prstGeom prst="ellipse">
-            <a:avLst/>
-          </a:prstGeom>
-          <a:solidFill>
-            <a:srgbClr val="52B788"/>
-          </a:solidFill>
-          <a:ln w="12700">
-            <a:solidFill>
-              <a:srgbClr val="52B788"/>
-            </a:solidFill>
-            <a:prstDash val="solid"/>
-          </a:ln>
-        </p:spPr>
-      </p:sp>
-      <p:sp>
-        <p:nvSpPr>
-          <p:cNvPr id="13" name="Text 11"/>
-          <p:cNvSpPr txBox="1"/>
-          <p:nvPr/>
-        </p:nvSpPr>
-        <p:spPr>
-          <a:xfrm>
-            <a:off x="4663440" y="2423160"/>
-            <a:ext cx="502920" cy="502920"/>
-          </a:xfrm>
-          <a:prstGeom prst="rect">
-            <a:avLst/>
-          </a:prstGeom>
-          <a:noFill/>
-          <a:ln/>
-        </p:spPr>
-        <p:txBody>
-          <a:bodyPr wrap="square" lIns="0" tIns="0" rIns="0" bIns="0" rtlCol="0" anchor="ctr"/>
-          <a:lstStyle/>
-          <a:p>
-            <a:pPr algn="ctr" indent="0" marL="0">
-              <a:buNone/>
-            </a:pPr>
-            <a:r>
-              <a:rPr lang="en-US" sz="1600" b="1" dirty="0">
-                <a:solidFill>
-                  <a:srgbClr val="14342B"/>
-                </a:solidFill>
-                <a:latin typeface="Calibri" pitchFamily="34" charset="0"/>
-                <a:ea typeface="Calibri" pitchFamily="34" charset="-122"/>
-                <a:cs typeface="Calibri" pitchFamily="34" charset="-120"/>
-              </a:rPr>
-              <a:t>4</a:t>
-            </a:r>
-            <a:endParaRPr lang="en-US" sz="1600" dirty="0"/>
-          </a:p>
-        </p:txBody>
-      </p:sp>
-      <p:sp>
-        <p:nvSpPr>
-          <p:cNvPr id="14" name="Text 12"/>
-          <p:cNvSpPr txBox="1"/>
-          <p:nvPr/>
-        </p:nvSpPr>
-        <p:spPr>
-          <a:xfrm>
-            <a:off x="5349240" y="2377440"/>
-            <a:ext cx="3383280" cy="640080"/>
-          </a:xfrm>
-          <a:prstGeom prst="rect">
-            <a:avLst/>
-          </a:prstGeom>
-          <a:noFill/>
-          <a:ln/>
-        </p:spPr>
-        <p:txBody>
-          <a:bodyPr wrap="square" lIns="0" tIns="0" rIns="0" bIns="0" rtlCol="0" anchor="ctr"/>
-          <a:lstStyle/>
-          <a:p>
-            <a:pPr indent="0" marL="0">
-              <a:buNone/>
-            </a:pPr>
-            <a:r>
-              <a:rPr lang="en-US" sz="1400" dirty="0">
-                <a:solidFill>
-                  <a:srgbClr val="FFFFFF"/>
-                </a:solidFill>
-                <a:latin typeface="Calibri" pitchFamily="34" charset="0"/>
-                <a:ea typeface="Calibri" pitchFamily="34" charset="-122"/>
-                <a:cs typeface="Calibri" pitchFamily="34" charset="-120"/>
-              </a:rPr>
-              <a:t>Encargado: revisión → ticket; resuelto → estadísticas</a:t>
-            </a:r>
-            <a:endParaRPr lang="en-US" sz="1400" dirty="0"/>
-          </a:p>
-        </p:txBody>
-      </p:sp>
-      <p:sp>
-        <p:nvSpPr>
-          <p:cNvPr id="15" name="Shape 13"/>
-          <p:cNvSpPr/>
-          <p:nvPr/>
-        </p:nvSpPr>
-        <p:spPr>
-          <a:xfrm>
-            <a:off x="457200" y="3520440"/>
-            <a:ext cx="502920" cy="502920"/>
-          </a:xfrm>
-          <a:prstGeom prst="ellipse">
-            <a:avLst/>
-          </a:prstGeom>
-          <a:solidFill>
-            <a:srgbClr val="52B788"/>
-          </a:solidFill>
-          <a:ln w="12700">
-            <a:solidFill>
-              <a:srgbClr val="52B788"/>
-            </a:solidFill>
-            <a:prstDash val="solid"/>
-          </a:ln>
-        </p:spPr>
-      </p:sp>
-      <p:sp>
-        <p:nvSpPr>
-          <p:cNvPr id="16" name="Text 14"/>
-          <p:cNvSpPr txBox="1"/>
-          <p:nvPr/>
-        </p:nvSpPr>
-        <p:spPr>
-          <a:xfrm>
-            <a:off x="457200" y="3520440"/>
-            <a:ext cx="502920" cy="502920"/>
-          </a:xfrm>
-          <a:prstGeom prst="rect">
-            <a:avLst/>
-          </a:prstGeom>
-          <a:noFill/>
-          <a:ln/>
-        </p:spPr>
-        <p:txBody>
-          <a:bodyPr wrap="square" lIns="0" tIns="0" rIns="0" bIns="0" rtlCol="0" anchor="ctr"/>
-          <a:lstStyle/>
-          <a:p>
-            <a:pPr algn="ctr" indent="0" marL="0">
-              <a:buNone/>
-            </a:pPr>
-            <a:r>
-              <a:rPr lang="en-US" sz="1600" b="1" dirty="0">
-                <a:solidFill>
-                  <a:srgbClr val="14342B"/>
-                </a:solidFill>
-                <a:latin typeface="Calibri" pitchFamily="34" charset="0"/>
-                <a:ea typeface="Calibri" pitchFamily="34" charset="-122"/>
-                <a:cs typeface="Calibri" pitchFamily="34" charset="-120"/>
-              </a:rPr>
-              <a:t>5</a:t>
-            </a:r>
-            <a:endParaRPr lang="en-US" sz="1600" dirty="0"/>
-          </a:p>
-        </p:txBody>
-      </p:sp>
-      <p:sp>
-        <p:nvSpPr>
-          <p:cNvPr id="17" name="Text 15"/>
-          <p:cNvSpPr txBox="1"/>
-          <p:nvPr/>
-        </p:nvSpPr>
-        <p:spPr>
-          <a:xfrm>
-            <a:off x="1143000" y="3474720"/>
-            <a:ext cx="3383280" cy="640080"/>
-          </a:xfrm>
-          <a:prstGeom prst="rect">
-            <a:avLst/>
-          </a:prstGeom>
-          <a:noFill/>
-          <a:ln/>
-        </p:spPr>
-        <p:txBody>
-          <a:bodyPr wrap="square" lIns="0" tIns="0" rIns="0" bIns="0" rtlCol="0" anchor="ctr"/>
-          <a:lstStyle/>
-          <a:p>
-            <a:pPr indent="0" marL="0">
-              <a:buNone/>
-            </a:pPr>
-            <a:r>
-              <a:rPr lang="en-US" sz="1400" dirty="0">
-                <a:solidFill>
-                  <a:srgbClr val="FFFFFF"/>
-                </a:solidFill>
-                <a:latin typeface="Calibri" pitchFamily="34" charset="0"/>
-                <a:ea typeface="Calibri" pitchFamily="34" charset="-122"/>
-                <a:cs typeface="Calibri" pitchFamily="34" charset="-120"/>
-              </a:rPr>
-              <a:t>Falla controlada: mensaje inválido a la DLQ y consumidor caído</a:t>
-            </a:r>
-            <a:endParaRPr lang="en-US" sz="1400" dirty="0"/>
-          </a:p>
-        </p:txBody>
-      </p:sp>
-      <p:sp>
-        <p:nvSpPr>
-          <p:cNvPr id="18" name="Shape 16"/>
-          <p:cNvSpPr/>
-          <p:nvPr/>
-        </p:nvSpPr>
-        <p:spPr>
-          <a:xfrm>
-            <a:off x="4663440" y="3520440"/>
-            <a:ext cx="502920" cy="502920"/>
-          </a:xfrm>
-          <a:prstGeom prst="ellipse">
-            <a:avLst/>
-          </a:prstGeom>
-          <a:solidFill>
-            <a:srgbClr val="52B788"/>
-          </a:solidFill>
-          <a:ln w="12700">
-            <a:solidFill>
-              <a:srgbClr val="52B788"/>
-            </a:solidFill>
-            <a:prstDash val="solid"/>
-          </a:ln>
-        </p:spPr>
-      </p:sp>
-      <p:sp>
-        <p:nvSpPr>
-          <p:cNvPr id="19" name="Text 17"/>
-          <p:cNvSpPr txBox="1"/>
-          <p:nvPr/>
-        </p:nvSpPr>
-        <p:spPr>
-          <a:xfrm>
-            <a:off x="4663440" y="3520440"/>
-            <a:ext cx="502920" cy="502920"/>
-          </a:xfrm>
-          <a:prstGeom prst="rect">
-            <a:avLst/>
-          </a:prstGeom>
-          <a:noFill/>
-          <a:ln/>
-        </p:spPr>
-        <p:txBody>
-          <a:bodyPr wrap="square" lIns="0" tIns="0" rIns="0" bIns="0" rtlCol="0" anchor="ctr"/>
-          <a:lstStyle/>
-          <a:p>
-            <a:pPr algn="ctr" indent="0" marL="0">
-              <a:buNone/>
-            </a:pPr>
-            <a:r>
-              <a:rPr lang="en-US" sz="1600" b="1" dirty="0">
-                <a:solidFill>
-                  <a:srgbClr val="14342B"/>
-                </a:solidFill>
-                <a:latin typeface="Calibri" pitchFamily="34" charset="0"/>
-                <a:ea typeface="Calibri" pitchFamily="34" charset="-122"/>
-                <a:cs typeface="Calibri" pitchFamily="34" charset="-120"/>
-              </a:rPr>
-              <a:t>6</a:t>
-            </a:r>
-            <a:endParaRPr lang="en-US" sz="1600" dirty="0"/>
-          </a:p>
-        </p:txBody>
-      </p:sp>
-      <p:sp>
-        <p:nvSpPr>
-          <p:cNvPr id="20" name="Text 18"/>
-          <p:cNvSpPr txBox="1"/>
-          <p:nvPr/>
-        </p:nvSpPr>
-        <p:spPr>
-          <a:xfrm>
-            <a:off x="5349240" y="3474720"/>
-            <a:ext cx="3383280" cy="640080"/>
-          </a:xfrm>
-          <a:prstGeom prst="rect">
-            <a:avLst/>
-          </a:prstGeom>
-          <a:noFill/>
-          <a:ln/>
-        </p:spPr>
-        <p:txBody>
-          <a:bodyPr wrap="square" lIns="0" tIns="0" rIns="0" bIns="0" rtlCol="0" anchor="ctr"/>
-          <a:lstStyle/>
-          <a:p>
-            <a:pPr indent="0" marL="0">
-              <a:buNone/>
-            </a:pPr>
-            <a:r>
-              <a:rPr lang="en-US" sz="1400" dirty="0">
-                <a:solidFill>
-                  <a:srgbClr val="FFFFFF"/>
-                </a:solidFill>
-                <a:latin typeface="Calibri" pitchFamily="34" charset="0"/>
-                <a:ea typeface="Calibri" pitchFamily="34" charset="-122"/>
-                <a:cs typeface="Calibri" pitchFamily="34" charset="-120"/>
-              </a:rPr>
-              <a:t>Clúster: docker compose ps, nodos, colas y Administrar RabbitMQ</a:t>
-            </a:r>
-            <a:endParaRPr lang="en-US" sz="1400" dirty="0"/>
-          </a:p>
-        </p:txBody>
-      </p:sp>
-    </p:spTree>
-  </p:cSld>
-  <p:clrMapOvr>
-    <a:masterClrMapping/>
-  </p:clrMapOvr>
-</p:sld>
-</file>
-
-<file path=ppt/slides/slide14.xml><?xml version="1.0" encoding="utf-8"?>
-<p:sld xmlns:a="http://schemas.openxmlformats.org/drawingml/2006/main" xmlns:r="http://schemas.openxmlformats.org/officeDocument/2006/relationships" xmlns:p="http://schemas.openxmlformats.org/presentationml/2006/main">
-  <p:cSld name="Slide 14">
-    <p:spTree>
-      <p:nvGrpSpPr>
-        <p:cNvPr id="1" name=""/>
-        <p:cNvGrpSpPr/>
-        <p:nvPr/>
-      </p:nvGrpSpPr>
-      <p:grpSpPr>
-        <a:xfrm>
-          <a:off x="0" y="0"/>
-          <a:ext cx="0" cy="0"/>
-          <a:chOff x="0" y="0"/>
-          <a:chExt cx="0" cy="0"/>
-        </a:xfrm>
-      </p:grpSpPr>
-      <p:sp>
-        <p:nvSpPr>
           <p:cNvPr id="2" name="Shape 0"/>
           <p:cNvSpPr/>
           <p:nvPr/>
@@ -7457,7 +3585,7 @@
                 <a:ea typeface="Calibri" pitchFamily="34" charset="-122"/>
                 <a:cs typeface="Calibri" pitchFamily="34" charset="-120"/>
               </a:rPr>
-              <a:t>Arquitectura desplegada</a:t>
+              <a:t>Arquitectura y despliegue en AWS</a:t>
             </a:r>
             <a:endParaRPr lang="en-US" sz="3000" dirty="0"/>
           </a:p>
@@ -7471,12 +3599,12 @@
         </p:nvSpPr>
         <p:spPr>
           <a:xfrm>
-            <a:off x="411480" y="1188720"/>
-            <a:ext cx="1463040" cy="1325880"/>
+            <a:off x="320040" y="1097280"/>
+            <a:ext cx="1371600" cy="868680"/>
           </a:xfrm>
           <a:prstGeom prst="roundRect">
             <a:avLst>
-              <a:gd name="adj" fmla="val 8276"/>
+              <a:gd name="adj" fmla="val 12632"/>
             </a:avLst>
           </a:prstGeom>
           <a:solidFill>
@@ -7498,8 +3626,8 @@
         </p:nvSpPr>
         <p:spPr>
           <a:xfrm>
-            <a:off x="914400" y="1325880"/>
-            <a:ext cx="457200" cy="457200"/>
+            <a:off x="411480" y="1207008"/>
+            <a:ext cx="365760" cy="365760"/>
           </a:xfrm>
           <a:prstGeom prst="ellipse">
             <a:avLst/>
@@ -7531,8 +3659,8 @@
         </p:blipFill>
         <p:spPr>
           <a:xfrm>
-            <a:off x="1024128" y="1435608"/>
-            <a:ext cx="237744" cy="237744"/>
+            <a:off x="499262" y="1294790"/>
+            <a:ext cx="190195" cy="190195"/>
           </a:xfrm>
           <a:prstGeom prst="rect">
             <a:avLst/>
@@ -7547,8 +3675,8 @@
         </p:nvSpPr>
         <p:spPr>
           <a:xfrm>
-            <a:off x="411480" y="1847088"/>
-            <a:ext cx="1463040" cy="274320"/>
+            <a:off x="850392" y="1188720"/>
+            <a:ext cx="768096" cy="274320"/>
           </a:xfrm>
           <a:prstGeom prst="rect">
             <a:avLst/>
@@ -7557,14 +3685,14 @@
           <a:ln/>
         </p:spPr>
         <p:txBody>
-          <a:bodyPr wrap="square" lIns="0" tIns="0" rIns="0" bIns="0" rtlCol="0" anchor="t"/>
-          <a:lstStyle/>
-          <a:p>
-            <a:pPr algn="ctr" indent="0" marL="0">
-              <a:buNone/>
-            </a:pPr>
-            <a:r>
-              <a:rPr lang="en-US" sz="1300" b="1" dirty="0">
+          <a:bodyPr wrap="square" lIns="0" tIns="0" rIns="0" bIns="0" rtlCol="0" anchor="ctr"/>
+          <a:lstStyle/>
+          <a:p>
+            <a:pPr indent="0" marL="0">
+              <a:buNone/>
+            </a:pPr>
+            <a:r>
+              <a:rPr lang="en-US" sz="1150" b="1" dirty="0">
                 <a:solidFill>
                   <a:srgbClr val="14342B"/>
                 </a:solidFill>
@@ -7572,9 +3700,9 @@
                 <a:ea typeface="Calibri" pitchFamily="34" charset="-122"/>
                 <a:cs typeface="Calibri" pitchFamily="34" charset="-120"/>
               </a:rPr>
-              <a:t>Frontend</a:t>
-            </a:r>
-            <a:endParaRPr lang="en-US" sz="1300" dirty="0"/>
+              <a:t>Usuario</a:t>
+            </a:r>
+            <a:endParaRPr lang="en-US" sz="1150" dirty="0"/>
           </a:p>
         </p:txBody>
       </p:sp>
@@ -7586,8 +3714,8 @@
         </p:nvSpPr>
         <p:spPr>
           <a:xfrm>
-            <a:off x="457200" y="2121408"/>
-            <a:ext cx="1371600" cy="347472"/>
+            <a:off x="429768" y="1627632"/>
+            <a:ext cx="1170432" cy="283464"/>
           </a:xfrm>
           <a:prstGeom prst="rect">
             <a:avLst/>
@@ -7599,11 +3727,11 @@
           <a:bodyPr wrap="square" lIns="0" tIns="0" rIns="0" bIns="0" rtlCol="0" anchor="t"/>
           <a:lstStyle/>
           <a:p>
-            <a:pPr algn="ctr" indent="0" marL="0">
-              <a:buNone/>
-            </a:pPr>
-            <a:r>
-              <a:rPr lang="en-US" sz="1000" dirty="0">
+            <a:pPr indent="0" marL="0">
+              <a:buNone/>
+            </a:pPr>
+            <a:r>
+              <a:rPr lang="en-US" sz="950" dirty="0">
                 <a:solidFill>
                   <a:srgbClr val="5C6B63"/>
                 </a:solidFill>
@@ -7611,26 +3739,9 @@
                 <a:ea typeface="Calibri" pitchFamily="34" charset="-122"/>
                 <a:cs typeface="Calibri" pitchFamily="34" charset="-120"/>
               </a:rPr>
-              <a:t>Angular + MSAL</a:t>
-            </a:r>
-            <a:endParaRPr lang="en-US" sz="1000" dirty="0"/>
-          </a:p>
-          <a:p>
-            <a:pPr algn="ctr" indent="0" marL="0">
-              <a:buNone/>
-            </a:pPr>
-            <a:r>
-              <a:rPr lang="en-US" sz="1000" dirty="0">
-                <a:solidFill>
-                  <a:srgbClr val="5C6B63"/>
-                </a:solidFill>
-                <a:latin typeface="Calibri" pitchFamily="34" charset="0"/>
-                <a:ea typeface="Calibri" pitchFamily="34" charset="-122"/>
-                <a:cs typeface="Calibri" pitchFamily="34" charset="-120"/>
-              </a:rPr>
-              <a:t>nginx · EC2 · HTTPS</a:t>
-            </a:r>
-            <a:endParaRPr lang="en-US" sz="1000" dirty="0"/>
+              <a:t>navegador web</a:t>
+            </a:r>
+            <a:endParaRPr lang="en-US" sz="950" dirty="0"/>
           </a:p>
         </p:txBody>
       </p:sp>
@@ -7642,12 +3753,12 @@
         </p:nvSpPr>
         <p:spPr>
           <a:xfrm>
-            <a:off x="411480" y="3017520"/>
-            <a:ext cx="1463040" cy="1325880"/>
+            <a:off x="320040" y="2194560"/>
+            <a:ext cx="1371600" cy="1097280"/>
           </a:xfrm>
           <a:prstGeom prst="roundRect">
             <a:avLst>
-              <a:gd name="adj" fmla="val 8276"/>
+              <a:gd name="adj" fmla="val 10000"/>
             </a:avLst>
           </a:prstGeom>
           <a:solidFill>
@@ -7669,8 +3780,8 @@
         </p:nvSpPr>
         <p:spPr>
           <a:xfrm>
-            <a:off x="914400" y="3154680"/>
-            <a:ext cx="457200" cy="457200"/>
+            <a:off x="411480" y="2304288"/>
+            <a:ext cx="365760" cy="365760"/>
           </a:xfrm>
           <a:prstGeom prst="ellipse">
             <a:avLst/>
@@ -7702,8 +3813,8 @@
         </p:blipFill>
         <p:spPr>
           <a:xfrm>
-            <a:off x="1024128" y="3264408"/>
-            <a:ext cx="237744" cy="237744"/>
+            <a:off x="499262" y="2392070"/>
+            <a:ext cx="190195" cy="190195"/>
           </a:xfrm>
           <a:prstGeom prst="rect">
             <a:avLst/>
@@ -7718,8 +3829,8 @@
         </p:nvSpPr>
         <p:spPr>
           <a:xfrm>
-            <a:off x="411480" y="3675888"/>
-            <a:ext cx="1463040" cy="274320"/>
+            <a:off x="850392" y="2286000"/>
+            <a:ext cx="768096" cy="274320"/>
           </a:xfrm>
           <a:prstGeom prst="rect">
             <a:avLst/>
@@ -7728,14 +3839,14 @@
           <a:ln/>
         </p:spPr>
         <p:txBody>
-          <a:bodyPr wrap="square" lIns="0" tIns="0" rIns="0" bIns="0" rtlCol="0" anchor="t"/>
-          <a:lstStyle/>
-          <a:p>
-            <a:pPr algn="ctr" indent="0" marL="0">
-              <a:buNone/>
-            </a:pPr>
-            <a:r>
-              <a:rPr lang="en-US" sz="1300" b="1" dirty="0">
+          <a:bodyPr wrap="square" lIns="0" tIns="0" rIns="0" bIns="0" rtlCol="0" anchor="ctr"/>
+          <a:lstStyle/>
+          <a:p>
+            <a:pPr indent="0" marL="0">
+              <a:buNone/>
+            </a:pPr>
+            <a:r>
+              <a:rPr lang="en-US" sz="1150" b="1" dirty="0">
                 <a:solidFill>
                   <a:srgbClr val="FFFFFF"/>
                 </a:solidFill>
@@ -7745,7 +3856,7 @@
               </a:rPr>
               <a:t>Entra ID</a:t>
             </a:r>
-            <a:endParaRPr lang="en-US" sz="1300" dirty="0"/>
+            <a:endParaRPr lang="en-US" sz="1150" dirty="0"/>
           </a:p>
         </p:txBody>
       </p:sp>
@@ -7757,8 +3868,8 @@
         </p:nvSpPr>
         <p:spPr>
           <a:xfrm>
-            <a:off x="457200" y="3950208"/>
-            <a:ext cx="1371600" cy="347472"/>
+            <a:off x="429768" y="2724912"/>
+            <a:ext cx="1170432" cy="512064"/>
           </a:xfrm>
           <a:prstGeom prst="rect">
             <a:avLst/>
@@ -7770,11 +3881,11 @@
           <a:bodyPr wrap="square" lIns="0" tIns="0" rIns="0" bIns="0" rtlCol="0" anchor="t"/>
           <a:lstStyle/>
           <a:p>
-            <a:pPr algn="ctr" indent="0" marL="0">
-              <a:buNone/>
-            </a:pPr>
-            <a:r>
-              <a:rPr lang="en-US" sz="1000" dirty="0">
+            <a:pPr indent="0" marL="0">
+              <a:buNone/>
+            </a:pPr>
+            <a:r>
+              <a:rPr lang="en-US" sz="950" dirty="0">
                 <a:solidFill>
                   <a:srgbClr val="E8F5EE"/>
                 </a:solidFill>
@@ -7782,9 +3893,9 @@
                 <a:ea typeface="Calibri" pitchFamily="34" charset="-122"/>
                 <a:cs typeface="Calibri" pitchFamily="34" charset="-120"/>
               </a:rPr>
-              <a:t>IDaaS · usuarios y roles ENCARGADO / ADMIN</a:t>
-            </a:r>
-            <a:endParaRPr lang="en-US" sz="1000" dirty="0"/>
+              <a:t>IDaaS · login OIDC + PKCE · roles ENCARGADO / ADMIN</a:t>
+            </a:r>
+            <a:endParaRPr lang="en-US" sz="950" dirty="0"/>
           </a:p>
         </p:txBody>
       </p:sp>
@@ -7796,12 +3907,12 @@
         </p:nvSpPr>
         <p:spPr>
           <a:xfrm>
-            <a:off x="2240280" y="1188720"/>
-            <a:ext cx="1463040" cy="3154680"/>
+            <a:off x="320040" y="3520440"/>
+            <a:ext cx="1371600" cy="1005840"/>
           </a:xfrm>
           <a:prstGeom prst="roundRect">
             <a:avLst>
-              <a:gd name="adj" fmla="val 7500"/>
+              <a:gd name="adj" fmla="val 10909"/>
             </a:avLst>
           </a:prstGeom>
           <a:solidFill>
@@ -7823,8 +3934,8 @@
         </p:nvSpPr>
         <p:spPr>
           <a:xfrm>
-            <a:off x="2743200" y="1325880"/>
-            <a:ext cx="457200" cy="457200"/>
+            <a:off x="411480" y="3630168"/>
+            <a:ext cx="365760" cy="365760"/>
           </a:xfrm>
           <a:prstGeom prst="ellipse">
             <a:avLst/>
@@ -7856,8 +3967,8 @@
         </p:blipFill>
         <p:spPr>
           <a:xfrm>
-            <a:off x="2852928" y="1435608"/>
-            <a:ext cx="237744" cy="237744"/>
+            <a:off x="499262" y="3717950"/>
+            <a:ext cx="190195" cy="190195"/>
           </a:xfrm>
           <a:prstGeom prst="rect">
             <a:avLst/>
@@ -7872,8 +3983,8 @@
         </p:nvSpPr>
         <p:spPr>
           <a:xfrm>
-            <a:off x="2240280" y="1847088"/>
-            <a:ext cx="1463040" cy="274320"/>
+            <a:off x="850392" y="3611880"/>
+            <a:ext cx="768096" cy="274320"/>
           </a:xfrm>
           <a:prstGeom prst="rect">
             <a:avLst/>
@@ -7882,14 +3993,14 @@
           <a:ln/>
         </p:spPr>
         <p:txBody>
-          <a:bodyPr wrap="square" lIns="0" tIns="0" rIns="0" bIns="0" rtlCol="0" anchor="t"/>
-          <a:lstStyle/>
-          <a:p>
-            <a:pPr algn="ctr" indent="0" marL="0">
-              <a:buNone/>
-            </a:pPr>
-            <a:r>
-              <a:rPr lang="en-US" sz="1300" b="1" dirty="0">
+          <a:bodyPr wrap="square" lIns="0" tIns="0" rIns="0" bIns="0" rtlCol="0" anchor="ctr"/>
+          <a:lstStyle/>
+          <a:p>
+            <a:pPr indent="0" marL="0">
+              <a:buNone/>
+            </a:pPr>
+            <a:r>
+              <a:rPr lang="en-US" sz="1150" b="1" dirty="0">
                 <a:solidFill>
                   <a:srgbClr val="14342B"/>
                 </a:solidFill>
@@ -7897,9 +4008,9 @@
                 <a:ea typeface="Calibri" pitchFamily="34" charset="-122"/>
                 <a:cs typeface="Calibri" pitchFamily="34" charset="-120"/>
               </a:rPr>
-              <a:t>API Gateway</a:t>
-            </a:r>
-            <a:endParaRPr lang="en-US" sz="1300" dirty="0"/>
+              <a:t>Cloudflare</a:t>
+            </a:r>
+            <a:endParaRPr lang="en-US" sz="1150" dirty="0"/>
           </a:p>
         </p:txBody>
       </p:sp>
@@ -7911,8 +4022,8 @@
         </p:nvSpPr>
         <p:spPr>
           <a:xfrm>
-            <a:off x="2286000" y="2121408"/>
-            <a:ext cx="1371600" cy="2176272"/>
+            <a:off x="429768" y="4050792"/>
+            <a:ext cx="1170432" cy="420624"/>
           </a:xfrm>
           <a:prstGeom prst="rect">
             <a:avLst/>
@@ -7924,11 +4035,11 @@
           <a:bodyPr wrap="square" lIns="0" tIns="0" rIns="0" bIns="0" rtlCol="0" anchor="t"/>
           <a:lstStyle/>
           <a:p>
-            <a:pPr algn="ctr" indent="0" marL="0">
-              <a:buNone/>
-            </a:pPr>
-            <a:r>
-              <a:rPr lang="en-US" sz="1000" dirty="0">
+            <a:pPr indent="0" marL="0">
+              <a:buNone/>
+            </a:pPr>
+            <a:r>
+              <a:rPr lang="en-US" sz="950" dirty="0">
                 <a:solidFill>
                   <a:srgbClr val="5C6B63"/>
                 </a:solidFill>
@@ -7936,72 +4047,9 @@
                 <a:ea typeface="Calibri" pitchFamily="34" charset="-122"/>
                 <a:cs typeface="Calibri" pitchFamily="34" charset="-120"/>
               </a:rPr>
-              <a:t>HTTP API · 12 rutas</a:t>
-            </a:r>
-            <a:endParaRPr lang="en-US" sz="1000" dirty="0"/>
-          </a:p>
-          <a:p>
-            <a:pPr algn="ctr" indent="0" marL="0">
-              <a:buNone/>
-            </a:pPr>
-            <a:endParaRPr lang="en-US" sz="1000" dirty="0"/>
-          </a:p>
-          <a:p>
-            <a:pPr algn="ctr" indent="0" marL="0">
-              <a:buNone/>
-            </a:pPr>
-            <a:r>
-              <a:rPr lang="en-US" sz="1000" dirty="0">
-                <a:solidFill>
-                  <a:srgbClr val="5C6B63"/>
-                </a:solidFill>
-                <a:latin typeface="Calibri" pitchFamily="34" charset="0"/>
-                <a:ea typeface="Calibri" pitchFamily="34" charset="-122"/>
-                <a:cs typeface="Calibri" pitchFamily="34" charset="-120"/>
-              </a:rPr>
-              <a:t>JWT authorizer</a:t>
-            </a:r>
-            <a:endParaRPr lang="en-US" sz="1000" dirty="0"/>
-          </a:p>
-          <a:p>
-            <a:pPr algn="ctr" indent="0" marL="0">
-              <a:buNone/>
-            </a:pPr>
-            <a:r>
-              <a:rPr lang="en-US" sz="1000" dirty="0">
-                <a:solidFill>
-                  <a:srgbClr val="5C6B63"/>
-                </a:solidFill>
-                <a:latin typeface="Calibri" pitchFamily="34" charset="0"/>
-                <a:ea typeface="Calibri" pitchFamily="34" charset="-122"/>
-                <a:cs typeface="Calibri" pitchFamily="34" charset="-120"/>
-              </a:rPr>
-              <a:t>+ CORS</a:t>
-            </a:r>
-            <a:endParaRPr lang="en-US" sz="1000" dirty="0"/>
-          </a:p>
-          <a:p>
-            <a:pPr algn="ctr" indent="0" marL="0">
-              <a:buNone/>
-            </a:pPr>
-            <a:endParaRPr lang="en-US" sz="1000" dirty="0"/>
-          </a:p>
-          <a:p>
-            <a:pPr algn="ctr" indent="0" marL="0">
-              <a:buNone/>
-            </a:pPr>
-            <a:r>
-              <a:rPr lang="en-US" sz="1000" dirty="0">
-                <a:solidFill>
-                  <a:srgbClr val="5C6B63"/>
-                </a:solidFill>
-                <a:latin typeface="Calibri" pitchFamily="34" charset="0"/>
-                <a:ea typeface="Calibri" pitchFamily="34" charset="-122"/>
-                <a:cs typeface="Calibri" pitchFamily="34" charset="-120"/>
-              </a:rPr>
-              <a:t>enruta a cada microservicio</a:t>
-            </a:r>
-            <a:endParaRPr lang="en-US" sz="1000" dirty="0"/>
+              <a:t>DNS: ecopunto y ecopunto-api → Elastic IP</a:t>
+            </a:r>
+            <a:endParaRPr lang="en-US" sz="950" dirty="0"/>
           </a:p>
         </p:txBody>
       </p:sp>
@@ -8013,12 +4061,449 @@
         </p:nvSpPr>
         <p:spPr>
           <a:xfrm>
-            <a:off x="3977640" y="1024128"/>
-            <a:ext cx="4754880" cy="3429000"/>
+            <a:off x="1874520" y="1005840"/>
+            <a:ext cx="6949440" cy="3611880"/>
           </a:xfrm>
           <a:prstGeom prst="roundRect">
             <a:avLst>
-              <a:gd name="adj" fmla="val 2667"/>
+              <a:gd name="adj" fmla="val 2025"/>
+            </a:avLst>
+          </a:prstGeom>
+          <a:solidFill>
+            <a:srgbClr val="F7FBF9"/>
+          </a:solidFill>
+          <a:ln w="15875">
+            <a:solidFill>
+              <a:srgbClr val="2D6A4F"/>
+            </a:solidFill>
+            <a:prstDash val="solid"/>
+          </a:ln>
+        </p:spPr>
+      </p:sp>
+      <p:sp>
+        <p:nvSpPr>
+          <p:cNvPr id="19" name="Text 14"/>
+          <p:cNvSpPr txBox="1"/>
+          <p:nvPr/>
+        </p:nvSpPr>
+        <p:spPr>
+          <a:xfrm>
+            <a:off x="2011680" y="1051560"/>
+            <a:ext cx="2743200" cy="228600"/>
+          </a:xfrm>
+          <a:prstGeom prst="rect">
+            <a:avLst/>
+          </a:prstGeom>
+          <a:noFill/>
+          <a:ln/>
+        </p:spPr>
+        <p:txBody>
+          <a:bodyPr wrap="square" lIns="0" tIns="0" rIns="0" bIns="0" rtlCol="0" anchor="t"/>
+          <a:lstStyle/>
+          <a:p>
+            <a:pPr indent="0" marL="0">
+              <a:buNone/>
+            </a:pPr>
+            <a:r>
+              <a:rPr lang="en-US" sz="1000" b="1" dirty="0">
+                <a:solidFill>
+                  <a:srgbClr val="2D6A4F"/>
+                </a:solidFill>
+                <a:latin typeface="Calibri" pitchFamily="34" charset="0"/>
+                <a:ea typeface="Calibri" pitchFamily="34" charset="-122"/>
+                <a:cs typeface="Calibri" pitchFamily="34" charset="-120"/>
+              </a:rPr>
+              <a:t>AWS · us-east-1</a:t>
+            </a:r>
+            <a:endParaRPr lang="en-US" sz="1000" dirty="0"/>
+          </a:p>
+        </p:txBody>
+      </p:sp>
+      <p:sp>
+        <p:nvSpPr>
+          <p:cNvPr id="20" name="Shape 15"/>
+          <p:cNvSpPr/>
+          <p:nvPr/>
+        </p:nvSpPr>
+        <p:spPr>
+          <a:xfrm>
+            <a:off x="2011680" y="1325880"/>
+            <a:ext cx="1554480" cy="960120"/>
+          </a:xfrm>
+          <a:prstGeom prst="roundRect">
+            <a:avLst>
+              <a:gd name="adj" fmla="val 11429"/>
+            </a:avLst>
+          </a:prstGeom>
+          <a:solidFill>
+            <a:srgbClr val="FFFFFF"/>
+          </a:solidFill>
+          <a:ln w="12700">
+            <a:solidFill>
+              <a:srgbClr val="D5E8DD"/>
+            </a:solidFill>
+            <a:prstDash val="solid"/>
+          </a:ln>
+        </p:spPr>
+      </p:sp>
+      <p:sp>
+        <p:nvSpPr>
+          <p:cNvPr id="21" name="Shape 16"/>
+          <p:cNvSpPr/>
+          <p:nvPr/>
+        </p:nvSpPr>
+        <p:spPr>
+          <a:xfrm>
+            <a:off x="2103120" y="1435608"/>
+            <a:ext cx="365760" cy="365760"/>
+          </a:xfrm>
+          <a:prstGeom prst="ellipse">
+            <a:avLst/>
+          </a:prstGeom>
+          <a:solidFill>
+            <a:srgbClr val="2D6A4F"/>
+          </a:solidFill>
+          <a:ln w="12700">
+            <a:solidFill>
+              <a:srgbClr val="2D6A4F"/>
+            </a:solidFill>
+            <a:prstDash val="solid"/>
+          </a:ln>
+        </p:spPr>
+      </p:sp>
+      <p:pic>
+        <p:nvPicPr>
+          <p:cNvPr id="22" name="Image 3" descr="preencoded.png">    </p:cNvPr>
+          <p:cNvPicPr>
+            <a:picLocks noChangeAspect="1"/>
+          </p:cNvPicPr>
+          <p:nvPr/>
+        </p:nvPicPr>
+        <p:blipFill>
+          <a:blip r:embed="rId4"/>
+          <a:stretch>
+            <a:fillRect/>
+          </a:stretch>
+        </p:blipFill>
+        <p:spPr>
+          <a:xfrm>
+            <a:off x="2190902" y="1523390"/>
+            <a:ext cx="190195" cy="190195"/>
+          </a:xfrm>
+          <a:prstGeom prst="rect">
+            <a:avLst/>
+          </a:prstGeom>
+        </p:spPr>
+      </p:pic>
+      <p:sp>
+        <p:nvSpPr>
+          <p:cNvPr id="23" name="Text 17"/>
+          <p:cNvSpPr txBox="1"/>
+          <p:nvPr/>
+        </p:nvSpPr>
+        <p:spPr>
+          <a:xfrm>
+            <a:off x="2542032" y="1417320"/>
+            <a:ext cx="950976" cy="274320"/>
+          </a:xfrm>
+          <a:prstGeom prst="rect">
+            <a:avLst/>
+          </a:prstGeom>
+          <a:noFill/>
+          <a:ln/>
+        </p:spPr>
+        <p:txBody>
+          <a:bodyPr wrap="square" lIns="0" tIns="0" rIns="0" bIns="0" rtlCol="0" anchor="ctr"/>
+          <a:lstStyle/>
+          <a:p>
+            <a:pPr indent="0" marL="0">
+              <a:buNone/>
+            </a:pPr>
+            <a:r>
+              <a:rPr lang="en-US" sz="1150" b="1" dirty="0">
+                <a:solidFill>
+                  <a:srgbClr val="14342B"/>
+                </a:solidFill>
+                <a:latin typeface="Calibri" pitchFamily="34" charset="0"/>
+                <a:ea typeface="Calibri" pitchFamily="34" charset="-122"/>
+                <a:cs typeface="Calibri" pitchFamily="34" charset="-120"/>
+              </a:rPr>
+              <a:t>EC2 frontend</a:t>
+            </a:r>
+            <a:endParaRPr lang="en-US" sz="1150" dirty="0"/>
+          </a:p>
+        </p:txBody>
+      </p:sp>
+      <p:sp>
+        <p:nvSpPr>
+          <p:cNvPr id="24" name="Text 18"/>
+          <p:cNvSpPr txBox="1"/>
+          <p:nvPr/>
+        </p:nvSpPr>
+        <p:spPr>
+          <a:xfrm>
+            <a:off x="2121408" y="1856232"/>
+            <a:ext cx="1353312" cy="374904"/>
+          </a:xfrm>
+          <a:prstGeom prst="rect">
+            <a:avLst/>
+          </a:prstGeom>
+          <a:noFill/>
+          <a:ln/>
+        </p:spPr>
+        <p:txBody>
+          <a:bodyPr wrap="square" lIns="0" tIns="0" rIns="0" bIns="0" rtlCol="0" anchor="t"/>
+          <a:lstStyle/>
+          <a:p>
+            <a:pPr indent="0" marL="0">
+              <a:buNone/>
+            </a:pPr>
+            <a:r>
+              <a:rPr lang="en-US" sz="950" dirty="0">
+                <a:solidFill>
+                  <a:srgbClr val="5C6B63"/>
+                </a:solidFill>
+                <a:latin typeface="Calibri" pitchFamily="34" charset="0"/>
+                <a:ea typeface="Calibri" pitchFamily="34" charset="-122"/>
+                <a:cs typeface="Calibri" pitchFamily="34" charset="-120"/>
+              </a:rPr>
+              <a:t>t3.micro · nginx + Angular · HTTPS Let's Encrypt</a:t>
+            </a:r>
+            <a:endParaRPr lang="en-US" sz="950" dirty="0"/>
+          </a:p>
+        </p:txBody>
+      </p:sp>
+      <p:sp>
+        <p:nvSpPr>
+          <p:cNvPr id="25" name="Shape 19"/>
+          <p:cNvSpPr/>
+          <p:nvPr/>
+        </p:nvSpPr>
+        <p:spPr>
+          <a:xfrm>
+            <a:off x="2011680" y="2606040"/>
+            <a:ext cx="1554480" cy="1874520"/>
+          </a:xfrm>
+          <a:prstGeom prst="roundRect">
+            <a:avLst>
+              <a:gd name="adj" fmla="val 7059"/>
+            </a:avLst>
+          </a:prstGeom>
+          <a:solidFill>
+            <a:srgbClr val="FFFFFF"/>
+          </a:solidFill>
+          <a:ln w="12700">
+            <a:solidFill>
+              <a:srgbClr val="D5E8DD"/>
+            </a:solidFill>
+            <a:prstDash val="solid"/>
+          </a:ln>
+        </p:spPr>
+      </p:sp>
+      <p:sp>
+        <p:nvSpPr>
+          <p:cNvPr id="26" name="Shape 20"/>
+          <p:cNvSpPr/>
+          <p:nvPr/>
+        </p:nvSpPr>
+        <p:spPr>
+          <a:xfrm>
+            <a:off x="2103120" y="2715768"/>
+            <a:ext cx="365760" cy="365760"/>
+          </a:xfrm>
+          <a:prstGeom prst="ellipse">
+            <a:avLst/>
+          </a:prstGeom>
+          <a:solidFill>
+            <a:srgbClr val="2D6A4F"/>
+          </a:solidFill>
+          <a:ln w="12700">
+            <a:solidFill>
+              <a:srgbClr val="2D6A4F"/>
+            </a:solidFill>
+            <a:prstDash val="solid"/>
+          </a:ln>
+        </p:spPr>
+      </p:sp>
+      <p:pic>
+        <p:nvPicPr>
+          <p:cNvPr id="27" name="Image 4" descr="preencoded.png">    </p:cNvPr>
+          <p:cNvPicPr>
+            <a:picLocks noChangeAspect="1"/>
+          </p:cNvPicPr>
+          <p:nvPr/>
+        </p:nvPicPr>
+        <p:blipFill>
+          <a:blip r:embed="rId5"/>
+          <a:stretch>
+            <a:fillRect/>
+          </a:stretch>
+        </p:blipFill>
+        <p:spPr>
+          <a:xfrm>
+            <a:off x="2190902" y="2803550"/>
+            <a:ext cx="190195" cy="190195"/>
+          </a:xfrm>
+          <a:prstGeom prst="rect">
+            <a:avLst/>
+          </a:prstGeom>
+        </p:spPr>
+      </p:pic>
+      <p:sp>
+        <p:nvSpPr>
+          <p:cNvPr id="28" name="Text 21"/>
+          <p:cNvSpPr txBox="1"/>
+          <p:nvPr/>
+        </p:nvSpPr>
+        <p:spPr>
+          <a:xfrm>
+            <a:off x="2542032" y="2697480"/>
+            <a:ext cx="950976" cy="274320"/>
+          </a:xfrm>
+          <a:prstGeom prst="rect">
+            <a:avLst/>
+          </a:prstGeom>
+          <a:noFill/>
+          <a:ln/>
+        </p:spPr>
+        <p:txBody>
+          <a:bodyPr wrap="square" lIns="0" tIns="0" rIns="0" bIns="0" rtlCol="0" anchor="ctr"/>
+          <a:lstStyle/>
+          <a:p>
+            <a:pPr indent="0" marL="0">
+              <a:buNone/>
+            </a:pPr>
+            <a:r>
+              <a:rPr lang="en-US" sz="1150" b="1" dirty="0">
+                <a:solidFill>
+                  <a:srgbClr val="14342B"/>
+                </a:solidFill>
+                <a:latin typeface="Calibri" pitchFamily="34" charset="0"/>
+                <a:ea typeface="Calibri" pitchFamily="34" charset="-122"/>
+                <a:cs typeface="Calibri" pitchFamily="34" charset="-120"/>
+              </a:rPr>
+              <a:t>API Gateway</a:t>
+            </a:r>
+            <a:endParaRPr lang="en-US" sz="1150" dirty="0"/>
+          </a:p>
+        </p:txBody>
+      </p:sp>
+      <p:sp>
+        <p:nvSpPr>
+          <p:cNvPr id="29" name="Text 22"/>
+          <p:cNvSpPr txBox="1"/>
+          <p:nvPr/>
+        </p:nvSpPr>
+        <p:spPr>
+          <a:xfrm>
+            <a:off x="2121408" y="3136392"/>
+            <a:ext cx="1353312" cy="1289304"/>
+          </a:xfrm>
+          <a:prstGeom prst="rect">
+            <a:avLst/>
+          </a:prstGeom>
+          <a:noFill/>
+          <a:ln/>
+        </p:spPr>
+        <p:txBody>
+          <a:bodyPr wrap="square" lIns="0" tIns="0" rIns="0" bIns="0" rtlCol="0" anchor="t"/>
+          <a:lstStyle/>
+          <a:p>
+            <a:pPr indent="0" marL="0">
+              <a:buNone/>
+            </a:pPr>
+            <a:r>
+              <a:rPr lang="en-US" sz="950" dirty="0">
+                <a:solidFill>
+                  <a:srgbClr val="5C6B63"/>
+                </a:solidFill>
+                <a:latin typeface="Calibri" pitchFamily="34" charset="0"/>
+                <a:ea typeface="Calibri" pitchFamily="34" charset="-122"/>
+                <a:cs typeface="Calibri" pitchFamily="34" charset="-120"/>
+              </a:rPr>
+              <a:t>HTTP API · 12 rutas</a:t>
+            </a:r>
+            <a:endParaRPr lang="en-US" sz="950" dirty="0"/>
+          </a:p>
+          <a:p>
+            <a:pPr indent="0" marL="0">
+              <a:buNone/>
+            </a:pPr>
+            <a:endParaRPr lang="en-US" sz="950" dirty="0"/>
+          </a:p>
+          <a:p>
+            <a:pPr indent="0" marL="0">
+              <a:buNone/>
+            </a:pPr>
+            <a:r>
+              <a:rPr lang="en-US" sz="950" dirty="0">
+                <a:solidFill>
+                  <a:srgbClr val="5C6B63"/>
+                </a:solidFill>
+                <a:latin typeface="Calibri" pitchFamily="34" charset="0"/>
+                <a:ea typeface="Calibri" pitchFamily="34" charset="-122"/>
+                <a:cs typeface="Calibri" pitchFamily="34" charset="-120"/>
+              </a:rPr>
+              <a:t>JWT authorizer (401)</a:t>
+            </a:r>
+            <a:endParaRPr lang="en-US" sz="950" dirty="0"/>
+          </a:p>
+          <a:p>
+            <a:pPr indent="0" marL="0">
+              <a:buNone/>
+            </a:pPr>
+            <a:r>
+              <a:rPr lang="en-US" sz="950" dirty="0">
+                <a:solidFill>
+                  <a:srgbClr val="5C6B63"/>
+                </a:solidFill>
+                <a:latin typeface="Calibri" pitchFamily="34" charset="0"/>
+                <a:ea typeface="Calibri" pitchFamily="34" charset="-122"/>
+                <a:cs typeface="Calibri" pitchFamily="34" charset="-120"/>
+              </a:rPr>
+              <a:t>+ CORS</a:t>
+            </a:r>
+            <a:endParaRPr lang="en-US" sz="950" dirty="0"/>
+          </a:p>
+          <a:p>
+            <a:pPr indent="0" marL="0">
+              <a:buNone/>
+            </a:pPr>
+            <a:endParaRPr lang="en-US" sz="950" dirty="0"/>
+          </a:p>
+          <a:p>
+            <a:pPr indent="0" marL="0">
+              <a:buNone/>
+            </a:pPr>
+            <a:r>
+              <a:rPr lang="en-US" sz="950" dirty="0">
+                <a:solidFill>
+                  <a:srgbClr val="5C6B63"/>
+                </a:solidFill>
+                <a:latin typeface="Calibri" pitchFamily="34" charset="0"/>
+                <a:ea typeface="Calibri" pitchFamily="34" charset="-122"/>
+                <a:cs typeface="Calibri" pitchFamily="34" charset="-120"/>
+              </a:rPr>
+              <a:t>enruta por puerto a cada microservicio</a:t>
+            </a:r>
+            <a:endParaRPr lang="en-US" sz="950" dirty="0"/>
+          </a:p>
+        </p:txBody>
+      </p:sp>
+      <p:sp>
+        <p:nvSpPr>
+          <p:cNvPr id="30" name="Shape 23"/>
+          <p:cNvSpPr/>
+          <p:nvPr/>
+        </p:nvSpPr>
+        <p:spPr>
+          <a:xfrm>
+            <a:off x="3749040" y="1325880"/>
+            <a:ext cx="4937760" cy="3154680"/>
+          </a:xfrm>
+          <a:prstGeom prst="roundRect">
+            <a:avLst>
+              <a:gd name="adj" fmla="val 2319"/>
             </a:avLst>
           </a:prstGeom>
           <a:solidFill>
@@ -8034,14 +4519,14 @@
       </p:sp>
       <p:sp>
         <p:nvSpPr>
-          <p:cNvPr id="19" name="Text 14"/>
+          <p:cNvPr id="31" name="Text 24"/>
           <p:cNvSpPr txBox="1"/>
           <p:nvPr/>
         </p:nvSpPr>
         <p:spPr>
           <a:xfrm>
-            <a:off x="4114800" y="1069848"/>
-            <a:ext cx="4572000" cy="228600"/>
+            <a:off x="3858768" y="1371600"/>
+            <a:ext cx="4754880" cy="228600"/>
           </a:xfrm>
           <a:prstGeom prst="rect">
             <a:avLst/>
@@ -8065,7 +4550,7 @@
                 <a:ea typeface="Calibri" pitchFamily="34" charset="-122"/>
                 <a:cs typeface="Calibri" pitchFamily="34" charset="-120"/>
               </a:rPr>
-              <a:t>EC2 ecopunto-backend · docker compose · 8 contenedores</a:t>
+              <a:t>EC2 backend · t3.medium · docker compose · 8 contenedores</a:t>
             </a:r>
             <a:endParaRPr lang="en-US" sz="1000" dirty="0"/>
           </a:p>
@@ -8073,18 +4558,18 @@
       </p:sp>
       <p:sp>
         <p:nvSpPr>
-          <p:cNvPr id="20" name="Shape 15"/>
+          <p:cNvPr id="32" name="Shape 25"/>
           <p:cNvSpPr/>
           <p:nvPr/>
         </p:nvSpPr>
         <p:spPr>
           <a:xfrm>
-            <a:off x="4160520" y="1371600"/>
-            <a:ext cx="1600200" cy="603504"/>
+            <a:off x="3886200" y="1691640"/>
+            <a:ext cx="1508760" cy="548640"/>
           </a:xfrm>
           <a:prstGeom prst="roundRect">
             <a:avLst>
-              <a:gd name="adj" fmla="val 18182"/>
+              <a:gd name="adj" fmla="val 20000"/>
             </a:avLst>
           </a:prstGeom>
           <a:solidFill>
@@ -8100,14 +4585,14 @@
       </p:sp>
       <p:sp>
         <p:nvSpPr>
-          <p:cNvPr id="21" name="Text 16"/>
+          <p:cNvPr id="33" name="Text 26"/>
           <p:cNvSpPr txBox="1"/>
           <p:nvPr/>
         </p:nvSpPr>
         <p:spPr>
           <a:xfrm>
-            <a:off x="4251960" y="1371600"/>
-            <a:ext cx="1417320" cy="603504"/>
+            <a:off x="3959352" y="1691640"/>
+            <a:ext cx="1380744" cy="548640"/>
           </a:xfrm>
           <a:prstGeom prst="rect">
             <a:avLst/>
@@ -8123,7 +4608,7 @@
               <a:buNone/>
             </a:pPr>
             <a:r>
-              <a:rPr lang="en-US" sz="1200" b="1" dirty="0">
+              <a:rPr lang="en-US" sz="1100" b="1" dirty="0">
                 <a:solidFill>
                   <a:srgbClr val="14342B"/>
                 </a:solidFill>
@@ -8133,14 +4618,14 @@
               </a:rPr>
               <a:t>backend :8080</a:t>
             </a:r>
-            <a:endParaRPr lang="en-US" sz="1200" dirty="0"/>
+            <a:endParaRPr lang="en-US" sz="1100" dirty="0"/>
           </a:p>
           <a:p>
             <a:pPr indent="0" marL="0">
               <a:buNone/>
             </a:pPr>
             <a:r>
-              <a:rPr lang="en-US" sz="1000" dirty="0">
+              <a:rPr lang="en-US" sz="950" dirty="0">
                 <a:solidFill>
                   <a:srgbClr val="5C6B63"/>
                 </a:solidFill>
@@ -8148,26 +4633,26 @@
                 <a:ea typeface="Calibri" pitchFamily="34" charset="-122"/>
                 <a:cs typeface="Calibri" pitchFamily="34" charset="-120"/>
               </a:rPr>
-              <a:t>productor de eventos</a:t>
-            </a:r>
-            <a:endParaRPr lang="en-US" sz="1200" dirty="0"/>
-          </a:p>
-        </p:txBody>
-      </p:sp>
-      <p:sp>
-        <p:nvSpPr>
-          <p:cNvPr id="22" name="Shape 17"/>
+              <a:t>productor</a:t>
+            </a:r>
+            <a:endParaRPr lang="en-US" sz="1100" dirty="0"/>
+          </a:p>
+        </p:txBody>
+      </p:sp>
+      <p:sp>
+        <p:nvSpPr>
+          <p:cNvPr id="34" name="Shape 27"/>
           <p:cNvSpPr/>
           <p:nvPr/>
         </p:nvSpPr>
         <p:spPr>
           <a:xfrm>
-            <a:off x="4160520" y="2066544"/>
-            <a:ext cx="1600200" cy="603504"/>
+            <a:off x="3886200" y="2377440"/>
+            <a:ext cx="1508760" cy="548640"/>
           </a:xfrm>
           <a:prstGeom prst="roundRect">
             <a:avLst>
-              <a:gd name="adj" fmla="val 18182"/>
+              <a:gd name="adj" fmla="val 20000"/>
             </a:avLst>
           </a:prstGeom>
           <a:solidFill>
@@ -8183,14 +4668,14 @@
       </p:sp>
       <p:sp>
         <p:nvSpPr>
-          <p:cNvPr id="23" name="Text 18"/>
+          <p:cNvPr id="35" name="Text 28"/>
           <p:cNvSpPr txBox="1"/>
           <p:nvPr/>
         </p:nvSpPr>
         <p:spPr>
           <a:xfrm>
-            <a:off x="4251960" y="2066544"/>
-            <a:ext cx="1417320" cy="603504"/>
+            <a:off x="3959352" y="2377440"/>
+            <a:ext cx="1380744" cy="548640"/>
           </a:xfrm>
           <a:prstGeom prst="rect">
             <a:avLst/>
@@ -8206,7 +4691,7 @@
               <a:buNone/>
             </a:pPr>
             <a:r>
-              <a:rPr lang="en-US" sz="1200" b="1" dirty="0">
+              <a:rPr lang="en-US" sz="1100" b="1" dirty="0">
                 <a:solidFill>
                   <a:srgbClr val="14342B"/>
                 </a:solidFill>
@@ -8216,14 +4701,14 @@
               </a:rPr>
               <a:t>ms-estadisticas :8082</a:t>
             </a:r>
-            <a:endParaRPr lang="en-US" sz="1200" dirty="0"/>
+            <a:endParaRPr lang="en-US" sz="1100" dirty="0"/>
           </a:p>
           <a:p>
             <a:pPr indent="0" marL="0">
               <a:buNone/>
             </a:pPr>
             <a:r>
-              <a:rPr lang="en-US" sz="1000" dirty="0">
+              <a:rPr lang="en-US" sz="950" dirty="0">
                 <a:solidFill>
                   <a:srgbClr val="5C6B63"/>
                 </a:solidFill>
@@ -8233,24 +4718,24 @@
               </a:rPr>
               <a:t>consumidor</a:t>
             </a:r>
-            <a:endParaRPr lang="en-US" sz="1200" dirty="0"/>
-          </a:p>
-        </p:txBody>
-      </p:sp>
-      <p:sp>
-        <p:nvSpPr>
-          <p:cNvPr id="24" name="Shape 19"/>
+            <a:endParaRPr lang="en-US" sz="1100" dirty="0"/>
+          </a:p>
+        </p:txBody>
+      </p:sp>
+      <p:sp>
+        <p:nvSpPr>
+          <p:cNvPr id="36" name="Shape 29"/>
           <p:cNvSpPr/>
           <p:nvPr/>
         </p:nvSpPr>
         <p:spPr>
           <a:xfrm>
-            <a:off x="4160520" y="2761488"/>
-            <a:ext cx="1600200" cy="603504"/>
+            <a:off x="3886200" y="3063240"/>
+            <a:ext cx="1508760" cy="548640"/>
           </a:xfrm>
           <a:prstGeom prst="roundRect">
             <a:avLst>
-              <a:gd name="adj" fmla="val 18182"/>
+              <a:gd name="adj" fmla="val 20000"/>
             </a:avLst>
           </a:prstGeom>
           <a:solidFill>
@@ -8266,14 +4751,14 @@
       </p:sp>
       <p:sp>
         <p:nvSpPr>
-          <p:cNvPr id="25" name="Text 20"/>
+          <p:cNvPr id="37" name="Text 30"/>
           <p:cNvSpPr txBox="1"/>
           <p:nvPr/>
         </p:nvSpPr>
         <p:spPr>
           <a:xfrm>
-            <a:off x="4251960" y="2761488"/>
-            <a:ext cx="1417320" cy="603504"/>
+            <a:off x="3959352" y="3063240"/>
+            <a:ext cx="1380744" cy="548640"/>
           </a:xfrm>
           <a:prstGeom prst="rect">
             <a:avLst/>
@@ -8289,7 +4774,7 @@
               <a:buNone/>
             </a:pPr>
             <a:r>
-              <a:rPr lang="en-US" sz="1200" b="1" dirty="0">
+              <a:rPr lang="en-US" sz="1100" b="1" dirty="0">
                 <a:solidFill>
                   <a:srgbClr val="14342B"/>
                 </a:solidFill>
@@ -8299,14 +4784,14 @@
               </a:rPr>
               <a:t>ms-tickets :8083</a:t>
             </a:r>
-            <a:endParaRPr lang="en-US" sz="1200" dirty="0"/>
+            <a:endParaRPr lang="en-US" sz="1100" dirty="0"/>
           </a:p>
           <a:p>
             <a:pPr indent="0" marL="0">
               <a:buNone/>
             </a:pPr>
             <a:r>
-              <a:rPr lang="en-US" sz="1000" dirty="0">
+              <a:rPr lang="en-US" sz="950" dirty="0">
                 <a:solidFill>
                   <a:srgbClr val="5C6B63"/>
                 </a:solidFill>
@@ -8316,24 +4801,24 @@
               </a:rPr>
               <a:t>consumidor</a:t>
             </a:r>
-            <a:endParaRPr lang="en-US" sz="1200" dirty="0"/>
-          </a:p>
-        </p:txBody>
-      </p:sp>
-      <p:sp>
-        <p:nvSpPr>
-          <p:cNvPr id="26" name="Shape 21"/>
+            <a:endParaRPr lang="en-US" sz="1100" dirty="0"/>
+          </a:p>
+        </p:txBody>
+      </p:sp>
+      <p:sp>
+        <p:nvSpPr>
+          <p:cNvPr id="38" name="Shape 31"/>
           <p:cNvSpPr/>
           <p:nvPr/>
         </p:nvSpPr>
         <p:spPr>
           <a:xfrm>
-            <a:off x="4160520" y="3456432"/>
-            <a:ext cx="1600200" cy="603504"/>
+            <a:off x="3886200" y="3749040"/>
+            <a:ext cx="1508760" cy="548640"/>
           </a:xfrm>
           <a:prstGeom prst="roundRect">
             <a:avLst>
-              <a:gd name="adj" fmla="val 18182"/>
+              <a:gd name="adj" fmla="val 20000"/>
             </a:avLst>
           </a:prstGeom>
           <a:solidFill>
@@ -8349,14 +4834,14 @@
       </p:sp>
       <p:sp>
         <p:nvSpPr>
-          <p:cNvPr id="27" name="Text 22"/>
+          <p:cNvPr id="39" name="Text 32"/>
           <p:cNvSpPr txBox="1"/>
           <p:nvPr/>
         </p:nvSpPr>
         <p:spPr>
           <a:xfrm>
-            <a:off x="4251960" y="3456432"/>
-            <a:ext cx="1417320" cy="603504"/>
+            <a:off x="3959352" y="3749040"/>
+            <a:ext cx="1380744" cy="548640"/>
           </a:xfrm>
           <a:prstGeom prst="rect">
             <a:avLst/>
@@ -8372,7 +4857,7 @@
               <a:buNone/>
             </a:pPr>
             <a:r>
-              <a:rPr lang="en-US" sz="1200" b="1" dirty="0">
+              <a:rPr lang="en-US" sz="1100" b="1" dirty="0">
                 <a:solidFill>
                   <a:srgbClr val="14342B"/>
                 </a:solidFill>
@@ -8382,14 +4867,14 @@
               </a:rPr>
               <a:t>ms-rabbit-admin :8084</a:t>
             </a:r>
-            <a:endParaRPr lang="en-US" sz="1200" dirty="0"/>
+            <a:endParaRPr lang="en-US" sz="1100" dirty="0"/>
           </a:p>
           <a:p>
             <a:pPr indent="0" marL="0">
               <a:buNone/>
             </a:pPr>
             <a:r>
-              <a:rPr lang="en-US" sz="1000" dirty="0">
+              <a:rPr lang="en-US" sz="950" dirty="0">
                 <a:solidFill>
                   <a:srgbClr val="5C6B63"/>
                 </a:solidFill>
@@ -8397,26 +4882,26 @@
                 <a:ea typeface="Calibri" pitchFamily="34" charset="-122"/>
                 <a:cs typeface="Calibri" pitchFamily="34" charset="-120"/>
               </a:rPr>
-              <a:t>administrador (ADMIN)</a:t>
-            </a:r>
-            <a:endParaRPr lang="en-US" sz="1200" dirty="0"/>
-          </a:p>
-        </p:txBody>
-      </p:sp>
-      <p:sp>
-        <p:nvSpPr>
-          <p:cNvPr id="28" name="Shape 23"/>
+              <a:t>administra el broker</a:t>
+            </a:r>
+            <a:endParaRPr lang="en-US" sz="1100" dirty="0"/>
+          </a:p>
+        </p:txBody>
+      </p:sp>
+      <p:sp>
+        <p:nvSpPr>
+          <p:cNvPr id="40" name="Shape 33"/>
           <p:cNvSpPr/>
           <p:nvPr/>
         </p:nvSpPr>
         <p:spPr>
           <a:xfrm>
-            <a:off x="6035040" y="1371600"/>
-            <a:ext cx="1234440" cy="2688336"/>
+            <a:off x="5577840" y="1691640"/>
+            <a:ext cx="1691640" cy="2606040"/>
           </a:xfrm>
           <a:prstGeom prst="roundRect">
             <a:avLst>
-              <a:gd name="adj" fmla="val 8889"/>
+              <a:gd name="adj" fmla="val 6486"/>
             </a:avLst>
           </a:prstGeom>
           <a:solidFill>
@@ -8432,14 +4917,14 @@
       </p:sp>
       <p:sp>
         <p:nvSpPr>
-          <p:cNvPr id="29" name="Text 24"/>
+          <p:cNvPr id="41" name="Text 34"/>
           <p:cNvSpPr txBox="1"/>
           <p:nvPr/>
         </p:nvSpPr>
         <p:spPr>
           <a:xfrm>
-            <a:off x="6035040" y="1463040"/>
-            <a:ext cx="1234440" cy="274320"/>
+            <a:off x="5577840" y="1764792"/>
+            <a:ext cx="1691640" cy="256032"/>
           </a:xfrm>
           <a:prstGeom prst="rect">
             <a:avLst/>
@@ -8455,7 +4940,7 @@
               <a:buNone/>
             </a:pPr>
             <a:r>
-              <a:rPr lang="en-US" sz="1300" b="1" dirty="0">
+              <a:rPr lang="en-US" sz="1150" b="1" dirty="0">
                 <a:solidFill>
                   <a:srgbClr val="FFFFFF"/>
                 </a:solidFill>
@@ -8463,26 +4948,26 @@
                 <a:ea typeface="Calibri" pitchFamily="34" charset="-122"/>
                 <a:cs typeface="Calibri" pitchFamily="34" charset="-120"/>
               </a:rPr>
-              <a:t>RabbitMQ</a:t>
-            </a:r>
-            <a:endParaRPr lang="en-US" sz="1300" dirty="0"/>
-          </a:p>
-        </p:txBody>
-      </p:sp>
-      <p:sp>
-        <p:nvSpPr>
-          <p:cNvPr id="30" name="Shape 25"/>
+              <a:t>Clúster RabbitMQ</a:t>
+            </a:r>
+            <a:endParaRPr lang="en-US" sz="1150" dirty="0"/>
+          </a:p>
+        </p:txBody>
+      </p:sp>
+      <p:sp>
+        <p:nvSpPr>
+          <p:cNvPr id="42" name="Shape 35"/>
           <p:cNvSpPr/>
           <p:nvPr/>
         </p:nvSpPr>
         <p:spPr>
           <a:xfrm>
-            <a:off x="6144768" y="1828800"/>
-            <a:ext cx="1014984" cy="411480"/>
+            <a:off x="5650992" y="2103120"/>
+            <a:ext cx="749808" cy="658368"/>
           </a:xfrm>
           <a:prstGeom prst="roundRect">
             <a:avLst>
-              <a:gd name="adj" fmla="val 26667"/>
+              <a:gd name="adj" fmla="val 16667"/>
             </a:avLst>
           </a:prstGeom>
           <a:solidFill>
@@ -8498,14 +4983,14 @@
       </p:sp>
       <p:sp>
         <p:nvSpPr>
-          <p:cNvPr id="31" name="Text 26"/>
+          <p:cNvPr id="43" name="Text 36"/>
           <p:cNvSpPr txBox="1"/>
           <p:nvPr/>
         </p:nvSpPr>
         <p:spPr>
           <a:xfrm>
-            <a:off x="6144768" y="1828800"/>
-            <a:ext cx="1014984" cy="411480"/>
+            <a:off x="5650992" y="2103120"/>
+            <a:ext cx="749808" cy="658368"/>
           </a:xfrm>
           <a:prstGeom prst="rect">
             <a:avLst/>
@@ -8521,7 +5006,7 @@
               <a:buNone/>
             </a:pPr>
             <a:r>
-              <a:rPr lang="en-US" sz="1200" b="1" dirty="0">
+              <a:rPr lang="en-US" sz="1100" b="1" dirty="0">
                 <a:solidFill>
                   <a:srgbClr val="14342B"/>
                 </a:solidFill>
@@ -8531,24 +5016,41 @@
               </a:rPr>
               <a:t>rabbit1</a:t>
             </a:r>
-            <a:endParaRPr lang="en-US" sz="1200" dirty="0"/>
-          </a:p>
-        </p:txBody>
-      </p:sp>
-      <p:sp>
-        <p:nvSpPr>
-          <p:cNvPr id="32" name="Shape 27"/>
+            <a:endParaRPr lang="en-US" sz="1100" dirty="0"/>
+          </a:p>
+          <a:p>
+            <a:pPr algn="ctr" indent="0" marL="0">
+              <a:buNone/>
+            </a:pPr>
+            <a:r>
+              <a:rPr lang="en-US" sz="750" dirty="0">
+                <a:solidFill>
+                  <a:srgbClr val="14342B"/>
+                </a:solidFill>
+                <a:latin typeface="Calibri" pitchFamily="34" charset="0"/>
+                <a:ea typeface="Calibri" pitchFamily="34" charset="-122"/>
+                <a:cs typeface="Calibri" pitchFamily="34" charset="-120"/>
+              </a:rPr>
+              <a:t>:5672 · :15672</a:t>
+            </a:r>
+            <a:endParaRPr lang="en-US" sz="1100" dirty="0"/>
+          </a:p>
+        </p:txBody>
+      </p:sp>
+      <p:sp>
+        <p:nvSpPr>
+          <p:cNvPr id="44" name="Shape 37"/>
           <p:cNvSpPr/>
           <p:nvPr/>
         </p:nvSpPr>
         <p:spPr>
           <a:xfrm>
-            <a:off x="6144768" y="2331720"/>
-            <a:ext cx="1014984" cy="411480"/>
+            <a:off x="6455664" y="2103120"/>
+            <a:ext cx="749808" cy="658368"/>
           </a:xfrm>
           <a:prstGeom prst="roundRect">
             <a:avLst>
-              <a:gd name="adj" fmla="val 26667"/>
+              <a:gd name="adj" fmla="val 16667"/>
             </a:avLst>
           </a:prstGeom>
           <a:solidFill>
@@ -8564,14 +5066,14 @@
       </p:sp>
       <p:sp>
         <p:nvSpPr>
-          <p:cNvPr id="33" name="Text 28"/>
+          <p:cNvPr id="45" name="Text 38"/>
           <p:cNvSpPr txBox="1"/>
           <p:nvPr/>
         </p:nvSpPr>
         <p:spPr>
           <a:xfrm>
-            <a:off x="6144768" y="2331720"/>
-            <a:ext cx="1014984" cy="411480"/>
+            <a:off x="6455664" y="2103120"/>
+            <a:ext cx="749808" cy="658368"/>
           </a:xfrm>
           <a:prstGeom prst="rect">
             <a:avLst/>
@@ -8587,7 +5089,7 @@
               <a:buNone/>
             </a:pPr>
             <a:r>
-              <a:rPr lang="en-US" sz="1200" b="1" dirty="0">
+              <a:rPr lang="en-US" sz="1100" b="1" dirty="0">
                 <a:solidFill>
                   <a:srgbClr val="14342B"/>
                 </a:solidFill>
@@ -8597,20 +5099,37 @@
               </a:rPr>
               <a:t>rabbit2</a:t>
             </a:r>
-            <a:endParaRPr lang="en-US" sz="1200" dirty="0"/>
-          </a:p>
-        </p:txBody>
-      </p:sp>
-      <p:sp>
-        <p:nvSpPr>
-          <p:cNvPr id="34" name="Text 29"/>
+            <a:endParaRPr lang="en-US" sz="1100" dirty="0"/>
+          </a:p>
+          <a:p>
+            <a:pPr algn="ctr" indent="0" marL="0">
+              <a:buNone/>
+            </a:pPr>
+            <a:r>
+              <a:rPr lang="en-US" sz="750" dirty="0">
+                <a:solidFill>
+                  <a:srgbClr val="14342B"/>
+                </a:solidFill>
+                <a:latin typeface="Calibri" pitchFamily="34" charset="0"/>
+                <a:ea typeface="Calibri" pitchFamily="34" charset="-122"/>
+                <a:cs typeface="Calibri" pitchFamily="34" charset="-120"/>
+              </a:rPr>
+              <a:t>:5673 · :15673</a:t>
+            </a:r>
+            <a:endParaRPr lang="en-US" sz="1100" dirty="0"/>
+          </a:p>
+        </p:txBody>
+      </p:sp>
+      <p:sp>
+        <p:nvSpPr>
+          <p:cNvPr id="46" name="Text 39"/>
           <p:cNvSpPr txBox="1"/>
           <p:nvPr/>
         </p:nvSpPr>
         <p:spPr>
           <a:xfrm>
-            <a:off x="6080760" y="2852928"/>
-            <a:ext cx="1143000" cy="1097280"/>
+            <a:off x="5623560" y="2926080"/>
+            <a:ext cx="1600200" cy="1234440"/>
           </a:xfrm>
           <a:prstGeom prst="rect">
             <a:avLst/>
@@ -8626,7 +5145,7 @@
               <a:buNone/>
             </a:pPr>
             <a:r>
-              <a:rPr lang="en-US" sz="1000" dirty="0">
+              <a:rPr lang="en-US" sz="950" dirty="0">
                 <a:solidFill>
                   <a:srgbClr val="E8F5EE"/>
                 </a:solidFill>
@@ -8634,16 +5153,22 @@
                 <a:ea typeface="Calibri" pitchFamily="34" charset="-122"/>
                 <a:cs typeface="Calibri" pitchFamily="34" charset="-120"/>
               </a:rPr>
-              <a:t>clúster</a:t>
-            </a:r>
-            <a:endParaRPr lang="en-US" sz="1000" dirty="0"/>
+              <a:t>6 colas quorum replicadas en los 2 nodos</a:t>
+            </a:r>
+            <a:endParaRPr lang="en-US" sz="950" dirty="0"/>
           </a:p>
           <a:p>
             <a:pPr algn="ctr" indent="0" marL="0">
               <a:buNone/>
             </a:pPr>
-            <a:r>
-              <a:rPr lang="en-US" sz="1000" dirty="0">
+            <a:endParaRPr lang="en-US" sz="950" dirty="0"/>
+          </a:p>
+          <a:p>
+            <a:pPr algn="ctr" indent="0" marL="0">
+              <a:buNone/>
+            </a:pPr>
+            <a:r>
+              <a:rPr lang="en-US" sz="950" dirty="0">
                 <a:solidFill>
                   <a:srgbClr val="E8F5EE"/>
                 </a:solidFill>
@@ -8651,43 +5176,26 @@
                 <a:ea typeface="Calibri" pitchFamily="34" charset="-122"/>
                 <a:cs typeface="Calibri" pitchFamily="34" charset="-120"/>
               </a:rPr>
-              <a:t>6 colas quorum</a:t>
-            </a:r>
-            <a:endParaRPr lang="en-US" sz="1000" dirty="0"/>
-          </a:p>
-          <a:p>
-            <a:pPr algn="ctr" indent="0" marL="0">
-              <a:buNone/>
-            </a:pPr>
-            <a:r>
-              <a:rPr lang="en-US" sz="1000" dirty="0">
-                <a:solidFill>
-                  <a:srgbClr val="E8F5EE"/>
-                </a:solidFill>
-                <a:latin typeface="Calibri" pitchFamily="34" charset="0"/>
-                <a:ea typeface="Calibri" pitchFamily="34" charset="-122"/>
-                <a:cs typeface="Calibri" pitchFamily="34" charset="-120"/>
-              </a:rPr>
               <a:t>topic · direct · dlx</a:t>
             </a:r>
-            <a:endParaRPr lang="en-US" sz="1000" dirty="0"/>
-          </a:p>
-        </p:txBody>
-      </p:sp>
-      <p:sp>
-        <p:nvSpPr>
-          <p:cNvPr id="35" name="Shape 30"/>
+            <a:endParaRPr lang="en-US" sz="950" dirty="0"/>
+          </a:p>
+        </p:txBody>
+      </p:sp>
+      <p:sp>
+        <p:nvSpPr>
+          <p:cNvPr id="47" name="Shape 40"/>
           <p:cNvSpPr/>
           <p:nvPr/>
         </p:nvSpPr>
         <p:spPr>
           <a:xfrm>
-            <a:off x="7452360" y="1371600"/>
-            <a:ext cx="1207008" cy="822960"/>
+            <a:off x="7424928" y="1691640"/>
+            <a:ext cx="1152144" cy="777240"/>
           </a:xfrm>
           <a:prstGeom prst="roundRect">
             <a:avLst>
-              <a:gd name="adj" fmla="val 13333"/>
+              <a:gd name="adj" fmla="val 14118"/>
             </a:avLst>
           </a:prstGeom>
           <a:solidFill>
@@ -8703,14 +5211,14 @@
       </p:sp>
       <p:sp>
         <p:nvSpPr>
-          <p:cNvPr id="36" name="Text 31"/>
+          <p:cNvPr id="48" name="Text 41"/>
           <p:cNvSpPr txBox="1"/>
           <p:nvPr/>
         </p:nvSpPr>
         <p:spPr>
           <a:xfrm>
-            <a:off x="7543800" y="1371600"/>
-            <a:ext cx="1024128" cy="822960"/>
+            <a:off x="7498080" y="1691640"/>
+            <a:ext cx="1024128" cy="777240"/>
           </a:xfrm>
           <a:prstGeom prst="rect">
             <a:avLst/>
@@ -8726,7 +5234,7 @@
               <a:buNone/>
             </a:pPr>
             <a:r>
-              <a:rPr lang="en-US" sz="1050" b="1" dirty="0">
+              <a:rPr lang="en-US" sz="950" b="1" dirty="0">
                 <a:solidFill>
                   <a:srgbClr val="14342B"/>
                 </a:solidFill>
@@ -8736,14 +5244,14 @@
               </a:rPr>
               <a:t>ms-notificaciones</a:t>
             </a:r>
-            <a:endParaRPr lang="en-US" sz="1050" dirty="0"/>
+            <a:endParaRPr lang="en-US" sz="950" dirty="0"/>
           </a:p>
           <a:p>
             <a:pPr indent="0" marL="0">
               <a:buNone/>
             </a:pPr>
             <a:r>
-              <a:rPr lang="en-US" sz="1000" dirty="0">
+              <a:rPr lang="en-US" sz="950" dirty="0">
                 <a:solidFill>
                   <a:srgbClr val="5C6B63"/>
                 </a:solidFill>
@@ -8753,24 +5261,24 @@
               </a:rPr>
               <a:t>consumidor</a:t>
             </a:r>
-            <a:endParaRPr lang="en-US" sz="1050" dirty="0"/>
-          </a:p>
-        </p:txBody>
-      </p:sp>
-      <p:sp>
-        <p:nvSpPr>
-          <p:cNvPr id="37" name="Shape 32"/>
+            <a:endParaRPr lang="en-US" sz="950" dirty="0"/>
+          </a:p>
+        </p:txBody>
+      </p:sp>
+      <p:sp>
+        <p:nvSpPr>
+          <p:cNvPr id="49" name="Shape 42"/>
           <p:cNvSpPr/>
           <p:nvPr/>
         </p:nvSpPr>
         <p:spPr>
           <a:xfrm>
-            <a:off x="7452360" y="2743200"/>
-            <a:ext cx="1207008" cy="1316736"/>
+            <a:off x="7424928" y="2651760"/>
+            <a:ext cx="1152144" cy="1645920"/>
           </a:xfrm>
           <a:prstGeom prst="roundRect">
             <a:avLst>
-              <a:gd name="adj" fmla="val 9091"/>
+              <a:gd name="adj" fmla="val 9524"/>
             </a:avLst>
           </a:prstGeom>
           <a:solidFill>
@@ -8786,14 +5294,14 @@
       </p:sp>
       <p:sp>
         <p:nvSpPr>
-          <p:cNvPr id="38" name="Text 33"/>
+          <p:cNvPr id="50" name="Text 43"/>
           <p:cNvSpPr txBox="1"/>
           <p:nvPr/>
         </p:nvSpPr>
         <p:spPr>
           <a:xfrm>
-            <a:off x="7543800" y="2743200"/>
-            <a:ext cx="1024128" cy="1316736"/>
+            <a:off x="7498080" y="2651760"/>
+            <a:ext cx="1024128" cy="1645920"/>
           </a:xfrm>
           <a:prstGeom prst="rect">
             <a:avLst/>
@@ -8809,7 +5317,7 @@
               <a:buNone/>
             </a:pPr>
             <a:r>
-              <a:rPr lang="en-US" sz="1200" b="1" dirty="0">
+              <a:rPr lang="en-US" sz="1050" b="1" dirty="0">
                 <a:solidFill>
                   <a:srgbClr val="14342B"/>
                 </a:solidFill>
@@ -8819,14 +5327,14 @@
               </a:rPr>
               <a:t>PostgreSQL</a:t>
             </a:r>
-            <a:endParaRPr lang="en-US" sz="1200" dirty="0"/>
+            <a:endParaRPr lang="en-US" sz="1050" dirty="0"/>
           </a:p>
           <a:p>
             <a:pPr indent="0" marL="0">
               <a:buNone/>
             </a:pPr>
             <a:r>
-              <a:rPr lang="en-US" sz="1000" dirty="0">
+              <a:rPr lang="en-US" sz="950" dirty="0">
                 <a:solidFill>
                   <a:srgbClr val="5C6B63"/>
                 </a:solidFill>
@@ -8834,22 +5342,22 @@
                 <a:ea typeface="Calibri" pitchFamily="34" charset="-122"/>
                 <a:cs typeface="Calibri" pitchFamily="34" charset="-120"/>
               </a:rPr>
-              <a:t>una base por servicio · volumen</a:t>
-            </a:r>
-            <a:endParaRPr lang="en-US" sz="1200" dirty="0"/>
-          </a:p>
-        </p:txBody>
-      </p:sp>
-      <p:sp>
-        <p:nvSpPr>
-          <p:cNvPr id="39" name="Shape 34"/>
+              <a:t>4 bases, una por servicio · volumen</a:t>
+            </a:r>
+            <a:endParaRPr lang="en-US" sz="1050" dirty="0"/>
+          </a:p>
+        </p:txBody>
+      </p:sp>
+      <p:sp>
+        <p:nvSpPr>
+          <p:cNvPr id="51" name="Shape 44"/>
           <p:cNvSpPr/>
           <p:nvPr/>
         </p:nvSpPr>
         <p:spPr>
           <a:xfrm>
-            <a:off x="1874520" y="1847088"/>
-            <a:ext cx="365760" cy="0"/>
+            <a:off x="1691640" y="1600200"/>
+            <a:ext cx="320040" cy="0"/>
           </a:xfrm>
           <a:prstGeom prst="line">
             <a:avLst/>
@@ -8866,14 +5374,14 @@
       </p:sp>
       <p:sp>
         <p:nvSpPr>
-          <p:cNvPr id="40" name="Shape 35"/>
+          <p:cNvPr id="52" name="Shape 45"/>
           <p:cNvSpPr/>
           <p:nvPr/>
         </p:nvSpPr>
         <p:spPr>
           <a:xfrm>
-            <a:off x="3703320" y="2743200"/>
-            <a:ext cx="457200" cy="0"/>
+            <a:off x="2788920" y="2286000"/>
+            <a:ext cx="0" cy="320040"/>
           </a:xfrm>
           <a:prstGeom prst="line">
             <a:avLst/>
@@ -8890,14 +5398,86 @@
       </p:sp>
       <p:sp>
         <p:nvSpPr>
-          <p:cNvPr id="41" name="Shape 36"/>
+          <p:cNvPr id="53" name="Shape 46"/>
           <p:cNvSpPr/>
           <p:nvPr/>
         </p:nvSpPr>
         <p:spPr>
           <a:xfrm>
-            <a:off x="5760720" y="1673352"/>
-            <a:ext cx="274320" cy="0"/>
+            <a:off x="3566160" y="3520440"/>
+            <a:ext cx="320040" cy="0"/>
+          </a:xfrm>
+          <a:prstGeom prst="line">
+            <a:avLst/>
+          </a:prstGeom>
+          <a:noFill/>
+          <a:ln w="25400">
+            <a:solidFill>
+              <a:srgbClr val="2D6A4F"/>
+            </a:solidFill>
+            <a:prstDash val="solid"/>
+            <a:tailEnd type="triangle"/>
+          </a:ln>
+        </p:spPr>
+      </p:sp>
+      <p:sp>
+        <p:nvSpPr>
+          <p:cNvPr id="54" name="Shape 47"/>
+          <p:cNvSpPr/>
+          <p:nvPr/>
+        </p:nvSpPr>
+        <p:spPr>
+          <a:xfrm flipV="1">
+            <a:off x="1005840" y="1965960"/>
+            <a:ext cx="0" cy="228600"/>
+          </a:xfrm>
+          <a:prstGeom prst="line">
+            <a:avLst/>
+          </a:prstGeom>
+          <a:noFill/>
+          <a:ln w="19050">
+            <a:solidFill>
+              <a:srgbClr val="F4A261"/>
+            </a:solidFill>
+            <a:prstDash val="solid"/>
+            <a:tailEnd type="triangle"/>
+          </a:ln>
+        </p:spPr>
+      </p:sp>
+      <p:sp>
+        <p:nvSpPr>
+          <p:cNvPr id="55" name="Shape 48"/>
+          <p:cNvSpPr/>
+          <p:nvPr/>
+        </p:nvSpPr>
+        <p:spPr>
+          <a:xfrm flipH="1">
+            <a:off x="1691640" y="2926080"/>
+            <a:ext cx="320040" cy="0"/>
+          </a:xfrm>
+          <a:prstGeom prst="line">
+            <a:avLst/>
+          </a:prstGeom>
+          <a:noFill/>
+          <a:ln w="19050">
+            <a:solidFill>
+              <a:srgbClr val="F4A261"/>
+            </a:solidFill>
+            <a:prstDash val="solid"/>
+            <a:tailEnd type="triangle"/>
+          </a:ln>
+        </p:spPr>
+      </p:sp>
+      <p:sp>
+        <p:nvSpPr>
+          <p:cNvPr id="56" name="Shape 49"/>
+          <p:cNvSpPr/>
+          <p:nvPr/>
+        </p:nvSpPr>
+        <p:spPr>
+          <a:xfrm>
+            <a:off x="5394960" y="1965960"/>
+            <a:ext cx="182880" cy="0"/>
           </a:xfrm>
           <a:prstGeom prst="line">
             <a:avLst/>
@@ -8914,14 +5494,14 @@
       </p:sp>
       <p:sp>
         <p:nvSpPr>
-          <p:cNvPr id="42" name="Shape 37"/>
+          <p:cNvPr id="57" name="Shape 50"/>
           <p:cNvSpPr/>
           <p:nvPr/>
         </p:nvSpPr>
         <p:spPr>
           <a:xfrm flipH="1">
-            <a:off x="5760720" y="2368296"/>
-            <a:ext cx="274320" cy="0"/>
+            <a:off x="5394960" y="2651760"/>
+            <a:ext cx="182880" cy="0"/>
           </a:xfrm>
           <a:prstGeom prst="line">
             <a:avLst/>
@@ -8938,14 +5518,14 @@
       </p:sp>
       <p:sp>
         <p:nvSpPr>
-          <p:cNvPr id="43" name="Shape 38"/>
+          <p:cNvPr id="58" name="Shape 51"/>
           <p:cNvSpPr/>
           <p:nvPr/>
         </p:nvSpPr>
         <p:spPr>
           <a:xfrm flipH="1">
-            <a:off x="5760720" y="3063240"/>
-            <a:ext cx="274320" cy="0"/>
+            <a:off x="5394960" y="3337560"/>
+            <a:ext cx="182880" cy="0"/>
           </a:xfrm>
           <a:prstGeom prst="line">
             <a:avLst/>
@@ -8962,14 +5542,38 @@
       </p:sp>
       <p:sp>
         <p:nvSpPr>
-          <p:cNvPr id="44" name="Shape 39"/>
+          <p:cNvPr id="59" name="Shape 52"/>
           <p:cNvSpPr/>
           <p:nvPr/>
         </p:nvSpPr>
         <p:spPr>
           <a:xfrm>
-            <a:off x="5760720" y="3758184"/>
-            <a:ext cx="274320" cy="0"/>
+            <a:off x="5394960" y="4023360"/>
+            <a:ext cx="182880" cy="0"/>
+          </a:xfrm>
+          <a:prstGeom prst="line">
+            <a:avLst/>
+          </a:prstGeom>
+          <a:noFill/>
+          <a:ln w="25400">
+            <a:solidFill>
+              <a:srgbClr val="2D6A4F"/>
+            </a:solidFill>
+            <a:prstDash val="solid"/>
+            <a:tailEnd type="triangle"/>
+          </a:ln>
+        </p:spPr>
+      </p:sp>
+      <p:sp>
+        <p:nvSpPr>
+          <p:cNvPr id="60" name="Shape 53"/>
+          <p:cNvSpPr/>
+          <p:nvPr/>
+        </p:nvSpPr>
+        <p:spPr>
+          <a:xfrm>
+            <a:off x="7269480" y="2075688"/>
+            <a:ext cx="155448" cy="0"/>
           </a:xfrm>
           <a:prstGeom prst="line">
             <a:avLst/>
@@ -8986,86 +5590,14 @@
       </p:sp>
       <p:sp>
         <p:nvSpPr>
-          <p:cNvPr id="45" name="Shape 40"/>
-          <p:cNvSpPr/>
-          <p:nvPr/>
-        </p:nvSpPr>
-        <p:spPr>
-          <a:xfrm>
-            <a:off x="7269480" y="1783080"/>
-            <a:ext cx="182880" cy="0"/>
-          </a:xfrm>
-          <a:prstGeom prst="line">
-            <a:avLst/>
-          </a:prstGeom>
-          <a:noFill/>
-          <a:ln w="25400">
-            <a:solidFill>
-              <a:srgbClr val="F4A261"/>
-            </a:solidFill>
-            <a:prstDash val="solid"/>
-            <a:tailEnd type="triangle"/>
-          </a:ln>
-        </p:spPr>
-      </p:sp>
-      <p:sp>
-        <p:nvSpPr>
-          <p:cNvPr id="46" name="Shape 41"/>
-          <p:cNvSpPr/>
-          <p:nvPr/>
-        </p:nvSpPr>
-        <p:spPr>
-          <a:xfrm flipV="1">
-            <a:off x="1143000" y="2514600"/>
-            <a:ext cx="0" cy="502920"/>
-          </a:xfrm>
-          <a:prstGeom prst="line">
-            <a:avLst/>
-          </a:prstGeom>
-          <a:noFill/>
-          <a:ln w="19050">
-            <a:solidFill>
-              <a:srgbClr val="F4A261"/>
-            </a:solidFill>
-            <a:prstDash val="solid"/>
-            <a:tailEnd type="triangle"/>
-          </a:ln>
-        </p:spPr>
-      </p:sp>
-      <p:sp>
-        <p:nvSpPr>
-          <p:cNvPr id="47" name="Shape 42"/>
-          <p:cNvSpPr/>
-          <p:nvPr/>
-        </p:nvSpPr>
-        <p:spPr>
-          <a:xfrm>
-            <a:off x="1874520" y="3657600"/>
-            <a:ext cx="365760" cy="0"/>
-          </a:xfrm>
-          <a:prstGeom prst="line">
-            <a:avLst/>
-          </a:prstGeom>
-          <a:noFill/>
-          <a:ln w="19050">
-            <a:solidFill>
-              <a:srgbClr val="F4A261"/>
-            </a:solidFill>
-            <a:prstDash val="solid"/>
-            <a:tailEnd type="triangle"/>
-          </a:ln>
-        </p:spPr>
-      </p:sp>
-      <p:sp>
-        <p:nvSpPr>
-          <p:cNvPr id="48" name="Text 43"/>
+          <p:cNvPr id="61" name="Text 54"/>
           <p:cNvSpPr txBox="1"/>
           <p:nvPr/>
         </p:nvSpPr>
         <p:spPr>
           <a:xfrm>
-            <a:off x="411480" y="4553712"/>
-            <a:ext cx="8321040" cy="320040"/>
+            <a:off x="320040" y="4690872"/>
+            <a:ext cx="8503920" cy="274320"/>
           </a:xfrm>
           <a:prstGeom prst="rect">
             <a:avLst/>
@@ -9103,7 +5635,7 @@
                 <a:ea typeface="Calibri" pitchFamily="34" charset="-122"/>
                 <a:cs typeface="Calibri" pitchFamily="34" charset="-120"/>
               </a:rPr>
-              <a:t>Naranjo: mensajes AMQP y login OIDC/JWKS · </a:t>
+              <a:t>Naranjo: mensajes AMQP y login OIDC / JWKS · </a:t>
             </a:r>
             <a:pPr indent="0" marL="0">
               <a:buNone/>
@@ -9117,7 +5649,7 @@
                 <a:ea typeface="Calibri" pitchFamily="34" charset="-122"/>
                 <a:cs typeface="Calibri" pitchFamily="34" charset="-120"/>
               </a:rPr>
-              <a:t>Frontend en ecopunto.larraguibel.dev con Let's Encrypt; ambas EC2 con Elastic IP</a:t>
+              <a:t>Elastic IP: frontend 34.207.44.149 · backend 34.203.5.9</a:t>
             </a:r>
             <a:endParaRPr lang="en-US" sz="1000" dirty="0"/>
           </a:p>
